--- a/documents/명함제작/[2026 우리가치(WeValue) QI 활동 프로젝트 명함3(앞).pptx
+++ b/documents/명함제작/[2026 우리가치(WeValue) QI 활동 프로젝트 명함3(앞).pptx
@@ -19,22 +19,38 @@
   <p:notesSz cx="6858000" cy="9945688"/>
   <p:embeddedFontLst>
     <p:embeddedFont>
+      <p:font typeface="KoPub돋움체 Light" panose="02020603020101020101" pitchFamily="18" charset="-127"/>
+      <p:regular r:id="rId9"/>
+    </p:embeddedFont>
+    <p:embeddedFont>
+      <p:font typeface="Calibri" panose="020F0502020204030204" pitchFamily="34" charset="0"/>
+      <p:regular r:id="rId10"/>
+      <p:bold r:id="rId11"/>
+      <p:italic r:id="rId12"/>
+      <p:boldItalic r:id="rId13"/>
+    </p:embeddedFont>
+    <p:embeddedFont>
+      <p:font typeface="Calibri Light" panose="020F0302020204030204" pitchFamily="34" charset="0"/>
+      <p:regular r:id="rId14"/>
+      <p:italic r:id="rId15"/>
+    </p:embeddedFont>
+    <p:embeddedFont>
       <p:font typeface="Franklin Gothic Heavy" panose="020B0903020102020204" pitchFamily="34" charset="0"/>
-      <p:regular r:id="rId9"/>
-      <p:italic r:id="rId10"/>
+      <p:regular r:id="rId16"/>
+      <p:italic r:id="rId17"/>
     </p:embeddedFont>
     <p:embeddedFont>
       <p:font typeface="KoPub돋움체 Bold" panose="02020603020101020101" pitchFamily="18" charset="-127"/>
-      <p:regular r:id="rId11"/>
+      <p:regular r:id="rId18"/>
     </p:embeddedFont>
     <p:embeddedFont>
       <p:font typeface="Noto Sans KR Black" panose="020B0200000000000000" pitchFamily="50" charset="-127"/>
-      <p:bold r:id="rId12"/>
+      <p:bold r:id="rId19"/>
     </p:embeddedFont>
     <p:embeddedFont>
       <p:font typeface="맑은 고딕" panose="020B0503020000020004" pitchFamily="50" charset="-127"/>
-      <p:regular r:id="rId13"/>
-      <p:bold r:id="rId14"/>
+      <p:regular r:id="rId20"/>
+      <p:bold r:id="rId21"/>
     </p:embeddedFont>
   </p:embeddedFontLst>
   <p:defaultTextStyle>
@@ -171,6 +187,105 @@
 </p:presentation>
 </file>
 
+<file path=ppt/changesInfos/changesInfo1.xml><?xml version="1.0" encoding="utf-8"?>
+<pc:chgInfo xmlns:a="http://schemas.openxmlformats.org/drawingml/2006/main" xmlns:r="http://schemas.openxmlformats.org/officeDocument/2006/relationships" xmlns:ac="http://schemas.microsoft.com/office/drawing/2013/main/command" xmlns:pc="http://schemas.microsoft.com/office/powerpoint/2013/main/command">
+  <pc:docChgLst>
+    <pc:chgData name="민민 성" userId="cf1f1df607fbac1a" providerId="LiveId" clId="{8A23C339-EF1C-4F94-8085-8ECCBA9E7EE0}"/>
+    <pc:docChg chg="addSld delSld modSld">
+      <pc:chgData name="민민 성" userId="cf1f1df607fbac1a" providerId="LiveId" clId="{8A23C339-EF1C-4F94-8085-8ECCBA9E7EE0}" dt="2026-07-11T05:39:55.690" v="7"/>
+      <pc:docMkLst>
+        <pc:docMk/>
+      </pc:docMkLst>
+      <pc:sldChg chg="modSp mod">
+        <pc:chgData name="민민 성" userId="cf1f1df607fbac1a" providerId="LiveId" clId="{8A23C339-EF1C-4F94-8085-8ECCBA9E7EE0}" dt="2026-07-11T05:39:40.260" v="1" actId="404"/>
+        <pc:sldMkLst>
+          <pc:docMk/>
+          <pc:sldMk cId="4063746640" sldId="270"/>
+        </pc:sldMkLst>
+        <pc:spChg chg="mod">
+          <ac:chgData name="민민 성" userId="cf1f1df607fbac1a" providerId="LiveId" clId="{8A23C339-EF1C-4F94-8085-8ECCBA9E7EE0}" dt="2026-07-11T05:39:40.260" v="1" actId="404"/>
+          <ac:spMkLst>
+            <pc:docMk/>
+            <pc:sldMk cId="4063746640" sldId="270"/>
+            <ac:spMk id="31" creationId="{8286C7F5-77BB-B584-5E2E-82705B55B19B}"/>
+          </ac:spMkLst>
+        </pc:spChg>
+      </pc:sldChg>
+      <pc:sldChg chg="add">
+        <pc:chgData name="민민 성" userId="cf1f1df607fbac1a" providerId="LiveId" clId="{8A23C339-EF1C-4F94-8085-8ECCBA9E7EE0}" dt="2026-07-11T05:39:55.042" v="3"/>
+        <pc:sldMkLst>
+          <pc:docMk/>
+          <pc:sldMk cId="2870025244" sldId="271"/>
+        </pc:sldMkLst>
+      </pc:sldChg>
+      <pc:sldChg chg="del">
+        <pc:chgData name="민민 성" userId="cf1f1df607fbac1a" providerId="LiveId" clId="{8A23C339-EF1C-4F94-8085-8ECCBA9E7EE0}" dt="2026-07-11T05:39:53.409" v="2" actId="47"/>
+        <pc:sldMkLst>
+          <pc:docMk/>
+          <pc:sldMk cId="3435437932" sldId="271"/>
+        </pc:sldMkLst>
+      </pc:sldChg>
+      <pc:sldChg chg="add">
+        <pc:chgData name="민민 성" userId="cf1f1df607fbac1a" providerId="LiveId" clId="{8A23C339-EF1C-4F94-8085-8ECCBA9E7EE0}" dt="2026-07-11T05:39:55.147" v="4"/>
+        <pc:sldMkLst>
+          <pc:docMk/>
+          <pc:sldMk cId="885637962" sldId="272"/>
+        </pc:sldMkLst>
+      </pc:sldChg>
+      <pc:sldChg chg="del">
+        <pc:chgData name="민민 성" userId="cf1f1df607fbac1a" providerId="LiveId" clId="{8A23C339-EF1C-4F94-8085-8ECCBA9E7EE0}" dt="2026-07-11T05:39:53.409" v="2" actId="47"/>
+        <pc:sldMkLst>
+          <pc:docMk/>
+          <pc:sldMk cId="3678952818" sldId="272"/>
+        </pc:sldMkLst>
+      </pc:sldChg>
+      <pc:sldChg chg="del">
+        <pc:chgData name="민민 성" userId="cf1f1df607fbac1a" providerId="LiveId" clId="{8A23C339-EF1C-4F94-8085-8ECCBA9E7EE0}" dt="2026-07-11T05:39:53.409" v="2" actId="47"/>
+        <pc:sldMkLst>
+          <pc:docMk/>
+          <pc:sldMk cId="1936089100" sldId="273"/>
+        </pc:sldMkLst>
+      </pc:sldChg>
+      <pc:sldChg chg="add">
+        <pc:chgData name="민민 성" userId="cf1f1df607fbac1a" providerId="LiveId" clId="{8A23C339-EF1C-4F94-8085-8ECCBA9E7EE0}" dt="2026-07-11T05:39:55.324" v="5"/>
+        <pc:sldMkLst>
+          <pc:docMk/>
+          <pc:sldMk cId="3905268026" sldId="273"/>
+        </pc:sldMkLst>
+      </pc:sldChg>
+      <pc:sldChg chg="del">
+        <pc:chgData name="민민 성" userId="cf1f1df607fbac1a" providerId="LiveId" clId="{8A23C339-EF1C-4F94-8085-8ECCBA9E7EE0}" dt="2026-07-11T05:39:53.409" v="2" actId="47"/>
+        <pc:sldMkLst>
+          <pc:docMk/>
+          <pc:sldMk cId="3268644569" sldId="274"/>
+        </pc:sldMkLst>
+      </pc:sldChg>
+      <pc:sldChg chg="add">
+        <pc:chgData name="민민 성" userId="cf1f1df607fbac1a" providerId="LiveId" clId="{8A23C339-EF1C-4F94-8085-8ECCBA9E7EE0}" dt="2026-07-11T05:39:55.502" v="6"/>
+        <pc:sldMkLst>
+          <pc:docMk/>
+          <pc:sldMk cId="3869668911" sldId="274"/>
+        </pc:sldMkLst>
+      </pc:sldChg>
+      <pc:sldChg chg="del">
+        <pc:chgData name="민민 성" userId="cf1f1df607fbac1a" providerId="LiveId" clId="{8A23C339-EF1C-4F94-8085-8ECCBA9E7EE0}" dt="2026-07-11T05:39:53.409" v="2" actId="47"/>
+        <pc:sldMkLst>
+          <pc:docMk/>
+          <pc:sldMk cId="549628975" sldId="275"/>
+        </pc:sldMkLst>
+      </pc:sldChg>
+      <pc:sldChg chg="add">
+        <pc:chgData name="민민 성" userId="cf1f1df607fbac1a" providerId="LiveId" clId="{8A23C339-EF1C-4F94-8085-8ECCBA9E7EE0}" dt="2026-07-11T05:39:55.690" v="7"/>
+        <pc:sldMkLst>
+          <pc:docMk/>
+          <pc:sldMk cId="4143365377" sldId="275"/>
+        </pc:sldMkLst>
+      </pc:sldChg>
+    </pc:docChg>
+  </pc:docChgLst>
+</pc:chgInfo>
+</file>
+
 <file path=ppt/notesMasters/notesMaster1.xml><?xml version="1.0" encoding="utf-8"?>
 <p:notesMaster xmlns:a="http://schemas.openxmlformats.org/drawingml/2006/main" xmlns:r="http://schemas.openxmlformats.org/officeDocument/2006/relationships" xmlns:p="http://schemas.openxmlformats.org/presentationml/2006/main">
   <p:cSld>
@@ -253,7 +368,7 @@
           <a:p>
             <a:fld id="{F929F65E-AEE7-45C5-814B-4468CAF1E537}" type="datetimeFigureOut">
               <a:rPr lang="ko-KR" altLang="en-US" smtClean="0"/>
-              <a:t>2026-07-09</a:t>
+              <a:t>2026-07-11</a:t>
             </a:fld>
             <a:endParaRPr lang="ko-KR" altLang="en-US"/>
           </a:p>
@@ -651,7 +766,7 @@
           <a:p>
             <a:fld id="{149F34B4-7175-41BD-B98B-2E7021201D7D}" type="datetimeFigureOut">
               <a:rPr lang="ko-KR" altLang="en-US" smtClean="0"/>
-              <a:t>2026-07-09</a:t>
+              <a:t>2026-07-11</a:t>
             </a:fld>
             <a:endParaRPr lang="ko-KR" altLang="en-US"/>
           </a:p>
@@ -821,7 +936,7 @@
           <a:p>
             <a:fld id="{149F34B4-7175-41BD-B98B-2E7021201D7D}" type="datetimeFigureOut">
               <a:rPr lang="ko-KR" altLang="en-US" smtClean="0"/>
-              <a:t>2026-07-09</a:t>
+              <a:t>2026-07-11</a:t>
             </a:fld>
             <a:endParaRPr lang="ko-KR" altLang="en-US"/>
           </a:p>
@@ -1001,7 +1116,7 @@
           <a:p>
             <a:fld id="{149F34B4-7175-41BD-B98B-2E7021201D7D}" type="datetimeFigureOut">
               <a:rPr lang="ko-KR" altLang="en-US" smtClean="0"/>
-              <a:t>2026-07-09</a:t>
+              <a:t>2026-07-11</a:t>
             </a:fld>
             <a:endParaRPr lang="ko-KR" altLang="en-US"/>
           </a:p>
@@ -1879,7 +1994,7 @@
           <a:p>
             <a:fld id="{149F34B4-7175-41BD-B98B-2E7021201D7D}" type="datetimeFigureOut">
               <a:rPr lang="ko-KR" altLang="en-US" smtClean="0"/>
-              <a:t>2026-07-09</a:t>
+              <a:t>2026-07-11</a:t>
             </a:fld>
             <a:endParaRPr lang="ko-KR" altLang="en-US"/>
           </a:p>
@@ -2125,7 +2240,7 @@
           <a:p>
             <a:fld id="{149F34B4-7175-41BD-B98B-2E7021201D7D}" type="datetimeFigureOut">
               <a:rPr lang="ko-KR" altLang="en-US" smtClean="0"/>
-              <a:t>2026-07-09</a:t>
+              <a:t>2026-07-11</a:t>
             </a:fld>
             <a:endParaRPr lang="ko-KR" altLang="en-US"/>
           </a:p>
@@ -2357,7 +2472,7 @@
           <a:p>
             <a:fld id="{149F34B4-7175-41BD-B98B-2E7021201D7D}" type="datetimeFigureOut">
               <a:rPr lang="ko-KR" altLang="en-US" smtClean="0"/>
-              <a:t>2026-07-09</a:t>
+              <a:t>2026-07-11</a:t>
             </a:fld>
             <a:endParaRPr lang="ko-KR" altLang="en-US"/>
           </a:p>
@@ -2724,7 +2839,7 @@
           <a:p>
             <a:fld id="{149F34B4-7175-41BD-B98B-2E7021201D7D}" type="datetimeFigureOut">
               <a:rPr lang="ko-KR" altLang="en-US" smtClean="0"/>
-              <a:t>2026-07-09</a:t>
+              <a:t>2026-07-11</a:t>
             </a:fld>
             <a:endParaRPr lang="ko-KR" altLang="en-US"/>
           </a:p>
@@ -2842,7 +2957,7 @@
           <a:p>
             <a:fld id="{149F34B4-7175-41BD-B98B-2E7021201D7D}" type="datetimeFigureOut">
               <a:rPr lang="ko-KR" altLang="en-US" smtClean="0"/>
-              <a:t>2026-07-09</a:t>
+              <a:t>2026-07-11</a:t>
             </a:fld>
             <a:endParaRPr lang="ko-KR" altLang="en-US"/>
           </a:p>
@@ -2937,7 +3052,7 @@
           <a:p>
             <a:fld id="{149F34B4-7175-41BD-B98B-2E7021201D7D}" type="datetimeFigureOut">
               <a:rPr lang="ko-KR" altLang="en-US" smtClean="0"/>
-              <a:t>2026-07-09</a:t>
+              <a:t>2026-07-11</a:t>
             </a:fld>
             <a:endParaRPr lang="ko-KR" altLang="en-US"/>
           </a:p>
@@ -3214,7 +3329,7 @@
           <a:p>
             <a:fld id="{149F34B4-7175-41BD-B98B-2E7021201D7D}" type="datetimeFigureOut">
               <a:rPr lang="ko-KR" altLang="en-US" smtClean="0"/>
-              <a:t>2026-07-09</a:t>
+              <a:t>2026-07-11</a:t>
             </a:fld>
             <a:endParaRPr lang="ko-KR" altLang="en-US"/>
           </a:p>
@@ -3471,7 +3586,7 @@
           <a:p>
             <a:fld id="{149F34B4-7175-41BD-B98B-2E7021201D7D}" type="datetimeFigureOut">
               <a:rPr lang="ko-KR" altLang="en-US" smtClean="0"/>
-              <a:t>2026-07-09</a:t>
+              <a:t>2026-07-11</a:t>
             </a:fld>
             <a:endParaRPr lang="ko-KR" altLang="en-US"/>
           </a:p>
@@ -3684,7 +3799,7 @@
           <a:p>
             <a:fld id="{149F34B4-7175-41BD-B98B-2E7021201D7D}" type="datetimeFigureOut">
               <a:rPr lang="ko-KR" altLang="en-US" smtClean="0"/>
-              <a:t>2026-07-09</a:t>
+              <a:t>2026-07-11</a:t>
             </a:fld>
             <a:endParaRPr lang="ko-KR" altLang="en-US"/>
           </a:p>
@@ -4669,7 +4784,7 @@
         <p:spPr>
           <a:xfrm>
             <a:off x="82843" y="781989"/>
-            <a:ext cx="2592376" cy="790345"/>
+            <a:ext cx="2258952" cy="786882"/>
           </a:xfrm>
           <a:prstGeom prst="rect">
             <a:avLst/>
@@ -4693,86 +4808,86 @@
               <a:buChar char="•"/>
             </a:pPr>
             <a:r>
-              <a:rPr lang="en-US" altLang="ko-KR" sz="800" b="1" dirty="0">
-                <a:latin typeface="KoPub돋움체 Bold" panose="00000800000000000000" pitchFamily="2" charset="-127"/>
-                <a:ea typeface="KoPub돋움체 Bold" panose="00000800000000000000" pitchFamily="2" charset="-127"/>
+              <a:rPr lang="en-US" altLang="ko-KR" sz="700" b="1" dirty="0">
+                <a:latin typeface="KoPub돋움체 Light" panose="02020603020101020101" pitchFamily="18" charset="-127"/>
+                <a:ea typeface="KoPub돋움체 Light" panose="02020603020101020101" pitchFamily="18" charset="-127"/>
               </a:rPr>
               <a:t>[</a:t>
             </a:r>
             <a:r>
-              <a:rPr lang="ko-KR" altLang="en-US" sz="800" b="1" dirty="0">
-                <a:latin typeface="KoPub돋움체 Bold" panose="00000800000000000000" pitchFamily="2" charset="-127"/>
-                <a:ea typeface="KoPub돋움체 Bold" panose="00000800000000000000" pitchFamily="2" charset="-127"/>
+              <a:rPr lang="ko-KR" altLang="en-US" sz="700" b="1" dirty="0">
+                <a:latin typeface="KoPub돋움체 Light" panose="02020603020101020101" pitchFamily="18" charset="-127"/>
+                <a:ea typeface="KoPub돋움체 Light" panose="02020603020101020101" pitchFamily="18" charset="-127"/>
               </a:rPr>
               <a:t>식별</a:t>
             </a:r>
             <a:r>
-              <a:rPr lang="en-US" altLang="ko-KR" sz="800" b="1" dirty="0">
-                <a:latin typeface="KoPub돋움체 Bold" panose="00000800000000000000" pitchFamily="2" charset="-127"/>
-                <a:ea typeface="KoPub돋움체 Bold" panose="00000800000000000000" pitchFamily="2" charset="-127"/>
+              <a:rPr lang="en-US" altLang="ko-KR" sz="700" b="1" dirty="0">
+                <a:latin typeface="KoPub돋움체 Light" panose="02020603020101020101" pitchFamily="18" charset="-127"/>
+                <a:ea typeface="KoPub돋움체 Light" panose="02020603020101020101" pitchFamily="18" charset="-127"/>
               </a:rPr>
               <a:t>] </a:t>
             </a:r>
             <a:r>
-              <a:rPr lang="ko-KR" altLang="en-US" sz="800" b="1" dirty="0">
-                <a:latin typeface="KoPub돋움체 Bold" panose="00000800000000000000" pitchFamily="2" charset="-127"/>
-                <a:ea typeface="KoPub돋움체 Bold" panose="00000800000000000000" pitchFamily="2" charset="-127"/>
+              <a:rPr lang="ko-KR" altLang="en-US" sz="700" b="1" dirty="0">
+                <a:latin typeface="KoPub돋움체 Light" panose="02020603020101020101" pitchFamily="18" charset="-127"/>
+                <a:ea typeface="KoPub돋움체 Light" panose="02020603020101020101" pitchFamily="18" charset="-127"/>
               </a:rPr>
               <a:t>첫머리 </a:t>
             </a:r>
             <a:r>
-              <a:rPr lang="en-US" altLang="ko-KR" sz="800" b="1" dirty="0">
-                <a:latin typeface="KoPub돋움체 Bold" panose="00000800000000000000" pitchFamily="2" charset="-127"/>
-                <a:ea typeface="KoPub돋움체 Bold" panose="00000800000000000000" pitchFamily="2" charset="-127"/>
+              <a:rPr lang="en-US" altLang="ko-KR" sz="700" b="1" dirty="0">
+                <a:latin typeface="KoPub돋움체 Light" panose="02020603020101020101" pitchFamily="18" charset="-127"/>
+                <a:ea typeface="KoPub돋움체 Light" panose="02020603020101020101" pitchFamily="18" charset="-127"/>
               </a:rPr>
               <a:t>[</a:t>
             </a:r>
             <a:r>
-              <a:rPr lang="ko-KR" altLang="en-US" sz="800" b="1" dirty="0">
-                <a:latin typeface="KoPub돋움체 Bold" panose="00000800000000000000" pitchFamily="2" charset="-127"/>
-                <a:ea typeface="KoPub돋움체 Bold" panose="00000800000000000000" pitchFamily="2" charset="-127"/>
+              <a:rPr lang="ko-KR" altLang="en-US" sz="700" b="1" dirty="0">
+                <a:latin typeface="KoPub돋움체 Light" panose="02020603020101020101" pitchFamily="18" charset="-127"/>
+                <a:ea typeface="KoPub돋움체 Light" panose="02020603020101020101" pitchFamily="18" charset="-127"/>
               </a:rPr>
               <a:t>병실</a:t>
             </a:r>
             <a:r>
-              <a:rPr lang="en-US" altLang="ko-KR" sz="800" b="1" dirty="0">
-                <a:latin typeface="KoPub돋움체 Bold" panose="00000800000000000000" pitchFamily="2" charset="-127"/>
-                <a:ea typeface="KoPub돋움체 Bold" panose="00000800000000000000" pitchFamily="2" charset="-127"/>
+              <a:rPr lang="en-US" altLang="ko-KR" sz="700" b="1" dirty="0">
+                <a:latin typeface="KoPub돋움체 Light" panose="02020603020101020101" pitchFamily="18" charset="-127"/>
+                <a:ea typeface="KoPub돋움체 Light" panose="02020603020101020101" pitchFamily="18" charset="-127"/>
               </a:rPr>
               <a:t>/</a:t>
             </a:r>
             <a:r>
-              <a:rPr lang="ko-KR" altLang="en-US" sz="800" b="1" dirty="0">
-                <a:latin typeface="KoPub돋움체 Bold" panose="00000800000000000000" pitchFamily="2" charset="-127"/>
-                <a:ea typeface="KoPub돋움체 Bold" panose="00000800000000000000" pitchFamily="2" charset="-127"/>
+              <a:rPr lang="ko-KR" altLang="en-US" sz="700" b="1" dirty="0">
+                <a:latin typeface="KoPub돋움체 Light" panose="02020603020101020101" pitchFamily="18" charset="-127"/>
+                <a:ea typeface="KoPub돋움체 Light" panose="02020603020101020101" pitchFamily="18" charset="-127"/>
               </a:rPr>
               <a:t>성함</a:t>
             </a:r>
             <a:r>
-              <a:rPr lang="en-US" altLang="ko-KR" sz="800" b="1" dirty="0">
-                <a:latin typeface="KoPub돋움체 Bold" panose="00000800000000000000" pitchFamily="2" charset="-127"/>
-                <a:ea typeface="KoPub돋움체 Bold" panose="00000800000000000000" pitchFamily="2" charset="-127"/>
+              <a:rPr lang="en-US" altLang="ko-KR" sz="700" b="1" dirty="0">
+                <a:latin typeface="KoPub돋움체 Light" panose="02020603020101020101" pitchFamily="18" charset="-127"/>
+                <a:ea typeface="KoPub돋움체 Light" panose="02020603020101020101" pitchFamily="18" charset="-127"/>
               </a:rPr>
               <a:t>/</a:t>
             </a:r>
             <a:r>
-              <a:rPr lang="ko-KR" altLang="en-US" sz="800" b="1" dirty="0">
-                <a:latin typeface="KoPub돋움체 Bold" panose="00000800000000000000" pitchFamily="2" charset="-127"/>
-                <a:ea typeface="KoPub돋움체 Bold" panose="00000800000000000000" pitchFamily="2" charset="-127"/>
+              <a:rPr lang="ko-KR" altLang="en-US" sz="700" b="1" dirty="0">
+                <a:latin typeface="KoPub돋움체 Light" panose="02020603020101020101" pitchFamily="18" charset="-127"/>
+                <a:ea typeface="KoPub돋움체 Light" panose="02020603020101020101" pitchFamily="18" charset="-127"/>
               </a:rPr>
               <a:t>사유</a:t>
             </a:r>
             <a:r>
-              <a:rPr lang="en-US" altLang="ko-KR" sz="800" b="1" dirty="0">
-                <a:latin typeface="KoPub돋움체 Bold" panose="00000800000000000000" pitchFamily="2" charset="-127"/>
-                <a:ea typeface="KoPub돋움체 Bold" panose="00000800000000000000" pitchFamily="2" charset="-127"/>
+              <a:rPr lang="en-US" altLang="ko-KR" sz="700" b="1" dirty="0">
+                <a:latin typeface="KoPub돋움체 Light" panose="02020603020101020101" pitchFamily="18" charset="-127"/>
+                <a:ea typeface="KoPub돋움체 Light" panose="02020603020101020101" pitchFamily="18" charset="-127"/>
               </a:rPr>
               <a:t>]</a:t>
             </a:r>
             <a:r>
-              <a:rPr lang="ko-KR" altLang="en-US" sz="800" b="1" dirty="0">
-                <a:latin typeface="KoPub돋움체 Bold" panose="00000800000000000000" pitchFamily="2" charset="-127"/>
-                <a:ea typeface="KoPub돋움체 Bold" panose="00000800000000000000" pitchFamily="2" charset="-127"/>
+              <a:rPr lang="ko-KR" altLang="en-US" sz="700" b="1" dirty="0">
+                <a:latin typeface="KoPub돋움체 Light" panose="02020603020101020101" pitchFamily="18" charset="-127"/>
+                <a:ea typeface="KoPub돋움체 Light" panose="02020603020101020101" pitchFamily="18" charset="-127"/>
               </a:rPr>
               <a:t>필수 기재</a:t>
             </a:r>
@@ -4789,65 +4904,65 @@
               <a:buChar char="•"/>
             </a:pPr>
             <a:r>
-              <a:rPr lang="en-US" altLang="ko-KR" sz="800" b="1" dirty="0">
-                <a:latin typeface="KoPub돋움체 Bold" panose="00000800000000000000" pitchFamily="2" charset="-127"/>
-                <a:ea typeface="KoPub돋움체 Bold" panose="00000800000000000000" pitchFamily="2" charset="-127"/>
+              <a:rPr lang="en-US" altLang="ko-KR" sz="700" b="1" dirty="0">
+                <a:latin typeface="KoPub돋움체 Light" panose="02020603020101020101" pitchFamily="18" charset="-127"/>
+                <a:ea typeface="KoPub돋움체 Light" panose="02020603020101020101" pitchFamily="18" charset="-127"/>
               </a:rPr>
               <a:t>[</a:t>
             </a:r>
             <a:r>
-              <a:rPr lang="ko-KR" altLang="en-US" sz="800" b="1" dirty="0">
-                <a:latin typeface="KoPub돋움체 Bold" panose="00000800000000000000" pitchFamily="2" charset="-127"/>
-                <a:ea typeface="KoPub돋움체 Bold" panose="00000800000000000000" pitchFamily="2" charset="-127"/>
+              <a:rPr lang="ko-KR" altLang="en-US" sz="700" b="1" dirty="0">
+                <a:latin typeface="KoPub돋움체 Light" panose="02020603020101020101" pitchFamily="18" charset="-127"/>
+                <a:ea typeface="KoPub돋움체 Light" panose="02020603020101020101" pitchFamily="18" charset="-127"/>
               </a:rPr>
               <a:t>공유</a:t>
             </a:r>
             <a:r>
-              <a:rPr lang="en-US" altLang="ko-KR" sz="800" b="1" dirty="0">
-                <a:latin typeface="KoPub돋움체 Bold" panose="00000800000000000000" pitchFamily="2" charset="-127"/>
-                <a:ea typeface="KoPub돋움체 Bold" panose="00000800000000000000" pitchFamily="2" charset="-127"/>
+              <a:rPr lang="en-US" altLang="ko-KR" sz="700" b="1" dirty="0">
+                <a:latin typeface="KoPub돋움체 Light" panose="02020603020101020101" pitchFamily="18" charset="-127"/>
+                <a:ea typeface="KoPub돋움체 Light" panose="02020603020101020101" pitchFamily="18" charset="-127"/>
               </a:rPr>
               <a:t>] </a:t>
             </a:r>
             <a:r>
-              <a:rPr lang="ko-KR" altLang="en-US" sz="800" b="1" dirty="0">
-                <a:latin typeface="KoPub돋움체 Bold" panose="00000800000000000000" pitchFamily="2" charset="-127"/>
-                <a:ea typeface="KoPub돋움체 Bold" panose="00000800000000000000" pitchFamily="2" charset="-127"/>
+              <a:rPr lang="ko-KR" altLang="en-US" sz="700" b="1" dirty="0">
+                <a:latin typeface="KoPub돋움체 Light" panose="02020603020101020101" pitchFamily="18" charset="-127"/>
+                <a:ea typeface="KoPub돋움체 Light" panose="02020603020101020101" pitchFamily="18" charset="-127"/>
               </a:rPr>
               <a:t>결정 사항의 </a:t>
             </a:r>
             <a:r>
-              <a:rPr lang="ko-KR" altLang="en-US" sz="800" b="1" dirty="0" err="1">
-                <a:latin typeface="KoPub돋움체 Bold" panose="00000800000000000000" pitchFamily="2" charset="-127"/>
-                <a:ea typeface="KoPub돋움체 Bold" panose="00000800000000000000" pitchFamily="2" charset="-127"/>
+              <a:rPr lang="ko-KR" altLang="en-US" sz="700" b="1" dirty="0" err="1">
+                <a:latin typeface="KoPub돋움체 Light" panose="02020603020101020101" pitchFamily="18" charset="-127"/>
+                <a:ea typeface="KoPub돋움체 Light" panose="02020603020101020101" pitchFamily="18" charset="-127"/>
               </a:rPr>
               <a:t>선제적</a:t>
             </a:r>
             <a:r>
-              <a:rPr lang="ko-KR" altLang="en-US" sz="800" b="1" dirty="0">
-                <a:latin typeface="KoPub돋움체 Bold" panose="00000800000000000000" pitchFamily="2" charset="-127"/>
-                <a:ea typeface="KoPub돋움체 Bold" panose="00000800000000000000" pitchFamily="2" charset="-127"/>
+              <a:rPr lang="ko-KR" altLang="en-US" sz="700" b="1" dirty="0">
+                <a:latin typeface="KoPub돋움체 Light" panose="02020603020101020101" pitchFamily="18" charset="-127"/>
+                <a:ea typeface="KoPub돋움체 Light" panose="02020603020101020101" pitchFamily="18" charset="-127"/>
               </a:rPr>
               <a:t> 알림 </a:t>
             </a:r>
             <a:r>
-              <a:rPr lang="en-US" altLang="ko-KR" sz="800" b="1" dirty="0">
-                <a:latin typeface="KoPub돋움체 Bold" panose="00000800000000000000" pitchFamily="2" charset="-127"/>
-                <a:ea typeface="KoPub돋움체 Bold" panose="00000800000000000000" pitchFamily="2" charset="-127"/>
+              <a:rPr lang="en-US" altLang="ko-KR" sz="700" b="1" dirty="0">
+                <a:latin typeface="KoPub돋움체 Light" panose="02020603020101020101" pitchFamily="18" charset="-127"/>
+                <a:ea typeface="KoPub돋움체 Light" panose="02020603020101020101" pitchFamily="18" charset="-127"/>
               </a:rPr>
               <a:t>(PA ↔ </a:t>
             </a:r>
             <a:r>
-              <a:rPr lang="ko-KR" altLang="en-US" sz="800" b="1" dirty="0">
-                <a:latin typeface="KoPub돋움체 Bold" panose="00000800000000000000" pitchFamily="2" charset="-127"/>
-                <a:ea typeface="KoPub돋움체 Bold" panose="00000800000000000000" pitchFamily="2" charset="-127"/>
+              <a:rPr lang="ko-KR" altLang="en-US" sz="700" b="1" dirty="0">
+                <a:latin typeface="KoPub돋움체 Light" panose="02020603020101020101" pitchFamily="18" charset="-127"/>
+                <a:ea typeface="KoPub돋움체 Light" panose="02020603020101020101" pitchFamily="18" charset="-127"/>
               </a:rPr>
               <a:t>병동</a:t>
             </a:r>
             <a:r>
-              <a:rPr lang="en-US" altLang="ko-KR" sz="800" b="1" dirty="0">
-                <a:latin typeface="KoPub돋움체 Bold" panose="00000800000000000000" pitchFamily="2" charset="-127"/>
-                <a:ea typeface="KoPub돋움체 Bold" panose="00000800000000000000" pitchFamily="2" charset="-127"/>
+              <a:rPr lang="en-US" altLang="ko-KR" sz="700" b="1" dirty="0">
+                <a:latin typeface="KoPub돋움체 Light" panose="02020603020101020101" pitchFamily="18" charset="-127"/>
+                <a:ea typeface="KoPub돋움체 Light" panose="02020603020101020101" pitchFamily="18" charset="-127"/>
               </a:rPr>
               <a:t>)</a:t>
             </a:r>
@@ -4864,93 +4979,93 @@
               <a:buChar char="•"/>
             </a:pPr>
             <a:r>
-              <a:rPr lang="en-US" altLang="ko-KR" sz="800" b="1" dirty="0">
-                <a:latin typeface="KoPub돋움체 Bold" panose="00000800000000000000" pitchFamily="2" charset="-127"/>
-                <a:ea typeface="KoPub돋움체 Bold" panose="00000800000000000000" pitchFamily="2" charset="-127"/>
+              <a:rPr lang="en-US" altLang="ko-KR" sz="700" b="1" dirty="0">
+                <a:latin typeface="KoPub돋움체 Light" panose="02020603020101020101" pitchFamily="18" charset="-127"/>
+                <a:ea typeface="KoPub돋움체 Light" panose="02020603020101020101" pitchFamily="18" charset="-127"/>
               </a:rPr>
               <a:t>[</a:t>
             </a:r>
             <a:r>
-              <a:rPr lang="ko-KR" altLang="en-US" sz="800" b="1" dirty="0">
-                <a:latin typeface="KoPub돋움체 Bold" panose="00000800000000000000" pitchFamily="2" charset="-127"/>
-                <a:ea typeface="KoPub돋움체 Bold" panose="00000800000000000000" pitchFamily="2" charset="-127"/>
+              <a:rPr lang="ko-KR" altLang="en-US" sz="700" b="1" dirty="0">
+                <a:latin typeface="KoPub돋움체 Light" panose="02020603020101020101" pitchFamily="18" charset="-127"/>
+                <a:ea typeface="KoPub돋움체 Light" panose="02020603020101020101" pitchFamily="18" charset="-127"/>
               </a:rPr>
               <a:t>원칙</a:t>
             </a:r>
             <a:r>
-              <a:rPr lang="en-US" altLang="ko-KR" sz="800" b="1" dirty="0">
-                <a:latin typeface="KoPub돋움체 Bold" panose="00000800000000000000" pitchFamily="2" charset="-127"/>
-                <a:ea typeface="KoPub돋움체 Bold" panose="00000800000000000000" pitchFamily="2" charset="-127"/>
+              <a:rPr lang="en-US" altLang="ko-KR" sz="700" b="1" dirty="0">
+                <a:latin typeface="KoPub돋움체 Light" panose="02020603020101020101" pitchFamily="18" charset="-127"/>
+                <a:ea typeface="KoPub돋움체 Light" panose="02020603020101020101" pitchFamily="18" charset="-127"/>
               </a:rPr>
               <a:t>] </a:t>
             </a:r>
             <a:r>
-              <a:rPr lang="ko-KR" altLang="en-US" sz="800" b="1" dirty="0">
-                <a:latin typeface="KoPub돋움체 Bold" panose="00000800000000000000" pitchFamily="2" charset="-127"/>
-                <a:ea typeface="KoPub돋움체 Bold" panose="00000800000000000000" pitchFamily="2" charset="-127"/>
+              <a:rPr lang="ko-KR" altLang="en-US" sz="700" b="1" dirty="0">
+                <a:latin typeface="KoPub돋움체 Light" panose="02020603020101020101" pitchFamily="18" charset="-127"/>
+                <a:ea typeface="KoPub돋움체 Light" panose="02020603020101020101" pitchFamily="18" charset="-127"/>
               </a:rPr>
               <a:t>공식 채널</a:t>
             </a:r>
             <a:r>
-              <a:rPr lang="en-US" altLang="ko-KR" sz="800" b="1" dirty="0">
-                <a:latin typeface="KoPub돋움체 Bold" panose="00000800000000000000" pitchFamily="2" charset="-127"/>
-                <a:ea typeface="KoPub돋움체 Bold" panose="00000800000000000000" pitchFamily="2" charset="-127"/>
+              <a:rPr lang="en-US" altLang="ko-KR" sz="700" b="1" dirty="0">
+                <a:latin typeface="KoPub돋움체 Light" panose="02020603020101020101" pitchFamily="18" charset="-127"/>
+                <a:ea typeface="KoPub돋움체 Light" panose="02020603020101020101" pitchFamily="18" charset="-127"/>
               </a:rPr>
               <a:t>(EMR/</a:t>
             </a:r>
             <a:r>
-              <a:rPr lang="ko-KR" altLang="en-US" sz="800" b="1" dirty="0">
-                <a:latin typeface="KoPub돋움체 Bold" panose="00000800000000000000" pitchFamily="2" charset="-127"/>
-                <a:ea typeface="KoPub돋움체 Bold" panose="00000800000000000000" pitchFamily="2" charset="-127"/>
+              <a:rPr lang="ko-KR" altLang="en-US" sz="700" b="1" dirty="0">
+                <a:latin typeface="KoPub돋움체 Light" panose="02020603020101020101" pitchFamily="18" charset="-127"/>
+                <a:ea typeface="KoPub돋움체 Light" panose="02020603020101020101" pitchFamily="18" charset="-127"/>
               </a:rPr>
               <a:t>유선</a:t>
             </a:r>
             <a:r>
-              <a:rPr lang="en-US" altLang="ko-KR" sz="800" b="1" dirty="0">
-                <a:latin typeface="KoPub돋움체 Bold" panose="00000800000000000000" pitchFamily="2" charset="-127"/>
-                <a:ea typeface="KoPub돋움체 Bold" panose="00000800000000000000" pitchFamily="2" charset="-127"/>
+              <a:rPr lang="en-US" altLang="ko-KR" sz="700" b="1" dirty="0">
+                <a:latin typeface="KoPub돋움체 Light" panose="02020603020101020101" pitchFamily="18" charset="-127"/>
+                <a:ea typeface="KoPub돋움체 Light" panose="02020603020101020101" pitchFamily="18" charset="-127"/>
               </a:rPr>
               <a:t>) </a:t>
             </a:r>
             <a:r>
-              <a:rPr lang="ko-KR" altLang="en-US" sz="800" b="1" dirty="0">
-                <a:latin typeface="KoPub돋움체 Bold" panose="00000800000000000000" pitchFamily="2" charset="-127"/>
-                <a:ea typeface="KoPub돋움체 Bold" panose="00000800000000000000" pitchFamily="2" charset="-127"/>
+              <a:rPr lang="ko-KR" altLang="en-US" sz="700" b="1" dirty="0">
+                <a:latin typeface="KoPub돋움체 Light" panose="02020603020101020101" pitchFamily="18" charset="-127"/>
+                <a:ea typeface="KoPub돋움체 Light" panose="02020603020101020101" pitchFamily="18" charset="-127"/>
               </a:rPr>
               <a:t>활용 </a:t>
             </a:r>
             <a:r>
-              <a:rPr lang="en-US" altLang="ko-KR" sz="800" b="1" dirty="0">
-                <a:latin typeface="KoPub돋움체 Bold" panose="00000800000000000000" pitchFamily="2" charset="-127"/>
-                <a:ea typeface="KoPub돋움체 Bold" panose="00000800000000000000" pitchFamily="2" charset="-127"/>
+              <a:rPr lang="en-US" altLang="ko-KR" sz="700" b="1" dirty="0">
+                <a:latin typeface="KoPub돋움체 Light" panose="02020603020101020101" pitchFamily="18" charset="-127"/>
+                <a:ea typeface="KoPub돋움체 Light" panose="02020603020101020101" pitchFamily="18" charset="-127"/>
               </a:rPr>
               <a:t>(</a:t>
             </a:r>
             <a:r>
-              <a:rPr lang="ko-KR" altLang="en-US" sz="800" b="1" dirty="0">
-                <a:latin typeface="KoPub돋움체 Bold" panose="00000800000000000000" pitchFamily="2" charset="-127"/>
-                <a:ea typeface="KoPub돋움체 Bold" panose="00000800000000000000" pitchFamily="2" charset="-127"/>
+              <a:rPr lang="ko-KR" altLang="en-US" sz="700" b="1" dirty="0">
+                <a:latin typeface="KoPub돋움체 Light" panose="02020603020101020101" pitchFamily="18" charset="-127"/>
+                <a:ea typeface="KoPub돋움체 Light" panose="02020603020101020101" pitchFamily="18" charset="-127"/>
               </a:rPr>
               <a:t>수술</a:t>
             </a:r>
             <a:r>
-              <a:rPr lang="en-US" altLang="ko-KR" sz="800" b="1" dirty="0">
-                <a:latin typeface="KoPub돋움체 Bold" panose="00000800000000000000" pitchFamily="2" charset="-127"/>
-                <a:ea typeface="KoPub돋움체 Bold" panose="00000800000000000000" pitchFamily="2" charset="-127"/>
+              <a:rPr lang="en-US" altLang="ko-KR" sz="700" b="1" dirty="0">
+                <a:latin typeface="KoPub돋움체 Light" panose="02020603020101020101" pitchFamily="18" charset="-127"/>
+                <a:ea typeface="KoPub돋움체 Light" panose="02020603020101020101" pitchFamily="18" charset="-127"/>
               </a:rPr>
               <a:t>, </a:t>
             </a:r>
             <a:r>
-              <a:rPr lang="ko-KR" altLang="en-US" sz="800" b="1" dirty="0">
-                <a:latin typeface="KoPub돋움체 Bold" panose="00000800000000000000" pitchFamily="2" charset="-127"/>
-                <a:ea typeface="KoPub돋움체 Bold" panose="00000800000000000000" pitchFamily="2" charset="-127"/>
+              <a:rPr lang="ko-KR" altLang="en-US" sz="700" b="1" dirty="0">
+                <a:latin typeface="KoPub돋움체 Light" panose="02020603020101020101" pitchFamily="18" charset="-127"/>
+                <a:ea typeface="KoPub돋움체 Light" panose="02020603020101020101" pitchFamily="18" charset="-127"/>
               </a:rPr>
               <a:t>검사 결과 보고</a:t>
             </a:r>
             <a:r>
-              <a:rPr lang="en-US" altLang="ko-KR" sz="800" b="1" dirty="0">
-                <a:latin typeface="KoPub돋움체 Bold" panose="00000800000000000000" pitchFamily="2" charset="-127"/>
-                <a:ea typeface="KoPub돋움체 Bold" panose="00000800000000000000" pitchFamily="2" charset="-127"/>
+              <a:rPr lang="en-US" altLang="ko-KR" sz="700" b="1" dirty="0">
+                <a:latin typeface="KoPub돋움체 Light" panose="02020603020101020101" pitchFamily="18" charset="-127"/>
+                <a:ea typeface="KoPub돋움체 Light" panose="02020603020101020101" pitchFamily="18" charset="-127"/>
               </a:rPr>
               <a:t>)</a:t>
             </a:r>
@@ -4967,44 +5082,44 @@
               <a:buChar char="•"/>
             </a:pPr>
             <a:r>
-              <a:rPr lang="en-US" altLang="ko-KR" sz="800" b="1" dirty="0">
-                <a:latin typeface="KoPub돋움체 Bold" panose="00000800000000000000" pitchFamily="2" charset="-127"/>
-                <a:ea typeface="KoPub돋움체 Bold" panose="00000800000000000000" pitchFamily="2" charset="-127"/>
+              <a:rPr lang="en-US" altLang="ko-KR" sz="700" b="1" dirty="0">
+                <a:latin typeface="KoPub돋움체 Light" panose="02020603020101020101" pitchFamily="18" charset="-127"/>
+                <a:ea typeface="KoPub돋움체 Light" panose="02020603020101020101" pitchFamily="18" charset="-127"/>
               </a:rPr>
               <a:t>[</a:t>
             </a:r>
             <a:r>
-              <a:rPr lang="ko-KR" altLang="en-US" sz="800" b="1" dirty="0">
-                <a:latin typeface="KoPub돋움체 Bold" panose="00000800000000000000" pitchFamily="2" charset="-127"/>
-                <a:ea typeface="KoPub돋움체 Bold" panose="00000800000000000000" pitchFamily="2" charset="-127"/>
+              <a:rPr lang="ko-KR" altLang="en-US" sz="700" b="1" dirty="0">
+                <a:latin typeface="KoPub돋움체 Light" panose="02020603020101020101" pitchFamily="18" charset="-127"/>
+                <a:ea typeface="KoPub돋움체 Light" panose="02020603020101020101" pitchFamily="18" charset="-127"/>
               </a:rPr>
               <a:t>완결</a:t>
             </a:r>
             <a:r>
-              <a:rPr lang="en-US" altLang="ko-KR" sz="800" b="1" dirty="0">
-                <a:latin typeface="KoPub돋움체 Bold" panose="00000800000000000000" pitchFamily="2" charset="-127"/>
-                <a:ea typeface="KoPub돋움체 Bold" panose="00000800000000000000" pitchFamily="2" charset="-127"/>
+              <a:rPr lang="en-US" altLang="ko-KR" sz="700" b="1" dirty="0">
+                <a:latin typeface="KoPub돋움체 Light" panose="02020603020101020101" pitchFamily="18" charset="-127"/>
+                <a:ea typeface="KoPub돋움체 Light" panose="02020603020101020101" pitchFamily="18" charset="-127"/>
               </a:rPr>
               <a:t>] [</a:t>
             </a:r>
             <a:r>
-              <a:rPr lang="ko-KR" altLang="en-US" sz="800" b="1" dirty="0">
-                <a:latin typeface="KoPub돋움체 Bold" panose="00000800000000000000" pitchFamily="2" charset="-127"/>
-                <a:ea typeface="KoPub돋움체 Bold" panose="00000800000000000000" pitchFamily="2" charset="-127"/>
+              <a:rPr lang="ko-KR" altLang="en-US" sz="700" b="1" dirty="0">
+                <a:latin typeface="KoPub돋움체 Light" panose="02020603020101020101" pitchFamily="18" charset="-127"/>
+                <a:ea typeface="KoPub돋움체 Light" panose="02020603020101020101" pitchFamily="18" charset="-127"/>
               </a:rPr>
               <a:t>답장</a:t>
             </a:r>
             <a:r>
-              <a:rPr lang="en-US" altLang="ko-KR" sz="800" b="1" dirty="0">
-                <a:latin typeface="KoPub돋움체 Bold" panose="00000800000000000000" pitchFamily="2" charset="-127"/>
-                <a:ea typeface="KoPub돋움체 Bold" panose="00000800000000000000" pitchFamily="2" charset="-127"/>
+              <a:rPr lang="en-US" altLang="ko-KR" sz="700" b="1" dirty="0">
+                <a:latin typeface="KoPub돋움체 Light" panose="02020603020101020101" pitchFamily="18" charset="-127"/>
+                <a:ea typeface="KoPub돋움체 Light" panose="02020603020101020101" pitchFamily="18" charset="-127"/>
               </a:rPr>
               <a:t>(Reply)]</a:t>
             </a:r>
             <a:r>
-              <a:rPr lang="ko-KR" altLang="en-US" sz="800" b="1" dirty="0">
-                <a:latin typeface="KoPub돋움체 Bold" panose="00000800000000000000" pitchFamily="2" charset="-127"/>
-                <a:ea typeface="KoPub돋움체 Bold" panose="00000800000000000000" pitchFamily="2" charset="-127"/>
+              <a:rPr lang="ko-KR" altLang="en-US" sz="700" b="1" dirty="0">
+                <a:latin typeface="KoPub돋움체 Light" panose="02020603020101020101" pitchFamily="18" charset="-127"/>
+                <a:ea typeface="KoPub돋움체 Light" panose="02020603020101020101" pitchFamily="18" charset="-127"/>
               </a:rPr>
               <a:t>기능 필수 활용</a:t>
             </a:r>
@@ -5021,58 +5136,58 @@
               <a:buChar char="•"/>
             </a:pPr>
             <a:r>
-              <a:rPr lang="en-US" altLang="ko-KR" sz="800" b="1" dirty="0">
-                <a:latin typeface="KoPub돋움체 Bold" panose="00000800000000000000" pitchFamily="2" charset="-127"/>
-                <a:ea typeface="KoPub돋움체 Bold" panose="00000800000000000000" pitchFamily="2" charset="-127"/>
+              <a:rPr lang="en-US" altLang="ko-KR" sz="700" b="1" dirty="0">
+                <a:latin typeface="KoPub돋움체 Light" panose="02020603020101020101" pitchFamily="18" charset="-127"/>
+                <a:ea typeface="KoPub돋움체 Light" panose="02020603020101020101" pitchFamily="18" charset="-127"/>
               </a:rPr>
               <a:t>[</a:t>
             </a:r>
             <a:r>
-              <a:rPr lang="ko-KR" altLang="en-US" sz="800" b="1" dirty="0">
-                <a:latin typeface="KoPub돋움체 Bold" panose="00000800000000000000" pitchFamily="2" charset="-127"/>
-                <a:ea typeface="KoPub돋움체 Bold" panose="00000800000000000000" pitchFamily="2" charset="-127"/>
+              <a:rPr lang="ko-KR" altLang="en-US" sz="700" b="1" dirty="0">
+                <a:latin typeface="KoPub돋움체 Light" panose="02020603020101020101" pitchFamily="18" charset="-127"/>
+                <a:ea typeface="KoPub돋움체 Light" panose="02020603020101020101" pitchFamily="18" charset="-127"/>
               </a:rPr>
               <a:t>대응</a:t>
             </a:r>
             <a:r>
-              <a:rPr lang="en-US" altLang="ko-KR" sz="800" b="1" dirty="0">
-                <a:latin typeface="KoPub돋움체 Bold" panose="00000800000000000000" pitchFamily="2" charset="-127"/>
-                <a:ea typeface="KoPub돋움체 Bold" panose="00000800000000000000" pitchFamily="2" charset="-127"/>
+              <a:rPr lang="en-US" altLang="ko-KR" sz="700" b="1" dirty="0">
+                <a:latin typeface="KoPub돋움체 Light" panose="02020603020101020101" pitchFamily="18" charset="-127"/>
+                <a:ea typeface="KoPub돋움체 Light" panose="02020603020101020101" pitchFamily="18" charset="-127"/>
               </a:rPr>
               <a:t>] </a:t>
             </a:r>
             <a:r>
-              <a:rPr lang="ko-KR" altLang="en-US" sz="800" b="1" dirty="0">
-                <a:latin typeface="KoPub돋움체 Bold" panose="00000800000000000000" pitchFamily="2" charset="-127"/>
-                <a:ea typeface="KoPub돋움체 Bold" panose="00000800000000000000" pitchFamily="2" charset="-127"/>
+              <a:rPr lang="ko-KR" altLang="en-US" sz="700" b="1" dirty="0">
+                <a:latin typeface="KoPub돋움체 Light" panose="02020603020101020101" pitchFamily="18" charset="-127"/>
+                <a:ea typeface="KoPub돋움체 Light" panose="02020603020101020101" pitchFamily="18" charset="-127"/>
               </a:rPr>
               <a:t>메신저 응답 </a:t>
             </a:r>
             <a:r>
-              <a:rPr lang="en-US" altLang="ko-KR" sz="800" b="1" dirty="0">
-                <a:latin typeface="KoPub돋움체 Bold" panose="00000800000000000000" pitchFamily="2" charset="-127"/>
-                <a:ea typeface="KoPub돋움체 Bold" panose="00000800000000000000" pitchFamily="2" charset="-127"/>
+              <a:rPr lang="en-US" altLang="ko-KR" sz="700" b="1" dirty="0">
+                <a:latin typeface="KoPub돋움체 Light" panose="02020603020101020101" pitchFamily="18" charset="-127"/>
+                <a:ea typeface="KoPub돋움체 Light" panose="02020603020101020101" pitchFamily="18" charset="-127"/>
               </a:rPr>
               <a:t>'10</a:t>
             </a:r>
             <a:r>
-              <a:rPr lang="ko-KR" altLang="en-US" sz="800" b="1" dirty="0">
-                <a:latin typeface="KoPub돋움체 Bold" panose="00000800000000000000" pitchFamily="2" charset="-127"/>
-                <a:ea typeface="KoPub돋움체 Bold" panose="00000800000000000000" pitchFamily="2" charset="-127"/>
+              <a:rPr lang="ko-KR" altLang="en-US" sz="700" b="1" dirty="0">
+                <a:latin typeface="KoPub돋움체 Light" panose="02020603020101020101" pitchFamily="18" charset="-127"/>
+                <a:ea typeface="KoPub돋움체 Light" panose="02020603020101020101" pitchFamily="18" charset="-127"/>
               </a:rPr>
               <a:t>분 룰</a:t>
             </a:r>
             <a:r>
-              <a:rPr lang="en-US" altLang="ko-KR" sz="800" b="1" dirty="0">
-                <a:latin typeface="KoPub돋움체 Bold" panose="00000800000000000000" pitchFamily="2" charset="-127"/>
-                <a:ea typeface="KoPub돋움체 Bold" panose="00000800000000000000" pitchFamily="2" charset="-127"/>
+              <a:rPr lang="en-US" altLang="ko-KR" sz="700" b="1" dirty="0">
+                <a:latin typeface="KoPub돋움체 Light" panose="02020603020101020101" pitchFamily="18" charset="-127"/>
+                <a:ea typeface="KoPub돋움체 Light" panose="02020603020101020101" pitchFamily="18" charset="-127"/>
               </a:rPr>
               <a:t>(Rule)' </a:t>
             </a:r>
             <a:r>
-              <a:rPr lang="ko-KR" altLang="en-US" sz="800" b="1" dirty="0">
-                <a:latin typeface="KoPub돋움체 Bold" panose="00000800000000000000" pitchFamily="2" charset="-127"/>
-                <a:ea typeface="KoPub돋움체 Bold" panose="00000800000000000000" pitchFamily="2" charset="-127"/>
+              <a:rPr lang="ko-KR" altLang="en-US" sz="700" b="1" dirty="0">
+                <a:latin typeface="KoPub돋움체 Light" panose="02020603020101020101" pitchFamily="18" charset="-127"/>
+                <a:ea typeface="KoPub돋움체 Light" panose="02020603020101020101" pitchFamily="18" charset="-127"/>
               </a:rPr>
               <a:t>적용</a:t>
             </a:r>
@@ -5100,7 +5215,7 @@
         <p:cNvPr id="1" name="">
           <a:extLst>
             <a:ext uri="{FF2B5EF4-FFF2-40B4-BE49-F238E27FC236}">
-              <a16:creationId xmlns:a16="http://schemas.microsoft.com/office/drawing/2014/main" id="{D664C560-2A89-718E-69C2-067E6CEDFE26}"/>
+              <a16:creationId xmlns:a16="http://schemas.microsoft.com/office/drawing/2014/main" id="{EF66A5B3-163B-6F07-10F6-516CFF5236F4}"/>
             </a:ext>
           </a:extLst>
         </p:cNvPr>
@@ -5120,7 +5235,7 @@
           <p:cNvPr id="3" name="TextBox 2">
             <a:extLst>
               <a:ext uri="{FF2B5EF4-FFF2-40B4-BE49-F238E27FC236}">
-                <a16:creationId xmlns:a16="http://schemas.microsoft.com/office/drawing/2014/main" id="{C297340C-5BAB-A660-C746-988E54C203E7}"/>
+                <a16:creationId xmlns:a16="http://schemas.microsoft.com/office/drawing/2014/main" id="{1A26FCE8-5EF0-0DF6-F8B5-C649DC205363}"/>
               </a:ext>
             </a:extLst>
           </p:cNvPr>
@@ -5158,7 +5273,7 @@
           <p:cNvPr id="17" name="그룹 16">
             <a:extLst>
               <a:ext uri="{FF2B5EF4-FFF2-40B4-BE49-F238E27FC236}">
-                <a16:creationId xmlns:a16="http://schemas.microsoft.com/office/drawing/2014/main" id="{0CC2092D-47FE-E004-CB8A-64B1B9321CEE}"/>
+                <a16:creationId xmlns:a16="http://schemas.microsoft.com/office/drawing/2014/main" id="{1A49BD73-09B6-9576-4A99-AEFE0F7F42C3}"/>
               </a:ext>
             </a:extLst>
           </p:cNvPr>
@@ -5178,7 +5293,7 @@
             <p:cNvPr id="5" name="그림 4" descr="패턴, 사각형, 예술, 직사각형이(가) 표시된 사진&#10;&#10;AI 생성 콘텐츠는 정확하지 않을 수 있습니다.">
               <a:extLst>
                 <a:ext uri="{FF2B5EF4-FFF2-40B4-BE49-F238E27FC236}">
-                  <a16:creationId xmlns:a16="http://schemas.microsoft.com/office/drawing/2014/main" id="{2D1353C8-EF17-381D-29C2-8AA339F0BC66}"/>
+                  <a16:creationId xmlns:a16="http://schemas.microsoft.com/office/drawing/2014/main" id="{237758EC-8039-A3EA-24AD-2B5B0B1F60A1}"/>
                 </a:ext>
               </a:extLst>
             </p:cNvPr>
@@ -5208,7 +5323,7 @@
             <p:cNvPr id="13" name="L 도형 12">
               <a:extLst>
                 <a:ext uri="{FF2B5EF4-FFF2-40B4-BE49-F238E27FC236}">
-                  <a16:creationId xmlns:a16="http://schemas.microsoft.com/office/drawing/2014/main" id="{98A575AA-7C3A-64EF-D5B9-EF06EA8CE347}"/>
+                  <a16:creationId xmlns:a16="http://schemas.microsoft.com/office/drawing/2014/main" id="{1386BAC4-C977-A7C2-6D4E-8D1313D44B3B}"/>
                 </a:ext>
               </a:extLst>
             </p:cNvPr>
@@ -5265,7 +5380,7 @@
             <p:cNvPr id="14" name="L 도형 13">
               <a:extLst>
                 <a:ext uri="{FF2B5EF4-FFF2-40B4-BE49-F238E27FC236}">
-                  <a16:creationId xmlns:a16="http://schemas.microsoft.com/office/drawing/2014/main" id="{E3F1B362-4BD3-AE19-67E1-49E6B4E64821}"/>
+                  <a16:creationId xmlns:a16="http://schemas.microsoft.com/office/drawing/2014/main" id="{925A8E91-1465-F155-CE7D-07F92B383DAE}"/>
                 </a:ext>
               </a:extLst>
             </p:cNvPr>
@@ -5322,7 +5437,7 @@
             <p:cNvPr id="15" name="L 도형 14">
               <a:extLst>
                 <a:ext uri="{FF2B5EF4-FFF2-40B4-BE49-F238E27FC236}">
-                  <a16:creationId xmlns:a16="http://schemas.microsoft.com/office/drawing/2014/main" id="{0D83545F-EA24-B316-B6AD-E49BB677DCED}"/>
+                  <a16:creationId xmlns:a16="http://schemas.microsoft.com/office/drawing/2014/main" id="{C1BBBB1F-2080-F657-B9D3-EDC41813B5EF}"/>
                 </a:ext>
               </a:extLst>
             </p:cNvPr>
@@ -5379,7 +5494,7 @@
             <p:cNvPr id="16" name="L 도형 15">
               <a:extLst>
                 <a:ext uri="{FF2B5EF4-FFF2-40B4-BE49-F238E27FC236}">
-                  <a16:creationId xmlns:a16="http://schemas.microsoft.com/office/drawing/2014/main" id="{0A15FA0F-D622-F591-E3AB-BD1A21BE92D9}"/>
+                  <a16:creationId xmlns:a16="http://schemas.microsoft.com/office/drawing/2014/main" id="{C255AB45-9E19-5135-2840-6E83A0CEA2B5}"/>
                 </a:ext>
               </a:extLst>
             </p:cNvPr>
@@ -5437,7 +5552,7 @@
           <p:cNvPr id="18" name="그룹 17">
             <a:extLst>
               <a:ext uri="{FF2B5EF4-FFF2-40B4-BE49-F238E27FC236}">
-                <a16:creationId xmlns:a16="http://schemas.microsoft.com/office/drawing/2014/main" id="{E4D0B762-02AF-6784-F7A5-C5E081880D44}"/>
+                <a16:creationId xmlns:a16="http://schemas.microsoft.com/office/drawing/2014/main" id="{8C3E1EF8-8C3B-A192-11B5-BED425D3D79C}"/>
               </a:ext>
             </a:extLst>
           </p:cNvPr>
@@ -5457,7 +5572,7 @@
             <p:cNvPr id="4" name="TextBox 3">
               <a:extLst>
                 <a:ext uri="{FF2B5EF4-FFF2-40B4-BE49-F238E27FC236}">
-                  <a16:creationId xmlns:a16="http://schemas.microsoft.com/office/drawing/2014/main" id="{4677305B-6007-A492-C346-1FE19AA78EB8}"/>
+                  <a16:creationId xmlns:a16="http://schemas.microsoft.com/office/drawing/2014/main" id="{A9D039A7-DA18-313A-AF87-12621352F5CE}"/>
                 </a:ext>
               </a:extLst>
             </p:cNvPr>
@@ -5532,7 +5647,7 @@
             <p:cNvPr id="6" name="TextBox 5">
               <a:extLst>
                 <a:ext uri="{FF2B5EF4-FFF2-40B4-BE49-F238E27FC236}">
-                  <a16:creationId xmlns:a16="http://schemas.microsoft.com/office/drawing/2014/main" id="{91721AF9-B167-FB4A-7C44-CE13786BEA06}"/>
+                  <a16:creationId xmlns:a16="http://schemas.microsoft.com/office/drawing/2014/main" id="{DEEE7C7E-6934-B627-6EC0-48367D0769B1}"/>
                 </a:ext>
               </a:extLst>
             </p:cNvPr>
@@ -5599,7 +5714,7 @@
             <p:cNvPr id="10" name="그림 9">
               <a:extLst>
                 <a:ext uri="{FF2B5EF4-FFF2-40B4-BE49-F238E27FC236}">
-                  <a16:creationId xmlns:a16="http://schemas.microsoft.com/office/drawing/2014/main" id="{86819978-DB14-3FDA-53E5-6B25FE933B1F}"/>
+                  <a16:creationId xmlns:a16="http://schemas.microsoft.com/office/drawing/2014/main" id="{22CDF7ED-65DD-B2AB-0D3A-2876557659C7}"/>
                 </a:ext>
               </a:extLst>
             </p:cNvPr>
@@ -5629,7 +5744,7 @@
             <p:cNvPr id="30" name="그림 29">
               <a:extLst>
                 <a:ext uri="{FF2B5EF4-FFF2-40B4-BE49-F238E27FC236}">
-                  <a16:creationId xmlns:a16="http://schemas.microsoft.com/office/drawing/2014/main" id="{385AEA96-A161-20C4-23AE-0DBB8789F201}"/>
+                  <a16:creationId xmlns:a16="http://schemas.microsoft.com/office/drawing/2014/main" id="{CACE4F19-6C03-B4A0-12DF-B80E74EF21DC}"/>
                 </a:ext>
               </a:extLst>
             </p:cNvPr>
@@ -5660,7 +5775,7 @@
           <p:cNvPr id="31" name="TextBox 30">
             <a:extLst>
               <a:ext uri="{FF2B5EF4-FFF2-40B4-BE49-F238E27FC236}">
-                <a16:creationId xmlns:a16="http://schemas.microsoft.com/office/drawing/2014/main" id="{30BDDE92-38B9-06BB-82FE-1F8D8E70085D}"/>
+                <a16:creationId xmlns:a16="http://schemas.microsoft.com/office/drawing/2014/main" id="{8286C7F5-77BB-B584-5E2E-82705B55B19B}"/>
               </a:ext>
             </a:extLst>
           </p:cNvPr>
@@ -5670,7 +5785,7 @@
         <p:spPr>
           <a:xfrm>
             <a:off x="82843" y="781989"/>
-            <a:ext cx="2592376" cy="790345"/>
+            <a:ext cx="2258952" cy="786882"/>
           </a:xfrm>
           <a:prstGeom prst="rect">
             <a:avLst/>
@@ -5694,86 +5809,86 @@
               <a:buChar char="•"/>
             </a:pPr>
             <a:r>
-              <a:rPr lang="en-US" altLang="ko-KR" sz="800" b="1" dirty="0">
-                <a:latin typeface="KoPub돋움체 Bold" panose="00000800000000000000" pitchFamily="2" charset="-127"/>
-                <a:ea typeface="KoPub돋움체 Bold" panose="00000800000000000000" pitchFamily="2" charset="-127"/>
+              <a:rPr lang="en-US" altLang="ko-KR" sz="700" b="1" dirty="0">
+                <a:latin typeface="KoPub돋움체 Light" panose="02020603020101020101" pitchFamily="18" charset="-127"/>
+                <a:ea typeface="KoPub돋움체 Light" panose="02020603020101020101" pitchFamily="18" charset="-127"/>
               </a:rPr>
               <a:t>[</a:t>
             </a:r>
             <a:r>
-              <a:rPr lang="ko-KR" altLang="en-US" sz="800" b="1" dirty="0">
-                <a:latin typeface="KoPub돋움체 Bold" panose="00000800000000000000" pitchFamily="2" charset="-127"/>
-                <a:ea typeface="KoPub돋움체 Bold" panose="00000800000000000000" pitchFamily="2" charset="-127"/>
+              <a:rPr lang="ko-KR" altLang="en-US" sz="700" b="1" dirty="0">
+                <a:latin typeface="KoPub돋움체 Light" panose="02020603020101020101" pitchFamily="18" charset="-127"/>
+                <a:ea typeface="KoPub돋움체 Light" panose="02020603020101020101" pitchFamily="18" charset="-127"/>
               </a:rPr>
               <a:t>식별</a:t>
             </a:r>
             <a:r>
-              <a:rPr lang="en-US" altLang="ko-KR" sz="800" b="1" dirty="0">
-                <a:latin typeface="KoPub돋움체 Bold" panose="00000800000000000000" pitchFamily="2" charset="-127"/>
-                <a:ea typeface="KoPub돋움체 Bold" panose="00000800000000000000" pitchFamily="2" charset="-127"/>
+              <a:rPr lang="en-US" altLang="ko-KR" sz="700" b="1" dirty="0">
+                <a:latin typeface="KoPub돋움체 Light" panose="02020603020101020101" pitchFamily="18" charset="-127"/>
+                <a:ea typeface="KoPub돋움체 Light" panose="02020603020101020101" pitchFamily="18" charset="-127"/>
               </a:rPr>
               <a:t>] </a:t>
             </a:r>
             <a:r>
-              <a:rPr lang="ko-KR" altLang="en-US" sz="800" b="1" dirty="0">
-                <a:latin typeface="KoPub돋움체 Bold" panose="00000800000000000000" pitchFamily="2" charset="-127"/>
-                <a:ea typeface="KoPub돋움체 Bold" panose="00000800000000000000" pitchFamily="2" charset="-127"/>
+              <a:rPr lang="ko-KR" altLang="en-US" sz="700" b="1" dirty="0">
+                <a:latin typeface="KoPub돋움체 Light" panose="02020603020101020101" pitchFamily="18" charset="-127"/>
+                <a:ea typeface="KoPub돋움체 Light" panose="02020603020101020101" pitchFamily="18" charset="-127"/>
               </a:rPr>
               <a:t>첫머리 </a:t>
             </a:r>
             <a:r>
-              <a:rPr lang="en-US" altLang="ko-KR" sz="800" b="1" dirty="0">
-                <a:latin typeface="KoPub돋움체 Bold" panose="00000800000000000000" pitchFamily="2" charset="-127"/>
-                <a:ea typeface="KoPub돋움체 Bold" panose="00000800000000000000" pitchFamily="2" charset="-127"/>
+              <a:rPr lang="en-US" altLang="ko-KR" sz="700" b="1" dirty="0">
+                <a:latin typeface="KoPub돋움체 Light" panose="02020603020101020101" pitchFamily="18" charset="-127"/>
+                <a:ea typeface="KoPub돋움체 Light" panose="02020603020101020101" pitchFamily="18" charset="-127"/>
               </a:rPr>
               <a:t>[</a:t>
             </a:r>
             <a:r>
-              <a:rPr lang="ko-KR" altLang="en-US" sz="800" b="1" dirty="0">
-                <a:latin typeface="KoPub돋움체 Bold" panose="00000800000000000000" pitchFamily="2" charset="-127"/>
-                <a:ea typeface="KoPub돋움체 Bold" panose="00000800000000000000" pitchFamily="2" charset="-127"/>
+              <a:rPr lang="ko-KR" altLang="en-US" sz="700" b="1" dirty="0">
+                <a:latin typeface="KoPub돋움체 Light" panose="02020603020101020101" pitchFamily="18" charset="-127"/>
+                <a:ea typeface="KoPub돋움체 Light" panose="02020603020101020101" pitchFamily="18" charset="-127"/>
               </a:rPr>
               <a:t>병실</a:t>
             </a:r>
             <a:r>
-              <a:rPr lang="en-US" altLang="ko-KR" sz="800" b="1" dirty="0">
-                <a:latin typeface="KoPub돋움체 Bold" panose="00000800000000000000" pitchFamily="2" charset="-127"/>
-                <a:ea typeface="KoPub돋움체 Bold" panose="00000800000000000000" pitchFamily="2" charset="-127"/>
+              <a:rPr lang="en-US" altLang="ko-KR" sz="700" b="1" dirty="0">
+                <a:latin typeface="KoPub돋움체 Light" panose="02020603020101020101" pitchFamily="18" charset="-127"/>
+                <a:ea typeface="KoPub돋움체 Light" panose="02020603020101020101" pitchFamily="18" charset="-127"/>
               </a:rPr>
               <a:t>/</a:t>
             </a:r>
             <a:r>
-              <a:rPr lang="ko-KR" altLang="en-US" sz="800" b="1" dirty="0">
-                <a:latin typeface="KoPub돋움체 Bold" panose="00000800000000000000" pitchFamily="2" charset="-127"/>
-                <a:ea typeface="KoPub돋움체 Bold" panose="00000800000000000000" pitchFamily="2" charset="-127"/>
+              <a:rPr lang="ko-KR" altLang="en-US" sz="700" b="1" dirty="0">
+                <a:latin typeface="KoPub돋움체 Light" panose="02020603020101020101" pitchFamily="18" charset="-127"/>
+                <a:ea typeface="KoPub돋움체 Light" panose="02020603020101020101" pitchFamily="18" charset="-127"/>
               </a:rPr>
               <a:t>성함</a:t>
             </a:r>
             <a:r>
-              <a:rPr lang="en-US" altLang="ko-KR" sz="800" b="1" dirty="0">
-                <a:latin typeface="KoPub돋움체 Bold" panose="00000800000000000000" pitchFamily="2" charset="-127"/>
-                <a:ea typeface="KoPub돋움체 Bold" panose="00000800000000000000" pitchFamily="2" charset="-127"/>
+              <a:rPr lang="en-US" altLang="ko-KR" sz="700" b="1" dirty="0">
+                <a:latin typeface="KoPub돋움체 Light" panose="02020603020101020101" pitchFamily="18" charset="-127"/>
+                <a:ea typeface="KoPub돋움체 Light" panose="02020603020101020101" pitchFamily="18" charset="-127"/>
               </a:rPr>
               <a:t>/</a:t>
             </a:r>
             <a:r>
-              <a:rPr lang="ko-KR" altLang="en-US" sz="800" b="1" dirty="0">
-                <a:latin typeface="KoPub돋움체 Bold" panose="00000800000000000000" pitchFamily="2" charset="-127"/>
-                <a:ea typeface="KoPub돋움체 Bold" panose="00000800000000000000" pitchFamily="2" charset="-127"/>
+              <a:rPr lang="ko-KR" altLang="en-US" sz="700" b="1" dirty="0">
+                <a:latin typeface="KoPub돋움체 Light" panose="02020603020101020101" pitchFamily="18" charset="-127"/>
+                <a:ea typeface="KoPub돋움체 Light" panose="02020603020101020101" pitchFamily="18" charset="-127"/>
               </a:rPr>
               <a:t>사유</a:t>
             </a:r>
             <a:r>
-              <a:rPr lang="en-US" altLang="ko-KR" sz="800" b="1" dirty="0">
-                <a:latin typeface="KoPub돋움체 Bold" panose="00000800000000000000" pitchFamily="2" charset="-127"/>
-                <a:ea typeface="KoPub돋움체 Bold" panose="00000800000000000000" pitchFamily="2" charset="-127"/>
+              <a:rPr lang="en-US" altLang="ko-KR" sz="700" b="1" dirty="0">
+                <a:latin typeface="KoPub돋움체 Light" panose="02020603020101020101" pitchFamily="18" charset="-127"/>
+                <a:ea typeface="KoPub돋움체 Light" panose="02020603020101020101" pitchFamily="18" charset="-127"/>
               </a:rPr>
               <a:t>]</a:t>
             </a:r>
             <a:r>
-              <a:rPr lang="ko-KR" altLang="en-US" sz="800" b="1" dirty="0">
-                <a:latin typeface="KoPub돋움체 Bold" panose="00000800000000000000" pitchFamily="2" charset="-127"/>
-                <a:ea typeface="KoPub돋움체 Bold" panose="00000800000000000000" pitchFamily="2" charset="-127"/>
+              <a:rPr lang="ko-KR" altLang="en-US" sz="700" b="1" dirty="0">
+                <a:latin typeface="KoPub돋움체 Light" panose="02020603020101020101" pitchFamily="18" charset="-127"/>
+                <a:ea typeface="KoPub돋움체 Light" panose="02020603020101020101" pitchFamily="18" charset="-127"/>
               </a:rPr>
               <a:t>필수 기재</a:t>
             </a:r>
@@ -5790,65 +5905,65 @@
               <a:buChar char="•"/>
             </a:pPr>
             <a:r>
-              <a:rPr lang="en-US" altLang="ko-KR" sz="800" b="1" dirty="0">
-                <a:latin typeface="KoPub돋움체 Bold" panose="00000800000000000000" pitchFamily="2" charset="-127"/>
-                <a:ea typeface="KoPub돋움체 Bold" panose="00000800000000000000" pitchFamily="2" charset="-127"/>
+              <a:rPr lang="en-US" altLang="ko-KR" sz="700" b="1" dirty="0">
+                <a:latin typeface="KoPub돋움체 Light" panose="02020603020101020101" pitchFamily="18" charset="-127"/>
+                <a:ea typeface="KoPub돋움체 Light" panose="02020603020101020101" pitchFamily="18" charset="-127"/>
               </a:rPr>
               <a:t>[</a:t>
             </a:r>
             <a:r>
-              <a:rPr lang="ko-KR" altLang="en-US" sz="800" b="1" dirty="0">
-                <a:latin typeface="KoPub돋움체 Bold" panose="00000800000000000000" pitchFamily="2" charset="-127"/>
-                <a:ea typeface="KoPub돋움체 Bold" panose="00000800000000000000" pitchFamily="2" charset="-127"/>
+              <a:rPr lang="ko-KR" altLang="en-US" sz="700" b="1" dirty="0">
+                <a:latin typeface="KoPub돋움체 Light" panose="02020603020101020101" pitchFamily="18" charset="-127"/>
+                <a:ea typeface="KoPub돋움체 Light" panose="02020603020101020101" pitchFamily="18" charset="-127"/>
               </a:rPr>
               <a:t>공유</a:t>
             </a:r>
             <a:r>
-              <a:rPr lang="en-US" altLang="ko-KR" sz="800" b="1" dirty="0">
-                <a:latin typeface="KoPub돋움체 Bold" panose="00000800000000000000" pitchFamily="2" charset="-127"/>
-                <a:ea typeface="KoPub돋움체 Bold" panose="00000800000000000000" pitchFamily="2" charset="-127"/>
+              <a:rPr lang="en-US" altLang="ko-KR" sz="700" b="1" dirty="0">
+                <a:latin typeface="KoPub돋움체 Light" panose="02020603020101020101" pitchFamily="18" charset="-127"/>
+                <a:ea typeface="KoPub돋움체 Light" panose="02020603020101020101" pitchFamily="18" charset="-127"/>
               </a:rPr>
               <a:t>] </a:t>
             </a:r>
             <a:r>
-              <a:rPr lang="ko-KR" altLang="en-US" sz="800" b="1" dirty="0">
-                <a:latin typeface="KoPub돋움체 Bold" panose="00000800000000000000" pitchFamily="2" charset="-127"/>
-                <a:ea typeface="KoPub돋움체 Bold" panose="00000800000000000000" pitchFamily="2" charset="-127"/>
+              <a:rPr lang="ko-KR" altLang="en-US" sz="700" b="1" dirty="0">
+                <a:latin typeface="KoPub돋움체 Light" panose="02020603020101020101" pitchFamily="18" charset="-127"/>
+                <a:ea typeface="KoPub돋움체 Light" panose="02020603020101020101" pitchFamily="18" charset="-127"/>
               </a:rPr>
               <a:t>결정 사항의 </a:t>
             </a:r>
             <a:r>
-              <a:rPr lang="ko-KR" altLang="en-US" sz="800" b="1" dirty="0" err="1">
-                <a:latin typeface="KoPub돋움체 Bold" panose="00000800000000000000" pitchFamily="2" charset="-127"/>
-                <a:ea typeface="KoPub돋움체 Bold" panose="00000800000000000000" pitchFamily="2" charset="-127"/>
+              <a:rPr lang="ko-KR" altLang="en-US" sz="700" b="1" dirty="0" err="1">
+                <a:latin typeface="KoPub돋움체 Light" panose="02020603020101020101" pitchFamily="18" charset="-127"/>
+                <a:ea typeface="KoPub돋움체 Light" panose="02020603020101020101" pitchFamily="18" charset="-127"/>
               </a:rPr>
               <a:t>선제적</a:t>
             </a:r>
             <a:r>
-              <a:rPr lang="ko-KR" altLang="en-US" sz="800" b="1" dirty="0">
-                <a:latin typeface="KoPub돋움체 Bold" panose="00000800000000000000" pitchFamily="2" charset="-127"/>
-                <a:ea typeface="KoPub돋움체 Bold" panose="00000800000000000000" pitchFamily="2" charset="-127"/>
+              <a:rPr lang="ko-KR" altLang="en-US" sz="700" b="1" dirty="0">
+                <a:latin typeface="KoPub돋움체 Light" panose="02020603020101020101" pitchFamily="18" charset="-127"/>
+                <a:ea typeface="KoPub돋움체 Light" panose="02020603020101020101" pitchFamily="18" charset="-127"/>
               </a:rPr>
               <a:t> 알림 </a:t>
             </a:r>
             <a:r>
-              <a:rPr lang="en-US" altLang="ko-KR" sz="800" b="1" dirty="0">
-                <a:latin typeface="KoPub돋움체 Bold" panose="00000800000000000000" pitchFamily="2" charset="-127"/>
-                <a:ea typeface="KoPub돋움체 Bold" panose="00000800000000000000" pitchFamily="2" charset="-127"/>
+              <a:rPr lang="en-US" altLang="ko-KR" sz="700" b="1" dirty="0">
+                <a:latin typeface="KoPub돋움체 Light" panose="02020603020101020101" pitchFamily="18" charset="-127"/>
+                <a:ea typeface="KoPub돋움체 Light" panose="02020603020101020101" pitchFamily="18" charset="-127"/>
               </a:rPr>
               <a:t>(PA ↔ </a:t>
             </a:r>
             <a:r>
-              <a:rPr lang="ko-KR" altLang="en-US" sz="800" b="1" dirty="0">
-                <a:latin typeface="KoPub돋움체 Bold" panose="00000800000000000000" pitchFamily="2" charset="-127"/>
-                <a:ea typeface="KoPub돋움체 Bold" panose="00000800000000000000" pitchFamily="2" charset="-127"/>
+              <a:rPr lang="ko-KR" altLang="en-US" sz="700" b="1" dirty="0">
+                <a:latin typeface="KoPub돋움체 Light" panose="02020603020101020101" pitchFamily="18" charset="-127"/>
+                <a:ea typeface="KoPub돋움체 Light" panose="02020603020101020101" pitchFamily="18" charset="-127"/>
               </a:rPr>
               <a:t>병동</a:t>
             </a:r>
             <a:r>
-              <a:rPr lang="en-US" altLang="ko-KR" sz="800" b="1" dirty="0">
-                <a:latin typeface="KoPub돋움체 Bold" panose="00000800000000000000" pitchFamily="2" charset="-127"/>
-                <a:ea typeface="KoPub돋움체 Bold" panose="00000800000000000000" pitchFamily="2" charset="-127"/>
+              <a:rPr lang="en-US" altLang="ko-KR" sz="700" b="1" dirty="0">
+                <a:latin typeface="KoPub돋움체 Light" panose="02020603020101020101" pitchFamily="18" charset="-127"/>
+                <a:ea typeface="KoPub돋움체 Light" panose="02020603020101020101" pitchFamily="18" charset="-127"/>
               </a:rPr>
               <a:t>)</a:t>
             </a:r>
@@ -5865,93 +5980,93 @@
               <a:buChar char="•"/>
             </a:pPr>
             <a:r>
-              <a:rPr lang="en-US" altLang="ko-KR" sz="800" b="1" dirty="0">
-                <a:latin typeface="KoPub돋움체 Bold" panose="00000800000000000000" pitchFamily="2" charset="-127"/>
-                <a:ea typeface="KoPub돋움체 Bold" panose="00000800000000000000" pitchFamily="2" charset="-127"/>
+              <a:rPr lang="en-US" altLang="ko-KR" sz="700" b="1" dirty="0">
+                <a:latin typeface="KoPub돋움체 Light" panose="02020603020101020101" pitchFamily="18" charset="-127"/>
+                <a:ea typeface="KoPub돋움체 Light" panose="02020603020101020101" pitchFamily="18" charset="-127"/>
               </a:rPr>
               <a:t>[</a:t>
             </a:r>
             <a:r>
-              <a:rPr lang="ko-KR" altLang="en-US" sz="800" b="1" dirty="0">
-                <a:latin typeface="KoPub돋움체 Bold" panose="00000800000000000000" pitchFamily="2" charset="-127"/>
-                <a:ea typeface="KoPub돋움체 Bold" panose="00000800000000000000" pitchFamily="2" charset="-127"/>
+              <a:rPr lang="ko-KR" altLang="en-US" sz="700" b="1" dirty="0">
+                <a:latin typeface="KoPub돋움체 Light" panose="02020603020101020101" pitchFamily="18" charset="-127"/>
+                <a:ea typeface="KoPub돋움체 Light" panose="02020603020101020101" pitchFamily="18" charset="-127"/>
               </a:rPr>
               <a:t>원칙</a:t>
             </a:r>
             <a:r>
-              <a:rPr lang="en-US" altLang="ko-KR" sz="800" b="1" dirty="0">
-                <a:latin typeface="KoPub돋움체 Bold" panose="00000800000000000000" pitchFamily="2" charset="-127"/>
-                <a:ea typeface="KoPub돋움체 Bold" panose="00000800000000000000" pitchFamily="2" charset="-127"/>
+              <a:rPr lang="en-US" altLang="ko-KR" sz="700" b="1" dirty="0">
+                <a:latin typeface="KoPub돋움체 Light" panose="02020603020101020101" pitchFamily="18" charset="-127"/>
+                <a:ea typeface="KoPub돋움체 Light" panose="02020603020101020101" pitchFamily="18" charset="-127"/>
               </a:rPr>
               <a:t>] </a:t>
             </a:r>
             <a:r>
-              <a:rPr lang="ko-KR" altLang="en-US" sz="800" b="1" dirty="0">
-                <a:latin typeface="KoPub돋움체 Bold" panose="00000800000000000000" pitchFamily="2" charset="-127"/>
-                <a:ea typeface="KoPub돋움체 Bold" panose="00000800000000000000" pitchFamily="2" charset="-127"/>
+              <a:rPr lang="ko-KR" altLang="en-US" sz="700" b="1" dirty="0">
+                <a:latin typeface="KoPub돋움체 Light" panose="02020603020101020101" pitchFamily="18" charset="-127"/>
+                <a:ea typeface="KoPub돋움체 Light" panose="02020603020101020101" pitchFamily="18" charset="-127"/>
               </a:rPr>
               <a:t>공식 채널</a:t>
             </a:r>
             <a:r>
-              <a:rPr lang="en-US" altLang="ko-KR" sz="800" b="1" dirty="0">
-                <a:latin typeface="KoPub돋움체 Bold" panose="00000800000000000000" pitchFamily="2" charset="-127"/>
-                <a:ea typeface="KoPub돋움체 Bold" panose="00000800000000000000" pitchFamily="2" charset="-127"/>
+              <a:rPr lang="en-US" altLang="ko-KR" sz="700" b="1" dirty="0">
+                <a:latin typeface="KoPub돋움체 Light" panose="02020603020101020101" pitchFamily="18" charset="-127"/>
+                <a:ea typeface="KoPub돋움체 Light" panose="02020603020101020101" pitchFamily="18" charset="-127"/>
               </a:rPr>
               <a:t>(EMR/</a:t>
             </a:r>
             <a:r>
-              <a:rPr lang="ko-KR" altLang="en-US" sz="800" b="1" dirty="0">
-                <a:latin typeface="KoPub돋움체 Bold" panose="00000800000000000000" pitchFamily="2" charset="-127"/>
-                <a:ea typeface="KoPub돋움체 Bold" panose="00000800000000000000" pitchFamily="2" charset="-127"/>
+              <a:rPr lang="ko-KR" altLang="en-US" sz="700" b="1" dirty="0">
+                <a:latin typeface="KoPub돋움체 Light" panose="02020603020101020101" pitchFamily="18" charset="-127"/>
+                <a:ea typeface="KoPub돋움체 Light" panose="02020603020101020101" pitchFamily="18" charset="-127"/>
               </a:rPr>
               <a:t>유선</a:t>
             </a:r>
             <a:r>
-              <a:rPr lang="en-US" altLang="ko-KR" sz="800" b="1" dirty="0">
-                <a:latin typeface="KoPub돋움체 Bold" panose="00000800000000000000" pitchFamily="2" charset="-127"/>
-                <a:ea typeface="KoPub돋움체 Bold" panose="00000800000000000000" pitchFamily="2" charset="-127"/>
+              <a:rPr lang="en-US" altLang="ko-KR" sz="700" b="1" dirty="0">
+                <a:latin typeface="KoPub돋움체 Light" panose="02020603020101020101" pitchFamily="18" charset="-127"/>
+                <a:ea typeface="KoPub돋움체 Light" panose="02020603020101020101" pitchFamily="18" charset="-127"/>
               </a:rPr>
               <a:t>) </a:t>
             </a:r>
             <a:r>
-              <a:rPr lang="ko-KR" altLang="en-US" sz="800" b="1" dirty="0">
-                <a:latin typeface="KoPub돋움체 Bold" panose="00000800000000000000" pitchFamily="2" charset="-127"/>
-                <a:ea typeface="KoPub돋움체 Bold" panose="00000800000000000000" pitchFamily="2" charset="-127"/>
+              <a:rPr lang="ko-KR" altLang="en-US" sz="700" b="1" dirty="0">
+                <a:latin typeface="KoPub돋움체 Light" panose="02020603020101020101" pitchFamily="18" charset="-127"/>
+                <a:ea typeface="KoPub돋움체 Light" panose="02020603020101020101" pitchFamily="18" charset="-127"/>
               </a:rPr>
               <a:t>활용 </a:t>
             </a:r>
             <a:r>
-              <a:rPr lang="en-US" altLang="ko-KR" sz="800" b="1" dirty="0">
-                <a:latin typeface="KoPub돋움체 Bold" panose="00000800000000000000" pitchFamily="2" charset="-127"/>
-                <a:ea typeface="KoPub돋움체 Bold" panose="00000800000000000000" pitchFamily="2" charset="-127"/>
+              <a:rPr lang="en-US" altLang="ko-KR" sz="700" b="1" dirty="0">
+                <a:latin typeface="KoPub돋움체 Light" panose="02020603020101020101" pitchFamily="18" charset="-127"/>
+                <a:ea typeface="KoPub돋움체 Light" panose="02020603020101020101" pitchFamily="18" charset="-127"/>
               </a:rPr>
               <a:t>(</a:t>
             </a:r>
             <a:r>
-              <a:rPr lang="ko-KR" altLang="en-US" sz="800" b="1" dirty="0">
-                <a:latin typeface="KoPub돋움체 Bold" panose="00000800000000000000" pitchFamily="2" charset="-127"/>
-                <a:ea typeface="KoPub돋움체 Bold" panose="00000800000000000000" pitchFamily="2" charset="-127"/>
+              <a:rPr lang="ko-KR" altLang="en-US" sz="700" b="1" dirty="0">
+                <a:latin typeface="KoPub돋움체 Light" panose="02020603020101020101" pitchFamily="18" charset="-127"/>
+                <a:ea typeface="KoPub돋움체 Light" panose="02020603020101020101" pitchFamily="18" charset="-127"/>
               </a:rPr>
               <a:t>수술</a:t>
             </a:r>
             <a:r>
-              <a:rPr lang="en-US" altLang="ko-KR" sz="800" b="1" dirty="0">
-                <a:latin typeface="KoPub돋움체 Bold" panose="00000800000000000000" pitchFamily="2" charset="-127"/>
-                <a:ea typeface="KoPub돋움체 Bold" panose="00000800000000000000" pitchFamily="2" charset="-127"/>
+              <a:rPr lang="en-US" altLang="ko-KR" sz="700" b="1" dirty="0">
+                <a:latin typeface="KoPub돋움체 Light" panose="02020603020101020101" pitchFamily="18" charset="-127"/>
+                <a:ea typeface="KoPub돋움체 Light" panose="02020603020101020101" pitchFamily="18" charset="-127"/>
               </a:rPr>
               <a:t>, </a:t>
             </a:r>
             <a:r>
-              <a:rPr lang="ko-KR" altLang="en-US" sz="800" b="1" dirty="0">
-                <a:latin typeface="KoPub돋움체 Bold" panose="00000800000000000000" pitchFamily="2" charset="-127"/>
-                <a:ea typeface="KoPub돋움체 Bold" panose="00000800000000000000" pitchFamily="2" charset="-127"/>
+              <a:rPr lang="ko-KR" altLang="en-US" sz="700" b="1" dirty="0">
+                <a:latin typeface="KoPub돋움체 Light" panose="02020603020101020101" pitchFamily="18" charset="-127"/>
+                <a:ea typeface="KoPub돋움체 Light" panose="02020603020101020101" pitchFamily="18" charset="-127"/>
               </a:rPr>
               <a:t>검사 결과 보고</a:t>
             </a:r>
             <a:r>
-              <a:rPr lang="en-US" altLang="ko-KR" sz="800" b="1" dirty="0">
-                <a:latin typeface="KoPub돋움체 Bold" panose="00000800000000000000" pitchFamily="2" charset="-127"/>
-                <a:ea typeface="KoPub돋움체 Bold" panose="00000800000000000000" pitchFamily="2" charset="-127"/>
+              <a:rPr lang="en-US" altLang="ko-KR" sz="700" b="1" dirty="0">
+                <a:latin typeface="KoPub돋움체 Light" panose="02020603020101020101" pitchFamily="18" charset="-127"/>
+                <a:ea typeface="KoPub돋움체 Light" panose="02020603020101020101" pitchFamily="18" charset="-127"/>
               </a:rPr>
               <a:t>)</a:t>
             </a:r>
@@ -5968,44 +6083,44 @@
               <a:buChar char="•"/>
             </a:pPr>
             <a:r>
-              <a:rPr lang="en-US" altLang="ko-KR" sz="800" b="1" dirty="0">
-                <a:latin typeface="KoPub돋움체 Bold" panose="00000800000000000000" pitchFamily="2" charset="-127"/>
-                <a:ea typeface="KoPub돋움체 Bold" panose="00000800000000000000" pitchFamily="2" charset="-127"/>
+              <a:rPr lang="en-US" altLang="ko-KR" sz="700" b="1" dirty="0">
+                <a:latin typeface="KoPub돋움체 Light" panose="02020603020101020101" pitchFamily="18" charset="-127"/>
+                <a:ea typeface="KoPub돋움체 Light" panose="02020603020101020101" pitchFamily="18" charset="-127"/>
               </a:rPr>
               <a:t>[</a:t>
             </a:r>
             <a:r>
-              <a:rPr lang="ko-KR" altLang="en-US" sz="800" b="1" dirty="0">
-                <a:latin typeface="KoPub돋움체 Bold" panose="00000800000000000000" pitchFamily="2" charset="-127"/>
-                <a:ea typeface="KoPub돋움체 Bold" panose="00000800000000000000" pitchFamily="2" charset="-127"/>
+              <a:rPr lang="ko-KR" altLang="en-US" sz="700" b="1" dirty="0">
+                <a:latin typeface="KoPub돋움체 Light" panose="02020603020101020101" pitchFamily="18" charset="-127"/>
+                <a:ea typeface="KoPub돋움체 Light" panose="02020603020101020101" pitchFamily="18" charset="-127"/>
               </a:rPr>
               <a:t>완결</a:t>
             </a:r>
             <a:r>
-              <a:rPr lang="en-US" altLang="ko-KR" sz="800" b="1" dirty="0">
-                <a:latin typeface="KoPub돋움체 Bold" panose="00000800000000000000" pitchFamily="2" charset="-127"/>
-                <a:ea typeface="KoPub돋움체 Bold" panose="00000800000000000000" pitchFamily="2" charset="-127"/>
+              <a:rPr lang="en-US" altLang="ko-KR" sz="700" b="1" dirty="0">
+                <a:latin typeface="KoPub돋움체 Light" panose="02020603020101020101" pitchFamily="18" charset="-127"/>
+                <a:ea typeface="KoPub돋움체 Light" panose="02020603020101020101" pitchFamily="18" charset="-127"/>
               </a:rPr>
               <a:t>] [</a:t>
             </a:r>
             <a:r>
-              <a:rPr lang="ko-KR" altLang="en-US" sz="800" b="1" dirty="0">
-                <a:latin typeface="KoPub돋움체 Bold" panose="00000800000000000000" pitchFamily="2" charset="-127"/>
-                <a:ea typeface="KoPub돋움체 Bold" panose="00000800000000000000" pitchFamily="2" charset="-127"/>
+              <a:rPr lang="ko-KR" altLang="en-US" sz="700" b="1" dirty="0">
+                <a:latin typeface="KoPub돋움체 Light" panose="02020603020101020101" pitchFamily="18" charset="-127"/>
+                <a:ea typeface="KoPub돋움체 Light" panose="02020603020101020101" pitchFamily="18" charset="-127"/>
               </a:rPr>
               <a:t>답장</a:t>
             </a:r>
             <a:r>
-              <a:rPr lang="en-US" altLang="ko-KR" sz="800" b="1" dirty="0">
-                <a:latin typeface="KoPub돋움체 Bold" panose="00000800000000000000" pitchFamily="2" charset="-127"/>
-                <a:ea typeface="KoPub돋움체 Bold" panose="00000800000000000000" pitchFamily="2" charset="-127"/>
+              <a:rPr lang="en-US" altLang="ko-KR" sz="700" b="1" dirty="0">
+                <a:latin typeface="KoPub돋움체 Light" panose="02020603020101020101" pitchFamily="18" charset="-127"/>
+                <a:ea typeface="KoPub돋움체 Light" panose="02020603020101020101" pitchFamily="18" charset="-127"/>
               </a:rPr>
               <a:t>(Reply)]</a:t>
             </a:r>
             <a:r>
-              <a:rPr lang="ko-KR" altLang="en-US" sz="800" b="1" dirty="0">
-                <a:latin typeface="KoPub돋움체 Bold" panose="00000800000000000000" pitchFamily="2" charset="-127"/>
-                <a:ea typeface="KoPub돋움체 Bold" panose="00000800000000000000" pitchFamily="2" charset="-127"/>
+              <a:rPr lang="ko-KR" altLang="en-US" sz="700" b="1" dirty="0">
+                <a:latin typeface="KoPub돋움체 Light" panose="02020603020101020101" pitchFamily="18" charset="-127"/>
+                <a:ea typeface="KoPub돋움체 Light" panose="02020603020101020101" pitchFamily="18" charset="-127"/>
               </a:rPr>
               <a:t>기능 필수 활용</a:t>
             </a:r>
@@ -6022,58 +6137,58 @@
               <a:buChar char="•"/>
             </a:pPr>
             <a:r>
-              <a:rPr lang="en-US" altLang="ko-KR" sz="800" b="1" dirty="0">
-                <a:latin typeface="KoPub돋움체 Bold" panose="00000800000000000000" pitchFamily="2" charset="-127"/>
-                <a:ea typeface="KoPub돋움체 Bold" panose="00000800000000000000" pitchFamily="2" charset="-127"/>
+              <a:rPr lang="en-US" altLang="ko-KR" sz="700" b="1" dirty="0">
+                <a:latin typeface="KoPub돋움체 Light" panose="02020603020101020101" pitchFamily="18" charset="-127"/>
+                <a:ea typeface="KoPub돋움체 Light" panose="02020603020101020101" pitchFamily="18" charset="-127"/>
               </a:rPr>
               <a:t>[</a:t>
             </a:r>
             <a:r>
-              <a:rPr lang="ko-KR" altLang="en-US" sz="800" b="1" dirty="0">
-                <a:latin typeface="KoPub돋움체 Bold" panose="00000800000000000000" pitchFamily="2" charset="-127"/>
-                <a:ea typeface="KoPub돋움체 Bold" panose="00000800000000000000" pitchFamily="2" charset="-127"/>
+              <a:rPr lang="ko-KR" altLang="en-US" sz="700" b="1" dirty="0">
+                <a:latin typeface="KoPub돋움체 Light" panose="02020603020101020101" pitchFamily="18" charset="-127"/>
+                <a:ea typeface="KoPub돋움체 Light" panose="02020603020101020101" pitchFamily="18" charset="-127"/>
               </a:rPr>
               <a:t>대응</a:t>
             </a:r>
             <a:r>
-              <a:rPr lang="en-US" altLang="ko-KR" sz="800" b="1" dirty="0">
-                <a:latin typeface="KoPub돋움체 Bold" panose="00000800000000000000" pitchFamily="2" charset="-127"/>
-                <a:ea typeface="KoPub돋움체 Bold" panose="00000800000000000000" pitchFamily="2" charset="-127"/>
+              <a:rPr lang="en-US" altLang="ko-KR" sz="700" b="1" dirty="0">
+                <a:latin typeface="KoPub돋움체 Light" panose="02020603020101020101" pitchFamily="18" charset="-127"/>
+                <a:ea typeface="KoPub돋움체 Light" panose="02020603020101020101" pitchFamily="18" charset="-127"/>
               </a:rPr>
               <a:t>] </a:t>
             </a:r>
             <a:r>
-              <a:rPr lang="ko-KR" altLang="en-US" sz="800" b="1" dirty="0">
-                <a:latin typeface="KoPub돋움체 Bold" panose="00000800000000000000" pitchFamily="2" charset="-127"/>
-                <a:ea typeface="KoPub돋움체 Bold" panose="00000800000000000000" pitchFamily="2" charset="-127"/>
+              <a:rPr lang="ko-KR" altLang="en-US" sz="700" b="1" dirty="0">
+                <a:latin typeface="KoPub돋움체 Light" panose="02020603020101020101" pitchFamily="18" charset="-127"/>
+                <a:ea typeface="KoPub돋움체 Light" panose="02020603020101020101" pitchFamily="18" charset="-127"/>
               </a:rPr>
               <a:t>메신저 응답 </a:t>
             </a:r>
             <a:r>
-              <a:rPr lang="en-US" altLang="ko-KR" sz="800" b="1" dirty="0">
-                <a:latin typeface="KoPub돋움체 Bold" panose="00000800000000000000" pitchFamily="2" charset="-127"/>
-                <a:ea typeface="KoPub돋움체 Bold" panose="00000800000000000000" pitchFamily="2" charset="-127"/>
+              <a:rPr lang="en-US" altLang="ko-KR" sz="700" b="1" dirty="0">
+                <a:latin typeface="KoPub돋움체 Light" panose="02020603020101020101" pitchFamily="18" charset="-127"/>
+                <a:ea typeface="KoPub돋움체 Light" panose="02020603020101020101" pitchFamily="18" charset="-127"/>
               </a:rPr>
               <a:t>'10</a:t>
             </a:r>
             <a:r>
-              <a:rPr lang="ko-KR" altLang="en-US" sz="800" b="1" dirty="0">
-                <a:latin typeface="KoPub돋움체 Bold" panose="00000800000000000000" pitchFamily="2" charset="-127"/>
-                <a:ea typeface="KoPub돋움체 Bold" panose="00000800000000000000" pitchFamily="2" charset="-127"/>
+              <a:rPr lang="ko-KR" altLang="en-US" sz="700" b="1" dirty="0">
+                <a:latin typeface="KoPub돋움체 Light" panose="02020603020101020101" pitchFamily="18" charset="-127"/>
+                <a:ea typeface="KoPub돋움체 Light" panose="02020603020101020101" pitchFamily="18" charset="-127"/>
               </a:rPr>
               <a:t>분 룰</a:t>
             </a:r>
             <a:r>
-              <a:rPr lang="en-US" altLang="ko-KR" sz="800" b="1" dirty="0">
-                <a:latin typeface="KoPub돋움체 Bold" panose="00000800000000000000" pitchFamily="2" charset="-127"/>
-                <a:ea typeface="KoPub돋움체 Bold" panose="00000800000000000000" pitchFamily="2" charset="-127"/>
+              <a:rPr lang="en-US" altLang="ko-KR" sz="700" b="1" dirty="0">
+                <a:latin typeface="KoPub돋움체 Light" panose="02020603020101020101" pitchFamily="18" charset="-127"/>
+                <a:ea typeface="KoPub돋움체 Light" panose="02020603020101020101" pitchFamily="18" charset="-127"/>
               </a:rPr>
               <a:t>(Rule)' </a:t>
             </a:r>
             <a:r>
-              <a:rPr lang="ko-KR" altLang="en-US" sz="800" b="1" dirty="0">
-                <a:latin typeface="KoPub돋움체 Bold" panose="00000800000000000000" pitchFamily="2" charset="-127"/>
-                <a:ea typeface="KoPub돋움체 Bold" panose="00000800000000000000" pitchFamily="2" charset="-127"/>
+              <a:rPr lang="ko-KR" altLang="en-US" sz="700" b="1" dirty="0">
+                <a:latin typeface="KoPub돋움체 Light" panose="02020603020101020101" pitchFamily="18" charset="-127"/>
+                <a:ea typeface="KoPub돋움체 Light" panose="02020603020101020101" pitchFamily="18" charset="-127"/>
               </a:rPr>
               <a:t>적용</a:t>
             </a:r>
@@ -6083,7 +6198,7 @@
     </p:spTree>
     <p:extLst>
       <p:ext uri="{BB962C8B-B14F-4D97-AF65-F5344CB8AC3E}">
-        <p14:creationId xmlns:p14="http://schemas.microsoft.com/office/powerpoint/2010/main" val="3435437932"/>
+        <p14:creationId xmlns:p14="http://schemas.microsoft.com/office/powerpoint/2010/main" val="2870025244"/>
       </p:ext>
     </p:extLst>
   </p:cSld>
@@ -6101,7 +6216,7 @@
         <p:cNvPr id="1" name="">
           <a:extLst>
             <a:ext uri="{FF2B5EF4-FFF2-40B4-BE49-F238E27FC236}">
-              <a16:creationId xmlns:a16="http://schemas.microsoft.com/office/drawing/2014/main" id="{BAA12EC8-194A-8C00-0CA9-0727007234DB}"/>
+              <a16:creationId xmlns:a16="http://schemas.microsoft.com/office/drawing/2014/main" id="{EF66A5B3-163B-6F07-10F6-516CFF5236F4}"/>
             </a:ext>
           </a:extLst>
         </p:cNvPr>
@@ -6121,7 +6236,7 @@
           <p:cNvPr id="3" name="TextBox 2">
             <a:extLst>
               <a:ext uri="{FF2B5EF4-FFF2-40B4-BE49-F238E27FC236}">
-                <a16:creationId xmlns:a16="http://schemas.microsoft.com/office/drawing/2014/main" id="{ECB8C652-C5C5-77B8-99FF-8C1B5938DDC0}"/>
+                <a16:creationId xmlns:a16="http://schemas.microsoft.com/office/drawing/2014/main" id="{1A26FCE8-5EF0-0DF6-F8B5-C649DC205363}"/>
               </a:ext>
             </a:extLst>
           </p:cNvPr>
@@ -6159,7 +6274,7 @@
           <p:cNvPr id="17" name="그룹 16">
             <a:extLst>
               <a:ext uri="{FF2B5EF4-FFF2-40B4-BE49-F238E27FC236}">
-                <a16:creationId xmlns:a16="http://schemas.microsoft.com/office/drawing/2014/main" id="{AC2A831D-C44C-ECDE-295B-4D7EECD506B5}"/>
+                <a16:creationId xmlns:a16="http://schemas.microsoft.com/office/drawing/2014/main" id="{1A49BD73-09B6-9576-4A99-AEFE0F7F42C3}"/>
               </a:ext>
             </a:extLst>
           </p:cNvPr>
@@ -6179,7 +6294,7 @@
             <p:cNvPr id="5" name="그림 4" descr="패턴, 사각형, 예술, 직사각형이(가) 표시된 사진&#10;&#10;AI 생성 콘텐츠는 정확하지 않을 수 있습니다.">
               <a:extLst>
                 <a:ext uri="{FF2B5EF4-FFF2-40B4-BE49-F238E27FC236}">
-                  <a16:creationId xmlns:a16="http://schemas.microsoft.com/office/drawing/2014/main" id="{9AF0A680-A546-C66D-333B-F0383EFF91DD}"/>
+                  <a16:creationId xmlns:a16="http://schemas.microsoft.com/office/drawing/2014/main" id="{237758EC-8039-A3EA-24AD-2B5B0B1F60A1}"/>
                 </a:ext>
               </a:extLst>
             </p:cNvPr>
@@ -6209,7 +6324,7 @@
             <p:cNvPr id="13" name="L 도형 12">
               <a:extLst>
                 <a:ext uri="{FF2B5EF4-FFF2-40B4-BE49-F238E27FC236}">
-                  <a16:creationId xmlns:a16="http://schemas.microsoft.com/office/drawing/2014/main" id="{241B1B8D-3AAC-7967-5C34-BE1CE0E4E7F1}"/>
+                  <a16:creationId xmlns:a16="http://schemas.microsoft.com/office/drawing/2014/main" id="{1386BAC4-C977-A7C2-6D4E-8D1313D44B3B}"/>
                 </a:ext>
               </a:extLst>
             </p:cNvPr>
@@ -6266,7 +6381,7 @@
             <p:cNvPr id="14" name="L 도형 13">
               <a:extLst>
                 <a:ext uri="{FF2B5EF4-FFF2-40B4-BE49-F238E27FC236}">
-                  <a16:creationId xmlns:a16="http://schemas.microsoft.com/office/drawing/2014/main" id="{2EA9A3A1-2936-970C-7A69-55D4FE99E86A}"/>
+                  <a16:creationId xmlns:a16="http://schemas.microsoft.com/office/drawing/2014/main" id="{925A8E91-1465-F155-CE7D-07F92B383DAE}"/>
                 </a:ext>
               </a:extLst>
             </p:cNvPr>
@@ -6323,7 +6438,7 @@
             <p:cNvPr id="15" name="L 도형 14">
               <a:extLst>
                 <a:ext uri="{FF2B5EF4-FFF2-40B4-BE49-F238E27FC236}">
-                  <a16:creationId xmlns:a16="http://schemas.microsoft.com/office/drawing/2014/main" id="{408CF039-E898-D4BA-4817-331156B094C3}"/>
+                  <a16:creationId xmlns:a16="http://schemas.microsoft.com/office/drawing/2014/main" id="{C1BBBB1F-2080-F657-B9D3-EDC41813B5EF}"/>
                 </a:ext>
               </a:extLst>
             </p:cNvPr>
@@ -6380,7 +6495,7 @@
             <p:cNvPr id="16" name="L 도형 15">
               <a:extLst>
                 <a:ext uri="{FF2B5EF4-FFF2-40B4-BE49-F238E27FC236}">
-                  <a16:creationId xmlns:a16="http://schemas.microsoft.com/office/drawing/2014/main" id="{74D0F0DB-663F-20B1-9C55-772A4CA03319}"/>
+                  <a16:creationId xmlns:a16="http://schemas.microsoft.com/office/drawing/2014/main" id="{C255AB45-9E19-5135-2840-6E83A0CEA2B5}"/>
                 </a:ext>
               </a:extLst>
             </p:cNvPr>
@@ -6438,7 +6553,7 @@
           <p:cNvPr id="18" name="그룹 17">
             <a:extLst>
               <a:ext uri="{FF2B5EF4-FFF2-40B4-BE49-F238E27FC236}">
-                <a16:creationId xmlns:a16="http://schemas.microsoft.com/office/drawing/2014/main" id="{188983EB-296F-BBFD-FBA9-91E07EE72348}"/>
+                <a16:creationId xmlns:a16="http://schemas.microsoft.com/office/drawing/2014/main" id="{8C3E1EF8-8C3B-A192-11B5-BED425D3D79C}"/>
               </a:ext>
             </a:extLst>
           </p:cNvPr>
@@ -6458,7 +6573,7 @@
             <p:cNvPr id="4" name="TextBox 3">
               <a:extLst>
                 <a:ext uri="{FF2B5EF4-FFF2-40B4-BE49-F238E27FC236}">
-                  <a16:creationId xmlns:a16="http://schemas.microsoft.com/office/drawing/2014/main" id="{F66AAF09-31FE-26FC-2FB0-B8D02E7AF1F1}"/>
+                  <a16:creationId xmlns:a16="http://schemas.microsoft.com/office/drawing/2014/main" id="{A9D039A7-DA18-313A-AF87-12621352F5CE}"/>
                 </a:ext>
               </a:extLst>
             </p:cNvPr>
@@ -6533,7 +6648,7 @@
             <p:cNvPr id="6" name="TextBox 5">
               <a:extLst>
                 <a:ext uri="{FF2B5EF4-FFF2-40B4-BE49-F238E27FC236}">
-                  <a16:creationId xmlns:a16="http://schemas.microsoft.com/office/drawing/2014/main" id="{54A0752C-9789-18EF-5BAA-38C04B086EDB}"/>
+                  <a16:creationId xmlns:a16="http://schemas.microsoft.com/office/drawing/2014/main" id="{DEEE7C7E-6934-B627-6EC0-48367D0769B1}"/>
                 </a:ext>
               </a:extLst>
             </p:cNvPr>
@@ -6600,7 +6715,7 @@
             <p:cNvPr id="10" name="그림 9">
               <a:extLst>
                 <a:ext uri="{FF2B5EF4-FFF2-40B4-BE49-F238E27FC236}">
-                  <a16:creationId xmlns:a16="http://schemas.microsoft.com/office/drawing/2014/main" id="{5A939EB4-0387-B056-7B13-E24AE7132CBA}"/>
+                  <a16:creationId xmlns:a16="http://schemas.microsoft.com/office/drawing/2014/main" id="{22CDF7ED-65DD-B2AB-0D3A-2876557659C7}"/>
                 </a:ext>
               </a:extLst>
             </p:cNvPr>
@@ -6630,7 +6745,7 @@
             <p:cNvPr id="30" name="그림 29">
               <a:extLst>
                 <a:ext uri="{FF2B5EF4-FFF2-40B4-BE49-F238E27FC236}">
-                  <a16:creationId xmlns:a16="http://schemas.microsoft.com/office/drawing/2014/main" id="{D4CEAAA8-E19B-66C3-DDA1-FAAA8A759B4F}"/>
+                  <a16:creationId xmlns:a16="http://schemas.microsoft.com/office/drawing/2014/main" id="{CACE4F19-6C03-B4A0-12DF-B80E74EF21DC}"/>
                 </a:ext>
               </a:extLst>
             </p:cNvPr>
@@ -6661,7 +6776,7 @@
           <p:cNvPr id="31" name="TextBox 30">
             <a:extLst>
               <a:ext uri="{FF2B5EF4-FFF2-40B4-BE49-F238E27FC236}">
-                <a16:creationId xmlns:a16="http://schemas.microsoft.com/office/drawing/2014/main" id="{9611EB94-5D24-9E99-9D8A-1251B0D8BFBB}"/>
+                <a16:creationId xmlns:a16="http://schemas.microsoft.com/office/drawing/2014/main" id="{8286C7F5-77BB-B584-5E2E-82705B55B19B}"/>
               </a:ext>
             </a:extLst>
           </p:cNvPr>
@@ -6671,7 +6786,7 @@
         <p:spPr>
           <a:xfrm>
             <a:off x="82843" y="781989"/>
-            <a:ext cx="2592376" cy="790345"/>
+            <a:ext cx="2258952" cy="786882"/>
           </a:xfrm>
           <a:prstGeom prst="rect">
             <a:avLst/>
@@ -6695,86 +6810,86 @@
               <a:buChar char="•"/>
             </a:pPr>
             <a:r>
-              <a:rPr lang="en-US" altLang="ko-KR" sz="800" b="1" dirty="0">
-                <a:latin typeface="KoPub돋움체 Bold" panose="00000800000000000000" pitchFamily="2" charset="-127"/>
-                <a:ea typeface="KoPub돋움체 Bold" panose="00000800000000000000" pitchFamily="2" charset="-127"/>
+              <a:rPr lang="en-US" altLang="ko-KR" sz="700" b="1" dirty="0">
+                <a:latin typeface="KoPub돋움체 Light" panose="02020603020101020101" pitchFamily="18" charset="-127"/>
+                <a:ea typeface="KoPub돋움체 Light" panose="02020603020101020101" pitchFamily="18" charset="-127"/>
               </a:rPr>
               <a:t>[</a:t>
             </a:r>
             <a:r>
-              <a:rPr lang="ko-KR" altLang="en-US" sz="800" b="1" dirty="0">
-                <a:latin typeface="KoPub돋움체 Bold" panose="00000800000000000000" pitchFamily="2" charset="-127"/>
-                <a:ea typeface="KoPub돋움체 Bold" panose="00000800000000000000" pitchFamily="2" charset="-127"/>
+              <a:rPr lang="ko-KR" altLang="en-US" sz="700" b="1" dirty="0">
+                <a:latin typeface="KoPub돋움체 Light" panose="02020603020101020101" pitchFamily="18" charset="-127"/>
+                <a:ea typeface="KoPub돋움체 Light" panose="02020603020101020101" pitchFamily="18" charset="-127"/>
               </a:rPr>
               <a:t>식별</a:t>
             </a:r>
             <a:r>
-              <a:rPr lang="en-US" altLang="ko-KR" sz="800" b="1" dirty="0">
-                <a:latin typeface="KoPub돋움체 Bold" panose="00000800000000000000" pitchFamily="2" charset="-127"/>
-                <a:ea typeface="KoPub돋움체 Bold" panose="00000800000000000000" pitchFamily="2" charset="-127"/>
+              <a:rPr lang="en-US" altLang="ko-KR" sz="700" b="1" dirty="0">
+                <a:latin typeface="KoPub돋움체 Light" panose="02020603020101020101" pitchFamily="18" charset="-127"/>
+                <a:ea typeface="KoPub돋움체 Light" panose="02020603020101020101" pitchFamily="18" charset="-127"/>
               </a:rPr>
               <a:t>] </a:t>
             </a:r>
             <a:r>
-              <a:rPr lang="ko-KR" altLang="en-US" sz="800" b="1" dirty="0">
-                <a:latin typeface="KoPub돋움체 Bold" panose="00000800000000000000" pitchFamily="2" charset="-127"/>
-                <a:ea typeface="KoPub돋움체 Bold" panose="00000800000000000000" pitchFamily="2" charset="-127"/>
+              <a:rPr lang="ko-KR" altLang="en-US" sz="700" b="1" dirty="0">
+                <a:latin typeface="KoPub돋움체 Light" panose="02020603020101020101" pitchFamily="18" charset="-127"/>
+                <a:ea typeface="KoPub돋움체 Light" panose="02020603020101020101" pitchFamily="18" charset="-127"/>
               </a:rPr>
               <a:t>첫머리 </a:t>
             </a:r>
             <a:r>
-              <a:rPr lang="en-US" altLang="ko-KR" sz="800" b="1" dirty="0">
-                <a:latin typeface="KoPub돋움체 Bold" panose="00000800000000000000" pitchFamily="2" charset="-127"/>
-                <a:ea typeface="KoPub돋움체 Bold" panose="00000800000000000000" pitchFamily="2" charset="-127"/>
+              <a:rPr lang="en-US" altLang="ko-KR" sz="700" b="1" dirty="0">
+                <a:latin typeface="KoPub돋움체 Light" panose="02020603020101020101" pitchFamily="18" charset="-127"/>
+                <a:ea typeface="KoPub돋움체 Light" panose="02020603020101020101" pitchFamily="18" charset="-127"/>
               </a:rPr>
               <a:t>[</a:t>
             </a:r>
             <a:r>
-              <a:rPr lang="ko-KR" altLang="en-US" sz="800" b="1" dirty="0">
-                <a:latin typeface="KoPub돋움체 Bold" panose="00000800000000000000" pitchFamily="2" charset="-127"/>
-                <a:ea typeface="KoPub돋움체 Bold" panose="00000800000000000000" pitchFamily="2" charset="-127"/>
+              <a:rPr lang="ko-KR" altLang="en-US" sz="700" b="1" dirty="0">
+                <a:latin typeface="KoPub돋움체 Light" panose="02020603020101020101" pitchFamily="18" charset="-127"/>
+                <a:ea typeface="KoPub돋움체 Light" panose="02020603020101020101" pitchFamily="18" charset="-127"/>
               </a:rPr>
               <a:t>병실</a:t>
             </a:r>
             <a:r>
-              <a:rPr lang="en-US" altLang="ko-KR" sz="800" b="1" dirty="0">
-                <a:latin typeface="KoPub돋움체 Bold" panose="00000800000000000000" pitchFamily="2" charset="-127"/>
-                <a:ea typeface="KoPub돋움체 Bold" panose="00000800000000000000" pitchFamily="2" charset="-127"/>
+              <a:rPr lang="en-US" altLang="ko-KR" sz="700" b="1" dirty="0">
+                <a:latin typeface="KoPub돋움체 Light" panose="02020603020101020101" pitchFamily="18" charset="-127"/>
+                <a:ea typeface="KoPub돋움체 Light" panose="02020603020101020101" pitchFamily="18" charset="-127"/>
               </a:rPr>
               <a:t>/</a:t>
             </a:r>
             <a:r>
-              <a:rPr lang="ko-KR" altLang="en-US" sz="800" b="1" dirty="0">
-                <a:latin typeface="KoPub돋움체 Bold" panose="00000800000000000000" pitchFamily="2" charset="-127"/>
-                <a:ea typeface="KoPub돋움체 Bold" panose="00000800000000000000" pitchFamily="2" charset="-127"/>
+              <a:rPr lang="ko-KR" altLang="en-US" sz="700" b="1" dirty="0">
+                <a:latin typeface="KoPub돋움체 Light" panose="02020603020101020101" pitchFamily="18" charset="-127"/>
+                <a:ea typeface="KoPub돋움체 Light" panose="02020603020101020101" pitchFamily="18" charset="-127"/>
               </a:rPr>
               <a:t>성함</a:t>
             </a:r>
             <a:r>
-              <a:rPr lang="en-US" altLang="ko-KR" sz="800" b="1" dirty="0">
-                <a:latin typeface="KoPub돋움체 Bold" panose="00000800000000000000" pitchFamily="2" charset="-127"/>
-                <a:ea typeface="KoPub돋움체 Bold" panose="00000800000000000000" pitchFamily="2" charset="-127"/>
+              <a:rPr lang="en-US" altLang="ko-KR" sz="700" b="1" dirty="0">
+                <a:latin typeface="KoPub돋움체 Light" panose="02020603020101020101" pitchFamily="18" charset="-127"/>
+                <a:ea typeface="KoPub돋움체 Light" panose="02020603020101020101" pitchFamily="18" charset="-127"/>
               </a:rPr>
               <a:t>/</a:t>
             </a:r>
             <a:r>
-              <a:rPr lang="ko-KR" altLang="en-US" sz="800" b="1" dirty="0">
-                <a:latin typeface="KoPub돋움체 Bold" panose="00000800000000000000" pitchFamily="2" charset="-127"/>
-                <a:ea typeface="KoPub돋움체 Bold" panose="00000800000000000000" pitchFamily="2" charset="-127"/>
+              <a:rPr lang="ko-KR" altLang="en-US" sz="700" b="1" dirty="0">
+                <a:latin typeface="KoPub돋움체 Light" panose="02020603020101020101" pitchFamily="18" charset="-127"/>
+                <a:ea typeface="KoPub돋움체 Light" panose="02020603020101020101" pitchFamily="18" charset="-127"/>
               </a:rPr>
               <a:t>사유</a:t>
             </a:r>
             <a:r>
-              <a:rPr lang="en-US" altLang="ko-KR" sz="800" b="1" dirty="0">
-                <a:latin typeface="KoPub돋움체 Bold" panose="00000800000000000000" pitchFamily="2" charset="-127"/>
-                <a:ea typeface="KoPub돋움체 Bold" panose="00000800000000000000" pitchFamily="2" charset="-127"/>
+              <a:rPr lang="en-US" altLang="ko-KR" sz="700" b="1" dirty="0">
+                <a:latin typeface="KoPub돋움체 Light" panose="02020603020101020101" pitchFamily="18" charset="-127"/>
+                <a:ea typeface="KoPub돋움체 Light" panose="02020603020101020101" pitchFamily="18" charset="-127"/>
               </a:rPr>
               <a:t>]</a:t>
             </a:r>
             <a:r>
-              <a:rPr lang="ko-KR" altLang="en-US" sz="800" b="1" dirty="0">
-                <a:latin typeface="KoPub돋움체 Bold" panose="00000800000000000000" pitchFamily="2" charset="-127"/>
-                <a:ea typeface="KoPub돋움체 Bold" panose="00000800000000000000" pitchFamily="2" charset="-127"/>
+              <a:rPr lang="ko-KR" altLang="en-US" sz="700" b="1" dirty="0">
+                <a:latin typeface="KoPub돋움체 Light" panose="02020603020101020101" pitchFamily="18" charset="-127"/>
+                <a:ea typeface="KoPub돋움체 Light" panose="02020603020101020101" pitchFamily="18" charset="-127"/>
               </a:rPr>
               <a:t>필수 기재</a:t>
             </a:r>
@@ -6791,65 +6906,65 @@
               <a:buChar char="•"/>
             </a:pPr>
             <a:r>
-              <a:rPr lang="en-US" altLang="ko-KR" sz="800" b="1" dirty="0">
-                <a:latin typeface="KoPub돋움체 Bold" panose="00000800000000000000" pitchFamily="2" charset="-127"/>
-                <a:ea typeface="KoPub돋움체 Bold" panose="00000800000000000000" pitchFamily="2" charset="-127"/>
+              <a:rPr lang="en-US" altLang="ko-KR" sz="700" b="1" dirty="0">
+                <a:latin typeface="KoPub돋움체 Light" panose="02020603020101020101" pitchFamily="18" charset="-127"/>
+                <a:ea typeface="KoPub돋움체 Light" panose="02020603020101020101" pitchFamily="18" charset="-127"/>
               </a:rPr>
               <a:t>[</a:t>
             </a:r>
             <a:r>
-              <a:rPr lang="ko-KR" altLang="en-US" sz="800" b="1" dirty="0">
-                <a:latin typeface="KoPub돋움체 Bold" panose="00000800000000000000" pitchFamily="2" charset="-127"/>
-                <a:ea typeface="KoPub돋움체 Bold" panose="00000800000000000000" pitchFamily="2" charset="-127"/>
+              <a:rPr lang="ko-KR" altLang="en-US" sz="700" b="1" dirty="0">
+                <a:latin typeface="KoPub돋움체 Light" panose="02020603020101020101" pitchFamily="18" charset="-127"/>
+                <a:ea typeface="KoPub돋움체 Light" panose="02020603020101020101" pitchFamily="18" charset="-127"/>
               </a:rPr>
               <a:t>공유</a:t>
             </a:r>
             <a:r>
-              <a:rPr lang="en-US" altLang="ko-KR" sz="800" b="1" dirty="0">
-                <a:latin typeface="KoPub돋움체 Bold" panose="00000800000000000000" pitchFamily="2" charset="-127"/>
-                <a:ea typeface="KoPub돋움체 Bold" panose="00000800000000000000" pitchFamily="2" charset="-127"/>
+              <a:rPr lang="en-US" altLang="ko-KR" sz="700" b="1" dirty="0">
+                <a:latin typeface="KoPub돋움체 Light" panose="02020603020101020101" pitchFamily="18" charset="-127"/>
+                <a:ea typeface="KoPub돋움체 Light" panose="02020603020101020101" pitchFamily="18" charset="-127"/>
               </a:rPr>
               <a:t>] </a:t>
             </a:r>
             <a:r>
-              <a:rPr lang="ko-KR" altLang="en-US" sz="800" b="1" dirty="0">
-                <a:latin typeface="KoPub돋움체 Bold" panose="00000800000000000000" pitchFamily="2" charset="-127"/>
-                <a:ea typeface="KoPub돋움체 Bold" panose="00000800000000000000" pitchFamily="2" charset="-127"/>
+              <a:rPr lang="ko-KR" altLang="en-US" sz="700" b="1" dirty="0">
+                <a:latin typeface="KoPub돋움체 Light" panose="02020603020101020101" pitchFamily="18" charset="-127"/>
+                <a:ea typeface="KoPub돋움체 Light" panose="02020603020101020101" pitchFamily="18" charset="-127"/>
               </a:rPr>
               <a:t>결정 사항의 </a:t>
             </a:r>
             <a:r>
-              <a:rPr lang="ko-KR" altLang="en-US" sz="800" b="1" dirty="0" err="1">
-                <a:latin typeface="KoPub돋움체 Bold" panose="00000800000000000000" pitchFamily="2" charset="-127"/>
-                <a:ea typeface="KoPub돋움체 Bold" panose="00000800000000000000" pitchFamily="2" charset="-127"/>
+              <a:rPr lang="ko-KR" altLang="en-US" sz="700" b="1" dirty="0" err="1">
+                <a:latin typeface="KoPub돋움체 Light" panose="02020603020101020101" pitchFamily="18" charset="-127"/>
+                <a:ea typeface="KoPub돋움체 Light" panose="02020603020101020101" pitchFamily="18" charset="-127"/>
               </a:rPr>
               <a:t>선제적</a:t>
             </a:r>
             <a:r>
-              <a:rPr lang="ko-KR" altLang="en-US" sz="800" b="1" dirty="0">
-                <a:latin typeface="KoPub돋움체 Bold" panose="00000800000000000000" pitchFamily="2" charset="-127"/>
-                <a:ea typeface="KoPub돋움체 Bold" panose="00000800000000000000" pitchFamily="2" charset="-127"/>
+              <a:rPr lang="ko-KR" altLang="en-US" sz="700" b="1" dirty="0">
+                <a:latin typeface="KoPub돋움체 Light" panose="02020603020101020101" pitchFamily="18" charset="-127"/>
+                <a:ea typeface="KoPub돋움체 Light" panose="02020603020101020101" pitchFamily="18" charset="-127"/>
               </a:rPr>
               <a:t> 알림 </a:t>
             </a:r>
             <a:r>
-              <a:rPr lang="en-US" altLang="ko-KR" sz="800" b="1" dirty="0">
-                <a:latin typeface="KoPub돋움체 Bold" panose="00000800000000000000" pitchFamily="2" charset="-127"/>
-                <a:ea typeface="KoPub돋움체 Bold" panose="00000800000000000000" pitchFamily="2" charset="-127"/>
+              <a:rPr lang="en-US" altLang="ko-KR" sz="700" b="1" dirty="0">
+                <a:latin typeface="KoPub돋움체 Light" panose="02020603020101020101" pitchFamily="18" charset="-127"/>
+                <a:ea typeface="KoPub돋움체 Light" panose="02020603020101020101" pitchFamily="18" charset="-127"/>
               </a:rPr>
               <a:t>(PA ↔ </a:t>
             </a:r>
             <a:r>
-              <a:rPr lang="ko-KR" altLang="en-US" sz="800" b="1" dirty="0">
-                <a:latin typeface="KoPub돋움체 Bold" panose="00000800000000000000" pitchFamily="2" charset="-127"/>
-                <a:ea typeface="KoPub돋움체 Bold" panose="00000800000000000000" pitchFamily="2" charset="-127"/>
+              <a:rPr lang="ko-KR" altLang="en-US" sz="700" b="1" dirty="0">
+                <a:latin typeface="KoPub돋움체 Light" panose="02020603020101020101" pitchFamily="18" charset="-127"/>
+                <a:ea typeface="KoPub돋움체 Light" panose="02020603020101020101" pitchFamily="18" charset="-127"/>
               </a:rPr>
               <a:t>병동</a:t>
             </a:r>
             <a:r>
-              <a:rPr lang="en-US" altLang="ko-KR" sz="800" b="1" dirty="0">
-                <a:latin typeface="KoPub돋움체 Bold" panose="00000800000000000000" pitchFamily="2" charset="-127"/>
-                <a:ea typeface="KoPub돋움체 Bold" panose="00000800000000000000" pitchFamily="2" charset="-127"/>
+              <a:rPr lang="en-US" altLang="ko-KR" sz="700" b="1" dirty="0">
+                <a:latin typeface="KoPub돋움체 Light" panose="02020603020101020101" pitchFamily="18" charset="-127"/>
+                <a:ea typeface="KoPub돋움체 Light" panose="02020603020101020101" pitchFamily="18" charset="-127"/>
               </a:rPr>
               <a:t>)</a:t>
             </a:r>
@@ -6866,93 +6981,93 @@
               <a:buChar char="•"/>
             </a:pPr>
             <a:r>
-              <a:rPr lang="en-US" altLang="ko-KR" sz="800" b="1" dirty="0">
-                <a:latin typeface="KoPub돋움체 Bold" panose="00000800000000000000" pitchFamily="2" charset="-127"/>
-                <a:ea typeface="KoPub돋움체 Bold" panose="00000800000000000000" pitchFamily="2" charset="-127"/>
+              <a:rPr lang="en-US" altLang="ko-KR" sz="700" b="1" dirty="0">
+                <a:latin typeface="KoPub돋움체 Light" panose="02020603020101020101" pitchFamily="18" charset="-127"/>
+                <a:ea typeface="KoPub돋움체 Light" panose="02020603020101020101" pitchFamily="18" charset="-127"/>
               </a:rPr>
               <a:t>[</a:t>
             </a:r>
             <a:r>
-              <a:rPr lang="ko-KR" altLang="en-US" sz="800" b="1" dirty="0">
-                <a:latin typeface="KoPub돋움체 Bold" panose="00000800000000000000" pitchFamily="2" charset="-127"/>
-                <a:ea typeface="KoPub돋움체 Bold" panose="00000800000000000000" pitchFamily="2" charset="-127"/>
+              <a:rPr lang="ko-KR" altLang="en-US" sz="700" b="1" dirty="0">
+                <a:latin typeface="KoPub돋움체 Light" panose="02020603020101020101" pitchFamily="18" charset="-127"/>
+                <a:ea typeface="KoPub돋움체 Light" panose="02020603020101020101" pitchFamily="18" charset="-127"/>
               </a:rPr>
               <a:t>원칙</a:t>
             </a:r>
             <a:r>
-              <a:rPr lang="en-US" altLang="ko-KR" sz="800" b="1" dirty="0">
-                <a:latin typeface="KoPub돋움체 Bold" panose="00000800000000000000" pitchFamily="2" charset="-127"/>
-                <a:ea typeface="KoPub돋움체 Bold" panose="00000800000000000000" pitchFamily="2" charset="-127"/>
+              <a:rPr lang="en-US" altLang="ko-KR" sz="700" b="1" dirty="0">
+                <a:latin typeface="KoPub돋움체 Light" panose="02020603020101020101" pitchFamily="18" charset="-127"/>
+                <a:ea typeface="KoPub돋움체 Light" panose="02020603020101020101" pitchFamily="18" charset="-127"/>
               </a:rPr>
               <a:t>] </a:t>
             </a:r>
             <a:r>
-              <a:rPr lang="ko-KR" altLang="en-US" sz="800" b="1" dirty="0">
-                <a:latin typeface="KoPub돋움체 Bold" panose="00000800000000000000" pitchFamily="2" charset="-127"/>
-                <a:ea typeface="KoPub돋움체 Bold" panose="00000800000000000000" pitchFamily="2" charset="-127"/>
+              <a:rPr lang="ko-KR" altLang="en-US" sz="700" b="1" dirty="0">
+                <a:latin typeface="KoPub돋움체 Light" panose="02020603020101020101" pitchFamily="18" charset="-127"/>
+                <a:ea typeface="KoPub돋움체 Light" panose="02020603020101020101" pitchFamily="18" charset="-127"/>
               </a:rPr>
               <a:t>공식 채널</a:t>
             </a:r>
             <a:r>
-              <a:rPr lang="en-US" altLang="ko-KR" sz="800" b="1" dirty="0">
-                <a:latin typeface="KoPub돋움체 Bold" panose="00000800000000000000" pitchFamily="2" charset="-127"/>
-                <a:ea typeface="KoPub돋움체 Bold" panose="00000800000000000000" pitchFamily="2" charset="-127"/>
+              <a:rPr lang="en-US" altLang="ko-KR" sz="700" b="1" dirty="0">
+                <a:latin typeface="KoPub돋움체 Light" panose="02020603020101020101" pitchFamily="18" charset="-127"/>
+                <a:ea typeface="KoPub돋움체 Light" panose="02020603020101020101" pitchFamily="18" charset="-127"/>
               </a:rPr>
               <a:t>(EMR/</a:t>
             </a:r>
             <a:r>
-              <a:rPr lang="ko-KR" altLang="en-US" sz="800" b="1" dirty="0">
-                <a:latin typeface="KoPub돋움체 Bold" panose="00000800000000000000" pitchFamily="2" charset="-127"/>
-                <a:ea typeface="KoPub돋움체 Bold" panose="00000800000000000000" pitchFamily="2" charset="-127"/>
+              <a:rPr lang="ko-KR" altLang="en-US" sz="700" b="1" dirty="0">
+                <a:latin typeface="KoPub돋움체 Light" panose="02020603020101020101" pitchFamily="18" charset="-127"/>
+                <a:ea typeface="KoPub돋움체 Light" panose="02020603020101020101" pitchFamily="18" charset="-127"/>
               </a:rPr>
               <a:t>유선</a:t>
             </a:r>
             <a:r>
-              <a:rPr lang="en-US" altLang="ko-KR" sz="800" b="1" dirty="0">
-                <a:latin typeface="KoPub돋움체 Bold" panose="00000800000000000000" pitchFamily="2" charset="-127"/>
-                <a:ea typeface="KoPub돋움체 Bold" panose="00000800000000000000" pitchFamily="2" charset="-127"/>
+              <a:rPr lang="en-US" altLang="ko-KR" sz="700" b="1" dirty="0">
+                <a:latin typeface="KoPub돋움체 Light" panose="02020603020101020101" pitchFamily="18" charset="-127"/>
+                <a:ea typeface="KoPub돋움체 Light" panose="02020603020101020101" pitchFamily="18" charset="-127"/>
               </a:rPr>
               <a:t>) </a:t>
             </a:r>
             <a:r>
-              <a:rPr lang="ko-KR" altLang="en-US" sz="800" b="1" dirty="0">
-                <a:latin typeface="KoPub돋움체 Bold" panose="00000800000000000000" pitchFamily="2" charset="-127"/>
-                <a:ea typeface="KoPub돋움체 Bold" panose="00000800000000000000" pitchFamily="2" charset="-127"/>
+              <a:rPr lang="ko-KR" altLang="en-US" sz="700" b="1" dirty="0">
+                <a:latin typeface="KoPub돋움체 Light" panose="02020603020101020101" pitchFamily="18" charset="-127"/>
+                <a:ea typeface="KoPub돋움체 Light" panose="02020603020101020101" pitchFamily="18" charset="-127"/>
               </a:rPr>
               <a:t>활용 </a:t>
             </a:r>
             <a:r>
-              <a:rPr lang="en-US" altLang="ko-KR" sz="800" b="1" dirty="0">
-                <a:latin typeface="KoPub돋움체 Bold" panose="00000800000000000000" pitchFamily="2" charset="-127"/>
-                <a:ea typeface="KoPub돋움체 Bold" panose="00000800000000000000" pitchFamily="2" charset="-127"/>
+              <a:rPr lang="en-US" altLang="ko-KR" sz="700" b="1" dirty="0">
+                <a:latin typeface="KoPub돋움체 Light" panose="02020603020101020101" pitchFamily="18" charset="-127"/>
+                <a:ea typeface="KoPub돋움체 Light" panose="02020603020101020101" pitchFamily="18" charset="-127"/>
               </a:rPr>
               <a:t>(</a:t>
             </a:r>
             <a:r>
-              <a:rPr lang="ko-KR" altLang="en-US" sz="800" b="1" dirty="0">
-                <a:latin typeface="KoPub돋움체 Bold" panose="00000800000000000000" pitchFamily="2" charset="-127"/>
-                <a:ea typeface="KoPub돋움체 Bold" panose="00000800000000000000" pitchFamily="2" charset="-127"/>
+              <a:rPr lang="ko-KR" altLang="en-US" sz="700" b="1" dirty="0">
+                <a:latin typeface="KoPub돋움체 Light" panose="02020603020101020101" pitchFamily="18" charset="-127"/>
+                <a:ea typeface="KoPub돋움체 Light" panose="02020603020101020101" pitchFamily="18" charset="-127"/>
               </a:rPr>
               <a:t>수술</a:t>
             </a:r>
             <a:r>
-              <a:rPr lang="en-US" altLang="ko-KR" sz="800" b="1" dirty="0">
-                <a:latin typeface="KoPub돋움체 Bold" panose="00000800000000000000" pitchFamily="2" charset="-127"/>
-                <a:ea typeface="KoPub돋움체 Bold" panose="00000800000000000000" pitchFamily="2" charset="-127"/>
+              <a:rPr lang="en-US" altLang="ko-KR" sz="700" b="1" dirty="0">
+                <a:latin typeface="KoPub돋움체 Light" panose="02020603020101020101" pitchFamily="18" charset="-127"/>
+                <a:ea typeface="KoPub돋움체 Light" panose="02020603020101020101" pitchFamily="18" charset="-127"/>
               </a:rPr>
               <a:t>, </a:t>
             </a:r>
             <a:r>
-              <a:rPr lang="ko-KR" altLang="en-US" sz="800" b="1" dirty="0">
-                <a:latin typeface="KoPub돋움체 Bold" panose="00000800000000000000" pitchFamily="2" charset="-127"/>
-                <a:ea typeface="KoPub돋움체 Bold" panose="00000800000000000000" pitchFamily="2" charset="-127"/>
+              <a:rPr lang="ko-KR" altLang="en-US" sz="700" b="1" dirty="0">
+                <a:latin typeface="KoPub돋움체 Light" panose="02020603020101020101" pitchFamily="18" charset="-127"/>
+                <a:ea typeface="KoPub돋움체 Light" panose="02020603020101020101" pitchFamily="18" charset="-127"/>
               </a:rPr>
               <a:t>검사 결과 보고</a:t>
             </a:r>
             <a:r>
-              <a:rPr lang="en-US" altLang="ko-KR" sz="800" b="1" dirty="0">
-                <a:latin typeface="KoPub돋움체 Bold" panose="00000800000000000000" pitchFamily="2" charset="-127"/>
-                <a:ea typeface="KoPub돋움체 Bold" panose="00000800000000000000" pitchFamily="2" charset="-127"/>
+              <a:rPr lang="en-US" altLang="ko-KR" sz="700" b="1" dirty="0">
+                <a:latin typeface="KoPub돋움체 Light" panose="02020603020101020101" pitchFamily="18" charset="-127"/>
+                <a:ea typeface="KoPub돋움체 Light" panose="02020603020101020101" pitchFamily="18" charset="-127"/>
               </a:rPr>
               <a:t>)</a:t>
             </a:r>
@@ -6969,44 +7084,44 @@
               <a:buChar char="•"/>
             </a:pPr>
             <a:r>
-              <a:rPr lang="en-US" altLang="ko-KR" sz="800" b="1" dirty="0">
-                <a:latin typeface="KoPub돋움체 Bold" panose="00000800000000000000" pitchFamily="2" charset="-127"/>
-                <a:ea typeface="KoPub돋움체 Bold" panose="00000800000000000000" pitchFamily="2" charset="-127"/>
+              <a:rPr lang="en-US" altLang="ko-KR" sz="700" b="1" dirty="0">
+                <a:latin typeface="KoPub돋움체 Light" panose="02020603020101020101" pitchFamily="18" charset="-127"/>
+                <a:ea typeface="KoPub돋움체 Light" panose="02020603020101020101" pitchFamily="18" charset="-127"/>
               </a:rPr>
               <a:t>[</a:t>
             </a:r>
             <a:r>
-              <a:rPr lang="ko-KR" altLang="en-US" sz="800" b="1" dirty="0">
-                <a:latin typeface="KoPub돋움체 Bold" panose="00000800000000000000" pitchFamily="2" charset="-127"/>
-                <a:ea typeface="KoPub돋움체 Bold" panose="00000800000000000000" pitchFamily="2" charset="-127"/>
+              <a:rPr lang="ko-KR" altLang="en-US" sz="700" b="1" dirty="0">
+                <a:latin typeface="KoPub돋움체 Light" panose="02020603020101020101" pitchFamily="18" charset="-127"/>
+                <a:ea typeface="KoPub돋움체 Light" panose="02020603020101020101" pitchFamily="18" charset="-127"/>
               </a:rPr>
               <a:t>완결</a:t>
             </a:r>
             <a:r>
-              <a:rPr lang="en-US" altLang="ko-KR" sz="800" b="1" dirty="0">
-                <a:latin typeface="KoPub돋움체 Bold" panose="00000800000000000000" pitchFamily="2" charset="-127"/>
-                <a:ea typeface="KoPub돋움체 Bold" panose="00000800000000000000" pitchFamily="2" charset="-127"/>
+              <a:rPr lang="en-US" altLang="ko-KR" sz="700" b="1" dirty="0">
+                <a:latin typeface="KoPub돋움체 Light" panose="02020603020101020101" pitchFamily="18" charset="-127"/>
+                <a:ea typeface="KoPub돋움체 Light" panose="02020603020101020101" pitchFamily="18" charset="-127"/>
               </a:rPr>
               <a:t>] [</a:t>
             </a:r>
             <a:r>
-              <a:rPr lang="ko-KR" altLang="en-US" sz="800" b="1" dirty="0">
-                <a:latin typeface="KoPub돋움체 Bold" panose="00000800000000000000" pitchFamily="2" charset="-127"/>
-                <a:ea typeface="KoPub돋움체 Bold" panose="00000800000000000000" pitchFamily="2" charset="-127"/>
+              <a:rPr lang="ko-KR" altLang="en-US" sz="700" b="1" dirty="0">
+                <a:latin typeface="KoPub돋움체 Light" panose="02020603020101020101" pitchFamily="18" charset="-127"/>
+                <a:ea typeface="KoPub돋움체 Light" panose="02020603020101020101" pitchFamily="18" charset="-127"/>
               </a:rPr>
               <a:t>답장</a:t>
             </a:r>
             <a:r>
-              <a:rPr lang="en-US" altLang="ko-KR" sz="800" b="1" dirty="0">
-                <a:latin typeface="KoPub돋움체 Bold" panose="00000800000000000000" pitchFamily="2" charset="-127"/>
-                <a:ea typeface="KoPub돋움체 Bold" panose="00000800000000000000" pitchFamily="2" charset="-127"/>
+              <a:rPr lang="en-US" altLang="ko-KR" sz="700" b="1" dirty="0">
+                <a:latin typeface="KoPub돋움체 Light" panose="02020603020101020101" pitchFamily="18" charset="-127"/>
+                <a:ea typeface="KoPub돋움체 Light" panose="02020603020101020101" pitchFamily="18" charset="-127"/>
               </a:rPr>
               <a:t>(Reply)]</a:t>
             </a:r>
             <a:r>
-              <a:rPr lang="ko-KR" altLang="en-US" sz="800" b="1" dirty="0">
-                <a:latin typeface="KoPub돋움체 Bold" panose="00000800000000000000" pitchFamily="2" charset="-127"/>
-                <a:ea typeface="KoPub돋움체 Bold" panose="00000800000000000000" pitchFamily="2" charset="-127"/>
+              <a:rPr lang="ko-KR" altLang="en-US" sz="700" b="1" dirty="0">
+                <a:latin typeface="KoPub돋움체 Light" panose="02020603020101020101" pitchFamily="18" charset="-127"/>
+                <a:ea typeface="KoPub돋움체 Light" panose="02020603020101020101" pitchFamily="18" charset="-127"/>
               </a:rPr>
               <a:t>기능 필수 활용</a:t>
             </a:r>
@@ -7023,58 +7138,58 @@
               <a:buChar char="•"/>
             </a:pPr>
             <a:r>
-              <a:rPr lang="en-US" altLang="ko-KR" sz="800" b="1" dirty="0">
-                <a:latin typeface="KoPub돋움체 Bold" panose="00000800000000000000" pitchFamily="2" charset="-127"/>
-                <a:ea typeface="KoPub돋움체 Bold" panose="00000800000000000000" pitchFamily="2" charset="-127"/>
+              <a:rPr lang="en-US" altLang="ko-KR" sz="700" b="1" dirty="0">
+                <a:latin typeface="KoPub돋움체 Light" panose="02020603020101020101" pitchFamily="18" charset="-127"/>
+                <a:ea typeface="KoPub돋움체 Light" panose="02020603020101020101" pitchFamily="18" charset="-127"/>
               </a:rPr>
               <a:t>[</a:t>
             </a:r>
             <a:r>
-              <a:rPr lang="ko-KR" altLang="en-US" sz="800" b="1" dirty="0">
-                <a:latin typeface="KoPub돋움체 Bold" panose="00000800000000000000" pitchFamily="2" charset="-127"/>
-                <a:ea typeface="KoPub돋움체 Bold" panose="00000800000000000000" pitchFamily="2" charset="-127"/>
+              <a:rPr lang="ko-KR" altLang="en-US" sz="700" b="1" dirty="0">
+                <a:latin typeface="KoPub돋움체 Light" panose="02020603020101020101" pitchFamily="18" charset="-127"/>
+                <a:ea typeface="KoPub돋움체 Light" panose="02020603020101020101" pitchFamily="18" charset="-127"/>
               </a:rPr>
               <a:t>대응</a:t>
             </a:r>
             <a:r>
-              <a:rPr lang="en-US" altLang="ko-KR" sz="800" b="1" dirty="0">
-                <a:latin typeface="KoPub돋움체 Bold" panose="00000800000000000000" pitchFamily="2" charset="-127"/>
-                <a:ea typeface="KoPub돋움체 Bold" panose="00000800000000000000" pitchFamily="2" charset="-127"/>
+              <a:rPr lang="en-US" altLang="ko-KR" sz="700" b="1" dirty="0">
+                <a:latin typeface="KoPub돋움체 Light" panose="02020603020101020101" pitchFamily="18" charset="-127"/>
+                <a:ea typeface="KoPub돋움체 Light" panose="02020603020101020101" pitchFamily="18" charset="-127"/>
               </a:rPr>
               <a:t>] </a:t>
             </a:r>
             <a:r>
-              <a:rPr lang="ko-KR" altLang="en-US" sz="800" b="1" dirty="0">
-                <a:latin typeface="KoPub돋움체 Bold" panose="00000800000000000000" pitchFamily="2" charset="-127"/>
-                <a:ea typeface="KoPub돋움체 Bold" panose="00000800000000000000" pitchFamily="2" charset="-127"/>
+              <a:rPr lang="ko-KR" altLang="en-US" sz="700" b="1" dirty="0">
+                <a:latin typeface="KoPub돋움체 Light" panose="02020603020101020101" pitchFamily="18" charset="-127"/>
+                <a:ea typeface="KoPub돋움체 Light" panose="02020603020101020101" pitchFamily="18" charset="-127"/>
               </a:rPr>
               <a:t>메신저 응답 </a:t>
             </a:r>
             <a:r>
-              <a:rPr lang="en-US" altLang="ko-KR" sz="800" b="1" dirty="0">
-                <a:latin typeface="KoPub돋움체 Bold" panose="00000800000000000000" pitchFamily="2" charset="-127"/>
-                <a:ea typeface="KoPub돋움체 Bold" panose="00000800000000000000" pitchFamily="2" charset="-127"/>
+              <a:rPr lang="en-US" altLang="ko-KR" sz="700" b="1" dirty="0">
+                <a:latin typeface="KoPub돋움체 Light" panose="02020603020101020101" pitchFamily="18" charset="-127"/>
+                <a:ea typeface="KoPub돋움체 Light" panose="02020603020101020101" pitchFamily="18" charset="-127"/>
               </a:rPr>
               <a:t>'10</a:t>
             </a:r>
             <a:r>
-              <a:rPr lang="ko-KR" altLang="en-US" sz="800" b="1" dirty="0">
-                <a:latin typeface="KoPub돋움체 Bold" panose="00000800000000000000" pitchFamily="2" charset="-127"/>
-                <a:ea typeface="KoPub돋움체 Bold" panose="00000800000000000000" pitchFamily="2" charset="-127"/>
+              <a:rPr lang="ko-KR" altLang="en-US" sz="700" b="1" dirty="0">
+                <a:latin typeface="KoPub돋움체 Light" panose="02020603020101020101" pitchFamily="18" charset="-127"/>
+                <a:ea typeface="KoPub돋움체 Light" panose="02020603020101020101" pitchFamily="18" charset="-127"/>
               </a:rPr>
               <a:t>분 룰</a:t>
             </a:r>
             <a:r>
-              <a:rPr lang="en-US" altLang="ko-KR" sz="800" b="1" dirty="0">
-                <a:latin typeface="KoPub돋움체 Bold" panose="00000800000000000000" pitchFamily="2" charset="-127"/>
-                <a:ea typeface="KoPub돋움체 Bold" panose="00000800000000000000" pitchFamily="2" charset="-127"/>
+              <a:rPr lang="en-US" altLang="ko-KR" sz="700" b="1" dirty="0">
+                <a:latin typeface="KoPub돋움체 Light" panose="02020603020101020101" pitchFamily="18" charset="-127"/>
+                <a:ea typeface="KoPub돋움체 Light" panose="02020603020101020101" pitchFamily="18" charset="-127"/>
               </a:rPr>
               <a:t>(Rule)' </a:t>
             </a:r>
             <a:r>
-              <a:rPr lang="ko-KR" altLang="en-US" sz="800" b="1" dirty="0">
-                <a:latin typeface="KoPub돋움체 Bold" panose="00000800000000000000" pitchFamily="2" charset="-127"/>
-                <a:ea typeface="KoPub돋움체 Bold" panose="00000800000000000000" pitchFamily="2" charset="-127"/>
+              <a:rPr lang="ko-KR" altLang="en-US" sz="700" b="1" dirty="0">
+                <a:latin typeface="KoPub돋움체 Light" panose="02020603020101020101" pitchFamily="18" charset="-127"/>
+                <a:ea typeface="KoPub돋움체 Light" panose="02020603020101020101" pitchFamily="18" charset="-127"/>
               </a:rPr>
               <a:t>적용</a:t>
             </a:r>
@@ -7084,7 +7199,7 @@
     </p:spTree>
     <p:extLst>
       <p:ext uri="{BB962C8B-B14F-4D97-AF65-F5344CB8AC3E}">
-        <p14:creationId xmlns:p14="http://schemas.microsoft.com/office/powerpoint/2010/main" val="3678952818"/>
+        <p14:creationId xmlns:p14="http://schemas.microsoft.com/office/powerpoint/2010/main" val="885637962"/>
       </p:ext>
     </p:extLst>
   </p:cSld>
@@ -7102,7 +7217,7 @@
         <p:cNvPr id="1" name="">
           <a:extLst>
             <a:ext uri="{FF2B5EF4-FFF2-40B4-BE49-F238E27FC236}">
-              <a16:creationId xmlns:a16="http://schemas.microsoft.com/office/drawing/2014/main" id="{3B6E841A-094F-E21B-4984-7C2AB68E90B9}"/>
+              <a16:creationId xmlns:a16="http://schemas.microsoft.com/office/drawing/2014/main" id="{EF66A5B3-163B-6F07-10F6-516CFF5236F4}"/>
             </a:ext>
           </a:extLst>
         </p:cNvPr>
@@ -7122,7 +7237,7 @@
           <p:cNvPr id="3" name="TextBox 2">
             <a:extLst>
               <a:ext uri="{FF2B5EF4-FFF2-40B4-BE49-F238E27FC236}">
-                <a16:creationId xmlns:a16="http://schemas.microsoft.com/office/drawing/2014/main" id="{030BFB71-8789-32EB-AE5E-E28CB8CEA0FE}"/>
+                <a16:creationId xmlns:a16="http://schemas.microsoft.com/office/drawing/2014/main" id="{1A26FCE8-5EF0-0DF6-F8B5-C649DC205363}"/>
               </a:ext>
             </a:extLst>
           </p:cNvPr>
@@ -7160,7 +7275,7 @@
           <p:cNvPr id="17" name="그룹 16">
             <a:extLst>
               <a:ext uri="{FF2B5EF4-FFF2-40B4-BE49-F238E27FC236}">
-                <a16:creationId xmlns:a16="http://schemas.microsoft.com/office/drawing/2014/main" id="{7F40C51C-4C75-A81B-C099-33299CC4320F}"/>
+                <a16:creationId xmlns:a16="http://schemas.microsoft.com/office/drawing/2014/main" id="{1A49BD73-09B6-9576-4A99-AEFE0F7F42C3}"/>
               </a:ext>
             </a:extLst>
           </p:cNvPr>
@@ -7180,7 +7295,7 @@
             <p:cNvPr id="5" name="그림 4" descr="패턴, 사각형, 예술, 직사각형이(가) 표시된 사진&#10;&#10;AI 생성 콘텐츠는 정확하지 않을 수 있습니다.">
               <a:extLst>
                 <a:ext uri="{FF2B5EF4-FFF2-40B4-BE49-F238E27FC236}">
-                  <a16:creationId xmlns:a16="http://schemas.microsoft.com/office/drawing/2014/main" id="{8F36B08E-20CB-B44E-F94F-540F03482C37}"/>
+                  <a16:creationId xmlns:a16="http://schemas.microsoft.com/office/drawing/2014/main" id="{237758EC-8039-A3EA-24AD-2B5B0B1F60A1}"/>
                 </a:ext>
               </a:extLst>
             </p:cNvPr>
@@ -7210,7 +7325,7 @@
             <p:cNvPr id="13" name="L 도형 12">
               <a:extLst>
                 <a:ext uri="{FF2B5EF4-FFF2-40B4-BE49-F238E27FC236}">
-                  <a16:creationId xmlns:a16="http://schemas.microsoft.com/office/drawing/2014/main" id="{C2AC4A5D-664D-CEAE-B259-5F9BE582D143}"/>
+                  <a16:creationId xmlns:a16="http://schemas.microsoft.com/office/drawing/2014/main" id="{1386BAC4-C977-A7C2-6D4E-8D1313D44B3B}"/>
                 </a:ext>
               </a:extLst>
             </p:cNvPr>
@@ -7267,7 +7382,7 @@
             <p:cNvPr id="14" name="L 도형 13">
               <a:extLst>
                 <a:ext uri="{FF2B5EF4-FFF2-40B4-BE49-F238E27FC236}">
-                  <a16:creationId xmlns:a16="http://schemas.microsoft.com/office/drawing/2014/main" id="{6A67E2D3-109E-24F5-84A1-DD8BAAFC79E9}"/>
+                  <a16:creationId xmlns:a16="http://schemas.microsoft.com/office/drawing/2014/main" id="{925A8E91-1465-F155-CE7D-07F92B383DAE}"/>
                 </a:ext>
               </a:extLst>
             </p:cNvPr>
@@ -7324,7 +7439,7 @@
             <p:cNvPr id="15" name="L 도형 14">
               <a:extLst>
                 <a:ext uri="{FF2B5EF4-FFF2-40B4-BE49-F238E27FC236}">
-                  <a16:creationId xmlns:a16="http://schemas.microsoft.com/office/drawing/2014/main" id="{E3A8464E-CB96-1232-432A-14CCBBE52BD2}"/>
+                  <a16:creationId xmlns:a16="http://schemas.microsoft.com/office/drawing/2014/main" id="{C1BBBB1F-2080-F657-B9D3-EDC41813B5EF}"/>
                 </a:ext>
               </a:extLst>
             </p:cNvPr>
@@ -7381,7 +7496,7 @@
             <p:cNvPr id="16" name="L 도형 15">
               <a:extLst>
                 <a:ext uri="{FF2B5EF4-FFF2-40B4-BE49-F238E27FC236}">
-                  <a16:creationId xmlns:a16="http://schemas.microsoft.com/office/drawing/2014/main" id="{D61CFB78-D286-2268-4506-27A712AA1B3F}"/>
+                  <a16:creationId xmlns:a16="http://schemas.microsoft.com/office/drawing/2014/main" id="{C255AB45-9E19-5135-2840-6E83A0CEA2B5}"/>
                 </a:ext>
               </a:extLst>
             </p:cNvPr>
@@ -7439,7 +7554,7 @@
           <p:cNvPr id="18" name="그룹 17">
             <a:extLst>
               <a:ext uri="{FF2B5EF4-FFF2-40B4-BE49-F238E27FC236}">
-                <a16:creationId xmlns:a16="http://schemas.microsoft.com/office/drawing/2014/main" id="{4E485452-030B-E14C-C794-9B41715C6923}"/>
+                <a16:creationId xmlns:a16="http://schemas.microsoft.com/office/drawing/2014/main" id="{8C3E1EF8-8C3B-A192-11B5-BED425D3D79C}"/>
               </a:ext>
             </a:extLst>
           </p:cNvPr>
@@ -7459,7 +7574,7 @@
             <p:cNvPr id="4" name="TextBox 3">
               <a:extLst>
                 <a:ext uri="{FF2B5EF4-FFF2-40B4-BE49-F238E27FC236}">
-                  <a16:creationId xmlns:a16="http://schemas.microsoft.com/office/drawing/2014/main" id="{970381D3-A253-48EB-179E-0D280273139A}"/>
+                  <a16:creationId xmlns:a16="http://schemas.microsoft.com/office/drawing/2014/main" id="{A9D039A7-DA18-313A-AF87-12621352F5CE}"/>
                 </a:ext>
               </a:extLst>
             </p:cNvPr>
@@ -7534,7 +7649,7 @@
             <p:cNvPr id="6" name="TextBox 5">
               <a:extLst>
                 <a:ext uri="{FF2B5EF4-FFF2-40B4-BE49-F238E27FC236}">
-                  <a16:creationId xmlns:a16="http://schemas.microsoft.com/office/drawing/2014/main" id="{83CA30CC-6CFD-A9A9-F494-2F4ECBCD95E8}"/>
+                  <a16:creationId xmlns:a16="http://schemas.microsoft.com/office/drawing/2014/main" id="{DEEE7C7E-6934-B627-6EC0-48367D0769B1}"/>
                 </a:ext>
               </a:extLst>
             </p:cNvPr>
@@ -7601,7 +7716,7 @@
             <p:cNvPr id="10" name="그림 9">
               <a:extLst>
                 <a:ext uri="{FF2B5EF4-FFF2-40B4-BE49-F238E27FC236}">
-                  <a16:creationId xmlns:a16="http://schemas.microsoft.com/office/drawing/2014/main" id="{4F7CF062-42CC-7B1F-60D3-A32235AD21F3}"/>
+                  <a16:creationId xmlns:a16="http://schemas.microsoft.com/office/drawing/2014/main" id="{22CDF7ED-65DD-B2AB-0D3A-2876557659C7}"/>
                 </a:ext>
               </a:extLst>
             </p:cNvPr>
@@ -7631,7 +7746,7 @@
             <p:cNvPr id="30" name="그림 29">
               <a:extLst>
                 <a:ext uri="{FF2B5EF4-FFF2-40B4-BE49-F238E27FC236}">
-                  <a16:creationId xmlns:a16="http://schemas.microsoft.com/office/drawing/2014/main" id="{0425FA11-1B8B-F61D-8BF8-89C8222F3F04}"/>
+                  <a16:creationId xmlns:a16="http://schemas.microsoft.com/office/drawing/2014/main" id="{CACE4F19-6C03-B4A0-12DF-B80E74EF21DC}"/>
                 </a:ext>
               </a:extLst>
             </p:cNvPr>
@@ -7662,7 +7777,7 @@
           <p:cNvPr id="31" name="TextBox 30">
             <a:extLst>
               <a:ext uri="{FF2B5EF4-FFF2-40B4-BE49-F238E27FC236}">
-                <a16:creationId xmlns:a16="http://schemas.microsoft.com/office/drawing/2014/main" id="{5E4F2F05-A956-83B3-5532-01A65E8E9609}"/>
+                <a16:creationId xmlns:a16="http://schemas.microsoft.com/office/drawing/2014/main" id="{8286C7F5-77BB-B584-5E2E-82705B55B19B}"/>
               </a:ext>
             </a:extLst>
           </p:cNvPr>
@@ -7672,7 +7787,7 @@
         <p:spPr>
           <a:xfrm>
             <a:off x="82843" y="781989"/>
-            <a:ext cx="2592376" cy="790345"/>
+            <a:ext cx="2258952" cy="786882"/>
           </a:xfrm>
           <a:prstGeom prst="rect">
             <a:avLst/>
@@ -7696,86 +7811,86 @@
               <a:buChar char="•"/>
             </a:pPr>
             <a:r>
-              <a:rPr lang="en-US" altLang="ko-KR" sz="800" b="1" dirty="0">
-                <a:latin typeface="KoPub돋움체 Bold" panose="00000800000000000000" pitchFamily="2" charset="-127"/>
-                <a:ea typeface="KoPub돋움체 Bold" panose="00000800000000000000" pitchFamily="2" charset="-127"/>
+              <a:rPr lang="en-US" altLang="ko-KR" sz="700" b="1" dirty="0">
+                <a:latin typeface="KoPub돋움체 Light" panose="02020603020101020101" pitchFamily="18" charset="-127"/>
+                <a:ea typeface="KoPub돋움체 Light" panose="02020603020101020101" pitchFamily="18" charset="-127"/>
               </a:rPr>
               <a:t>[</a:t>
             </a:r>
             <a:r>
-              <a:rPr lang="ko-KR" altLang="en-US" sz="800" b="1" dirty="0">
-                <a:latin typeface="KoPub돋움체 Bold" panose="00000800000000000000" pitchFamily="2" charset="-127"/>
-                <a:ea typeface="KoPub돋움체 Bold" panose="00000800000000000000" pitchFamily="2" charset="-127"/>
+              <a:rPr lang="ko-KR" altLang="en-US" sz="700" b="1" dirty="0">
+                <a:latin typeface="KoPub돋움체 Light" panose="02020603020101020101" pitchFamily="18" charset="-127"/>
+                <a:ea typeface="KoPub돋움체 Light" panose="02020603020101020101" pitchFamily="18" charset="-127"/>
               </a:rPr>
               <a:t>식별</a:t>
             </a:r>
             <a:r>
-              <a:rPr lang="en-US" altLang="ko-KR" sz="800" b="1" dirty="0">
-                <a:latin typeface="KoPub돋움체 Bold" panose="00000800000000000000" pitchFamily="2" charset="-127"/>
-                <a:ea typeface="KoPub돋움체 Bold" panose="00000800000000000000" pitchFamily="2" charset="-127"/>
+              <a:rPr lang="en-US" altLang="ko-KR" sz="700" b="1" dirty="0">
+                <a:latin typeface="KoPub돋움체 Light" panose="02020603020101020101" pitchFamily="18" charset="-127"/>
+                <a:ea typeface="KoPub돋움체 Light" panose="02020603020101020101" pitchFamily="18" charset="-127"/>
               </a:rPr>
               <a:t>] </a:t>
             </a:r>
             <a:r>
-              <a:rPr lang="ko-KR" altLang="en-US" sz="800" b="1" dirty="0">
-                <a:latin typeface="KoPub돋움체 Bold" panose="00000800000000000000" pitchFamily="2" charset="-127"/>
-                <a:ea typeface="KoPub돋움체 Bold" panose="00000800000000000000" pitchFamily="2" charset="-127"/>
+              <a:rPr lang="ko-KR" altLang="en-US" sz="700" b="1" dirty="0">
+                <a:latin typeface="KoPub돋움체 Light" panose="02020603020101020101" pitchFamily="18" charset="-127"/>
+                <a:ea typeface="KoPub돋움체 Light" panose="02020603020101020101" pitchFamily="18" charset="-127"/>
               </a:rPr>
               <a:t>첫머리 </a:t>
             </a:r>
             <a:r>
-              <a:rPr lang="en-US" altLang="ko-KR" sz="800" b="1" dirty="0">
-                <a:latin typeface="KoPub돋움체 Bold" panose="00000800000000000000" pitchFamily="2" charset="-127"/>
-                <a:ea typeface="KoPub돋움체 Bold" panose="00000800000000000000" pitchFamily="2" charset="-127"/>
+              <a:rPr lang="en-US" altLang="ko-KR" sz="700" b="1" dirty="0">
+                <a:latin typeface="KoPub돋움체 Light" panose="02020603020101020101" pitchFamily="18" charset="-127"/>
+                <a:ea typeface="KoPub돋움체 Light" panose="02020603020101020101" pitchFamily="18" charset="-127"/>
               </a:rPr>
               <a:t>[</a:t>
             </a:r>
             <a:r>
-              <a:rPr lang="ko-KR" altLang="en-US" sz="800" b="1" dirty="0">
-                <a:latin typeface="KoPub돋움체 Bold" panose="00000800000000000000" pitchFamily="2" charset="-127"/>
-                <a:ea typeface="KoPub돋움체 Bold" panose="00000800000000000000" pitchFamily="2" charset="-127"/>
+              <a:rPr lang="ko-KR" altLang="en-US" sz="700" b="1" dirty="0">
+                <a:latin typeface="KoPub돋움체 Light" panose="02020603020101020101" pitchFamily="18" charset="-127"/>
+                <a:ea typeface="KoPub돋움체 Light" panose="02020603020101020101" pitchFamily="18" charset="-127"/>
               </a:rPr>
               <a:t>병실</a:t>
             </a:r>
             <a:r>
-              <a:rPr lang="en-US" altLang="ko-KR" sz="800" b="1" dirty="0">
-                <a:latin typeface="KoPub돋움체 Bold" panose="00000800000000000000" pitchFamily="2" charset="-127"/>
-                <a:ea typeface="KoPub돋움체 Bold" panose="00000800000000000000" pitchFamily="2" charset="-127"/>
+              <a:rPr lang="en-US" altLang="ko-KR" sz="700" b="1" dirty="0">
+                <a:latin typeface="KoPub돋움체 Light" panose="02020603020101020101" pitchFamily="18" charset="-127"/>
+                <a:ea typeface="KoPub돋움체 Light" panose="02020603020101020101" pitchFamily="18" charset="-127"/>
               </a:rPr>
               <a:t>/</a:t>
             </a:r>
             <a:r>
-              <a:rPr lang="ko-KR" altLang="en-US" sz="800" b="1" dirty="0">
-                <a:latin typeface="KoPub돋움체 Bold" panose="00000800000000000000" pitchFamily="2" charset="-127"/>
-                <a:ea typeface="KoPub돋움체 Bold" panose="00000800000000000000" pitchFamily="2" charset="-127"/>
+              <a:rPr lang="ko-KR" altLang="en-US" sz="700" b="1" dirty="0">
+                <a:latin typeface="KoPub돋움체 Light" panose="02020603020101020101" pitchFamily="18" charset="-127"/>
+                <a:ea typeface="KoPub돋움체 Light" panose="02020603020101020101" pitchFamily="18" charset="-127"/>
               </a:rPr>
               <a:t>성함</a:t>
             </a:r>
             <a:r>
-              <a:rPr lang="en-US" altLang="ko-KR" sz="800" b="1" dirty="0">
-                <a:latin typeface="KoPub돋움체 Bold" panose="00000800000000000000" pitchFamily="2" charset="-127"/>
-                <a:ea typeface="KoPub돋움체 Bold" panose="00000800000000000000" pitchFamily="2" charset="-127"/>
+              <a:rPr lang="en-US" altLang="ko-KR" sz="700" b="1" dirty="0">
+                <a:latin typeface="KoPub돋움체 Light" panose="02020603020101020101" pitchFamily="18" charset="-127"/>
+                <a:ea typeface="KoPub돋움체 Light" panose="02020603020101020101" pitchFamily="18" charset="-127"/>
               </a:rPr>
               <a:t>/</a:t>
             </a:r>
             <a:r>
-              <a:rPr lang="ko-KR" altLang="en-US" sz="800" b="1" dirty="0">
-                <a:latin typeface="KoPub돋움체 Bold" panose="00000800000000000000" pitchFamily="2" charset="-127"/>
-                <a:ea typeface="KoPub돋움체 Bold" panose="00000800000000000000" pitchFamily="2" charset="-127"/>
+              <a:rPr lang="ko-KR" altLang="en-US" sz="700" b="1" dirty="0">
+                <a:latin typeface="KoPub돋움체 Light" panose="02020603020101020101" pitchFamily="18" charset="-127"/>
+                <a:ea typeface="KoPub돋움체 Light" panose="02020603020101020101" pitchFamily="18" charset="-127"/>
               </a:rPr>
               <a:t>사유</a:t>
             </a:r>
             <a:r>
-              <a:rPr lang="en-US" altLang="ko-KR" sz="800" b="1" dirty="0">
-                <a:latin typeface="KoPub돋움체 Bold" panose="00000800000000000000" pitchFamily="2" charset="-127"/>
-                <a:ea typeface="KoPub돋움체 Bold" panose="00000800000000000000" pitchFamily="2" charset="-127"/>
+              <a:rPr lang="en-US" altLang="ko-KR" sz="700" b="1" dirty="0">
+                <a:latin typeface="KoPub돋움체 Light" panose="02020603020101020101" pitchFamily="18" charset="-127"/>
+                <a:ea typeface="KoPub돋움체 Light" panose="02020603020101020101" pitchFamily="18" charset="-127"/>
               </a:rPr>
               <a:t>]</a:t>
             </a:r>
             <a:r>
-              <a:rPr lang="ko-KR" altLang="en-US" sz="800" b="1" dirty="0">
-                <a:latin typeface="KoPub돋움체 Bold" panose="00000800000000000000" pitchFamily="2" charset="-127"/>
-                <a:ea typeface="KoPub돋움체 Bold" panose="00000800000000000000" pitchFamily="2" charset="-127"/>
+              <a:rPr lang="ko-KR" altLang="en-US" sz="700" b="1" dirty="0">
+                <a:latin typeface="KoPub돋움체 Light" panose="02020603020101020101" pitchFamily="18" charset="-127"/>
+                <a:ea typeface="KoPub돋움체 Light" panose="02020603020101020101" pitchFamily="18" charset="-127"/>
               </a:rPr>
               <a:t>필수 기재</a:t>
             </a:r>
@@ -7792,65 +7907,65 @@
               <a:buChar char="•"/>
             </a:pPr>
             <a:r>
-              <a:rPr lang="en-US" altLang="ko-KR" sz="800" b="1" dirty="0">
-                <a:latin typeface="KoPub돋움체 Bold" panose="00000800000000000000" pitchFamily="2" charset="-127"/>
-                <a:ea typeface="KoPub돋움체 Bold" panose="00000800000000000000" pitchFamily="2" charset="-127"/>
+              <a:rPr lang="en-US" altLang="ko-KR" sz="700" b="1" dirty="0">
+                <a:latin typeface="KoPub돋움체 Light" panose="02020603020101020101" pitchFamily="18" charset="-127"/>
+                <a:ea typeface="KoPub돋움체 Light" panose="02020603020101020101" pitchFamily="18" charset="-127"/>
               </a:rPr>
               <a:t>[</a:t>
             </a:r>
             <a:r>
-              <a:rPr lang="ko-KR" altLang="en-US" sz="800" b="1" dirty="0">
-                <a:latin typeface="KoPub돋움체 Bold" panose="00000800000000000000" pitchFamily="2" charset="-127"/>
-                <a:ea typeface="KoPub돋움체 Bold" panose="00000800000000000000" pitchFamily="2" charset="-127"/>
+              <a:rPr lang="ko-KR" altLang="en-US" sz="700" b="1" dirty="0">
+                <a:latin typeface="KoPub돋움체 Light" panose="02020603020101020101" pitchFamily="18" charset="-127"/>
+                <a:ea typeface="KoPub돋움체 Light" panose="02020603020101020101" pitchFamily="18" charset="-127"/>
               </a:rPr>
               <a:t>공유</a:t>
             </a:r>
             <a:r>
-              <a:rPr lang="en-US" altLang="ko-KR" sz="800" b="1" dirty="0">
-                <a:latin typeface="KoPub돋움체 Bold" panose="00000800000000000000" pitchFamily="2" charset="-127"/>
-                <a:ea typeface="KoPub돋움체 Bold" panose="00000800000000000000" pitchFamily="2" charset="-127"/>
+              <a:rPr lang="en-US" altLang="ko-KR" sz="700" b="1" dirty="0">
+                <a:latin typeface="KoPub돋움체 Light" panose="02020603020101020101" pitchFamily="18" charset="-127"/>
+                <a:ea typeface="KoPub돋움체 Light" panose="02020603020101020101" pitchFamily="18" charset="-127"/>
               </a:rPr>
               <a:t>] </a:t>
             </a:r>
             <a:r>
-              <a:rPr lang="ko-KR" altLang="en-US" sz="800" b="1" dirty="0">
-                <a:latin typeface="KoPub돋움체 Bold" panose="00000800000000000000" pitchFamily="2" charset="-127"/>
-                <a:ea typeface="KoPub돋움체 Bold" panose="00000800000000000000" pitchFamily="2" charset="-127"/>
+              <a:rPr lang="ko-KR" altLang="en-US" sz="700" b="1" dirty="0">
+                <a:latin typeface="KoPub돋움체 Light" panose="02020603020101020101" pitchFamily="18" charset="-127"/>
+                <a:ea typeface="KoPub돋움체 Light" panose="02020603020101020101" pitchFamily="18" charset="-127"/>
               </a:rPr>
               <a:t>결정 사항의 </a:t>
             </a:r>
             <a:r>
-              <a:rPr lang="ko-KR" altLang="en-US" sz="800" b="1" dirty="0" err="1">
-                <a:latin typeface="KoPub돋움체 Bold" panose="00000800000000000000" pitchFamily="2" charset="-127"/>
-                <a:ea typeface="KoPub돋움체 Bold" panose="00000800000000000000" pitchFamily="2" charset="-127"/>
+              <a:rPr lang="ko-KR" altLang="en-US" sz="700" b="1" dirty="0" err="1">
+                <a:latin typeface="KoPub돋움체 Light" panose="02020603020101020101" pitchFamily="18" charset="-127"/>
+                <a:ea typeface="KoPub돋움체 Light" panose="02020603020101020101" pitchFamily="18" charset="-127"/>
               </a:rPr>
               <a:t>선제적</a:t>
             </a:r>
             <a:r>
-              <a:rPr lang="ko-KR" altLang="en-US" sz="800" b="1" dirty="0">
-                <a:latin typeface="KoPub돋움체 Bold" panose="00000800000000000000" pitchFamily="2" charset="-127"/>
-                <a:ea typeface="KoPub돋움체 Bold" panose="00000800000000000000" pitchFamily="2" charset="-127"/>
+              <a:rPr lang="ko-KR" altLang="en-US" sz="700" b="1" dirty="0">
+                <a:latin typeface="KoPub돋움체 Light" panose="02020603020101020101" pitchFamily="18" charset="-127"/>
+                <a:ea typeface="KoPub돋움체 Light" panose="02020603020101020101" pitchFamily="18" charset="-127"/>
               </a:rPr>
               <a:t> 알림 </a:t>
             </a:r>
             <a:r>
-              <a:rPr lang="en-US" altLang="ko-KR" sz="800" b="1" dirty="0">
-                <a:latin typeface="KoPub돋움체 Bold" panose="00000800000000000000" pitchFamily="2" charset="-127"/>
-                <a:ea typeface="KoPub돋움체 Bold" panose="00000800000000000000" pitchFamily="2" charset="-127"/>
+              <a:rPr lang="en-US" altLang="ko-KR" sz="700" b="1" dirty="0">
+                <a:latin typeface="KoPub돋움체 Light" panose="02020603020101020101" pitchFamily="18" charset="-127"/>
+                <a:ea typeface="KoPub돋움체 Light" panose="02020603020101020101" pitchFamily="18" charset="-127"/>
               </a:rPr>
               <a:t>(PA ↔ </a:t>
             </a:r>
             <a:r>
-              <a:rPr lang="ko-KR" altLang="en-US" sz="800" b="1" dirty="0">
-                <a:latin typeface="KoPub돋움체 Bold" panose="00000800000000000000" pitchFamily="2" charset="-127"/>
-                <a:ea typeface="KoPub돋움체 Bold" panose="00000800000000000000" pitchFamily="2" charset="-127"/>
+              <a:rPr lang="ko-KR" altLang="en-US" sz="700" b="1" dirty="0">
+                <a:latin typeface="KoPub돋움체 Light" panose="02020603020101020101" pitchFamily="18" charset="-127"/>
+                <a:ea typeface="KoPub돋움체 Light" panose="02020603020101020101" pitchFamily="18" charset="-127"/>
               </a:rPr>
               <a:t>병동</a:t>
             </a:r>
             <a:r>
-              <a:rPr lang="en-US" altLang="ko-KR" sz="800" b="1" dirty="0">
-                <a:latin typeface="KoPub돋움체 Bold" panose="00000800000000000000" pitchFamily="2" charset="-127"/>
-                <a:ea typeface="KoPub돋움체 Bold" panose="00000800000000000000" pitchFamily="2" charset="-127"/>
+              <a:rPr lang="en-US" altLang="ko-KR" sz="700" b="1" dirty="0">
+                <a:latin typeface="KoPub돋움체 Light" panose="02020603020101020101" pitchFamily="18" charset="-127"/>
+                <a:ea typeface="KoPub돋움체 Light" panose="02020603020101020101" pitchFamily="18" charset="-127"/>
               </a:rPr>
               <a:t>)</a:t>
             </a:r>
@@ -7867,93 +7982,93 @@
               <a:buChar char="•"/>
             </a:pPr>
             <a:r>
-              <a:rPr lang="en-US" altLang="ko-KR" sz="800" b="1" dirty="0">
-                <a:latin typeface="KoPub돋움체 Bold" panose="00000800000000000000" pitchFamily="2" charset="-127"/>
-                <a:ea typeface="KoPub돋움체 Bold" panose="00000800000000000000" pitchFamily="2" charset="-127"/>
+              <a:rPr lang="en-US" altLang="ko-KR" sz="700" b="1" dirty="0">
+                <a:latin typeface="KoPub돋움체 Light" panose="02020603020101020101" pitchFamily="18" charset="-127"/>
+                <a:ea typeface="KoPub돋움체 Light" panose="02020603020101020101" pitchFamily="18" charset="-127"/>
               </a:rPr>
               <a:t>[</a:t>
             </a:r>
             <a:r>
-              <a:rPr lang="ko-KR" altLang="en-US" sz="800" b="1" dirty="0">
-                <a:latin typeface="KoPub돋움체 Bold" panose="00000800000000000000" pitchFamily="2" charset="-127"/>
-                <a:ea typeface="KoPub돋움체 Bold" panose="00000800000000000000" pitchFamily="2" charset="-127"/>
+              <a:rPr lang="ko-KR" altLang="en-US" sz="700" b="1" dirty="0">
+                <a:latin typeface="KoPub돋움체 Light" panose="02020603020101020101" pitchFamily="18" charset="-127"/>
+                <a:ea typeface="KoPub돋움체 Light" panose="02020603020101020101" pitchFamily="18" charset="-127"/>
               </a:rPr>
               <a:t>원칙</a:t>
             </a:r>
             <a:r>
-              <a:rPr lang="en-US" altLang="ko-KR" sz="800" b="1" dirty="0">
-                <a:latin typeface="KoPub돋움체 Bold" panose="00000800000000000000" pitchFamily="2" charset="-127"/>
-                <a:ea typeface="KoPub돋움체 Bold" panose="00000800000000000000" pitchFamily="2" charset="-127"/>
+              <a:rPr lang="en-US" altLang="ko-KR" sz="700" b="1" dirty="0">
+                <a:latin typeface="KoPub돋움체 Light" panose="02020603020101020101" pitchFamily="18" charset="-127"/>
+                <a:ea typeface="KoPub돋움체 Light" panose="02020603020101020101" pitchFamily="18" charset="-127"/>
               </a:rPr>
               <a:t>] </a:t>
             </a:r>
             <a:r>
-              <a:rPr lang="ko-KR" altLang="en-US" sz="800" b="1" dirty="0">
-                <a:latin typeface="KoPub돋움체 Bold" panose="00000800000000000000" pitchFamily="2" charset="-127"/>
-                <a:ea typeface="KoPub돋움체 Bold" panose="00000800000000000000" pitchFamily="2" charset="-127"/>
+              <a:rPr lang="ko-KR" altLang="en-US" sz="700" b="1" dirty="0">
+                <a:latin typeface="KoPub돋움체 Light" panose="02020603020101020101" pitchFamily="18" charset="-127"/>
+                <a:ea typeface="KoPub돋움체 Light" panose="02020603020101020101" pitchFamily="18" charset="-127"/>
               </a:rPr>
               <a:t>공식 채널</a:t>
             </a:r>
             <a:r>
-              <a:rPr lang="en-US" altLang="ko-KR" sz="800" b="1" dirty="0">
-                <a:latin typeface="KoPub돋움체 Bold" panose="00000800000000000000" pitchFamily="2" charset="-127"/>
-                <a:ea typeface="KoPub돋움체 Bold" panose="00000800000000000000" pitchFamily="2" charset="-127"/>
+              <a:rPr lang="en-US" altLang="ko-KR" sz="700" b="1" dirty="0">
+                <a:latin typeface="KoPub돋움체 Light" panose="02020603020101020101" pitchFamily="18" charset="-127"/>
+                <a:ea typeface="KoPub돋움체 Light" panose="02020603020101020101" pitchFamily="18" charset="-127"/>
               </a:rPr>
               <a:t>(EMR/</a:t>
             </a:r>
             <a:r>
-              <a:rPr lang="ko-KR" altLang="en-US" sz="800" b="1" dirty="0">
-                <a:latin typeface="KoPub돋움체 Bold" panose="00000800000000000000" pitchFamily="2" charset="-127"/>
-                <a:ea typeface="KoPub돋움체 Bold" panose="00000800000000000000" pitchFamily="2" charset="-127"/>
+              <a:rPr lang="ko-KR" altLang="en-US" sz="700" b="1" dirty="0">
+                <a:latin typeface="KoPub돋움체 Light" panose="02020603020101020101" pitchFamily="18" charset="-127"/>
+                <a:ea typeface="KoPub돋움체 Light" panose="02020603020101020101" pitchFamily="18" charset="-127"/>
               </a:rPr>
               <a:t>유선</a:t>
             </a:r>
             <a:r>
-              <a:rPr lang="en-US" altLang="ko-KR" sz="800" b="1" dirty="0">
-                <a:latin typeface="KoPub돋움체 Bold" panose="00000800000000000000" pitchFamily="2" charset="-127"/>
-                <a:ea typeface="KoPub돋움체 Bold" panose="00000800000000000000" pitchFamily="2" charset="-127"/>
+              <a:rPr lang="en-US" altLang="ko-KR" sz="700" b="1" dirty="0">
+                <a:latin typeface="KoPub돋움체 Light" panose="02020603020101020101" pitchFamily="18" charset="-127"/>
+                <a:ea typeface="KoPub돋움체 Light" panose="02020603020101020101" pitchFamily="18" charset="-127"/>
               </a:rPr>
               <a:t>) </a:t>
             </a:r>
             <a:r>
-              <a:rPr lang="ko-KR" altLang="en-US" sz="800" b="1" dirty="0">
-                <a:latin typeface="KoPub돋움체 Bold" panose="00000800000000000000" pitchFamily="2" charset="-127"/>
-                <a:ea typeface="KoPub돋움체 Bold" panose="00000800000000000000" pitchFamily="2" charset="-127"/>
+              <a:rPr lang="ko-KR" altLang="en-US" sz="700" b="1" dirty="0">
+                <a:latin typeface="KoPub돋움체 Light" panose="02020603020101020101" pitchFamily="18" charset="-127"/>
+                <a:ea typeface="KoPub돋움체 Light" panose="02020603020101020101" pitchFamily="18" charset="-127"/>
               </a:rPr>
               <a:t>활용 </a:t>
             </a:r>
             <a:r>
-              <a:rPr lang="en-US" altLang="ko-KR" sz="800" b="1" dirty="0">
-                <a:latin typeface="KoPub돋움체 Bold" panose="00000800000000000000" pitchFamily="2" charset="-127"/>
-                <a:ea typeface="KoPub돋움체 Bold" panose="00000800000000000000" pitchFamily="2" charset="-127"/>
+              <a:rPr lang="en-US" altLang="ko-KR" sz="700" b="1" dirty="0">
+                <a:latin typeface="KoPub돋움체 Light" panose="02020603020101020101" pitchFamily="18" charset="-127"/>
+                <a:ea typeface="KoPub돋움체 Light" panose="02020603020101020101" pitchFamily="18" charset="-127"/>
               </a:rPr>
               <a:t>(</a:t>
             </a:r>
             <a:r>
-              <a:rPr lang="ko-KR" altLang="en-US" sz="800" b="1" dirty="0">
-                <a:latin typeface="KoPub돋움체 Bold" panose="00000800000000000000" pitchFamily="2" charset="-127"/>
-                <a:ea typeface="KoPub돋움체 Bold" panose="00000800000000000000" pitchFamily="2" charset="-127"/>
+              <a:rPr lang="ko-KR" altLang="en-US" sz="700" b="1" dirty="0">
+                <a:latin typeface="KoPub돋움체 Light" panose="02020603020101020101" pitchFamily="18" charset="-127"/>
+                <a:ea typeface="KoPub돋움체 Light" panose="02020603020101020101" pitchFamily="18" charset="-127"/>
               </a:rPr>
               <a:t>수술</a:t>
             </a:r>
             <a:r>
-              <a:rPr lang="en-US" altLang="ko-KR" sz="800" b="1" dirty="0">
-                <a:latin typeface="KoPub돋움체 Bold" panose="00000800000000000000" pitchFamily="2" charset="-127"/>
-                <a:ea typeface="KoPub돋움체 Bold" panose="00000800000000000000" pitchFamily="2" charset="-127"/>
+              <a:rPr lang="en-US" altLang="ko-KR" sz="700" b="1" dirty="0">
+                <a:latin typeface="KoPub돋움체 Light" panose="02020603020101020101" pitchFamily="18" charset="-127"/>
+                <a:ea typeface="KoPub돋움체 Light" panose="02020603020101020101" pitchFamily="18" charset="-127"/>
               </a:rPr>
               <a:t>, </a:t>
             </a:r>
             <a:r>
-              <a:rPr lang="ko-KR" altLang="en-US" sz="800" b="1" dirty="0">
-                <a:latin typeface="KoPub돋움체 Bold" panose="00000800000000000000" pitchFamily="2" charset="-127"/>
-                <a:ea typeface="KoPub돋움체 Bold" panose="00000800000000000000" pitchFamily="2" charset="-127"/>
+              <a:rPr lang="ko-KR" altLang="en-US" sz="700" b="1" dirty="0">
+                <a:latin typeface="KoPub돋움체 Light" panose="02020603020101020101" pitchFamily="18" charset="-127"/>
+                <a:ea typeface="KoPub돋움체 Light" panose="02020603020101020101" pitchFamily="18" charset="-127"/>
               </a:rPr>
               <a:t>검사 결과 보고</a:t>
             </a:r>
             <a:r>
-              <a:rPr lang="en-US" altLang="ko-KR" sz="800" b="1" dirty="0">
-                <a:latin typeface="KoPub돋움체 Bold" panose="00000800000000000000" pitchFamily="2" charset="-127"/>
-                <a:ea typeface="KoPub돋움체 Bold" panose="00000800000000000000" pitchFamily="2" charset="-127"/>
+              <a:rPr lang="en-US" altLang="ko-KR" sz="700" b="1" dirty="0">
+                <a:latin typeface="KoPub돋움체 Light" panose="02020603020101020101" pitchFamily="18" charset="-127"/>
+                <a:ea typeface="KoPub돋움체 Light" panose="02020603020101020101" pitchFamily="18" charset="-127"/>
               </a:rPr>
               <a:t>)</a:t>
             </a:r>
@@ -7970,44 +8085,44 @@
               <a:buChar char="•"/>
             </a:pPr>
             <a:r>
-              <a:rPr lang="en-US" altLang="ko-KR" sz="800" b="1" dirty="0">
-                <a:latin typeface="KoPub돋움체 Bold" panose="00000800000000000000" pitchFamily="2" charset="-127"/>
-                <a:ea typeface="KoPub돋움체 Bold" panose="00000800000000000000" pitchFamily="2" charset="-127"/>
+              <a:rPr lang="en-US" altLang="ko-KR" sz="700" b="1" dirty="0">
+                <a:latin typeface="KoPub돋움체 Light" panose="02020603020101020101" pitchFamily="18" charset="-127"/>
+                <a:ea typeface="KoPub돋움체 Light" panose="02020603020101020101" pitchFamily="18" charset="-127"/>
               </a:rPr>
               <a:t>[</a:t>
             </a:r>
             <a:r>
-              <a:rPr lang="ko-KR" altLang="en-US" sz="800" b="1" dirty="0">
-                <a:latin typeface="KoPub돋움체 Bold" panose="00000800000000000000" pitchFamily="2" charset="-127"/>
-                <a:ea typeface="KoPub돋움체 Bold" panose="00000800000000000000" pitchFamily="2" charset="-127"/>
+              <a:rPr lang="ko-KR" altLang="en-US" sz="700" b="1" dirty="0">
+                <a:latin typeface="KoPub돋움체 Light" panose="02020603020101020101" pitchFamily="18" charset="-127"/>
+                <a:ea typeface="KoPub돋움체 Light" panose="02020603020101020101" pitchFamily="18" charset="-127"/>
               </a:rPr>
               <a:t>완결</a:t>
             </a:r>
             <a:r>
-              <a:rPr lang="en-US" altLang="ko-KR" sz="800" b="1" dirty="0">
-                <a:latin typeface="KoPub돋움체 Bold" panose="00000800000000000000" pitchFamily="2" charset="-127"/>
-                <a:ea typeface="KoPub돋움체 Bold" panose="00000800000000000000" pitchFamily="2" charset="-127"/>
+              <a:rPr lang="en-US" altLang="ko-KR" sz="700" b="1" dirty="0">
+                <a:latin typeface="KoPub돋움체 Light" panose="02020603020101020101" pitchFamily="18" charset="-127"/>
+                <a:ea typeface="KoPub돋움체 Light" panose="02020603020101020101" pitchFamily="18" charset="-127"/>
               </a:rPr>
               <a:t>] [</a:t>
             </a:r>
             <a:r>
-              <a:rPr lang="ko-KR" altLang="en-US" sz="800" b="1" dirty="0">
-                <a:latin typeface="KoPub돋움체 Bold" panose="00000800000000000000" pitchFamily="2" charset="-127"/>
-                <a:ea typeface="KoPub돋움체 Bold" panose="00000800000000000000" pitchFamily="2" charset="-127"/>
+              <a:rPr lang="ko-KR" altLang="en-US" sz="700" b="1" dirty="0">
+                <a:latin typeface="KoPub돋움체 Light" panose="02020603020101020101" pitchFamily="18" charset="-127"/>
+                <a:ea typeface="KoPub돋움체 Light" panose="02020603020101020101" pitchFamily="18" charset="-127"/>
               </a:rPr>
               <a:t>답장</a:t>
             </a:r>
             <a:r>
-              <a:rPr lang="en-US" altLang="ko-KR" sz="800" b="1" dirty="0">
-                <a:latin typeface="KoPub돋움체 Bold" panose="00000800000000000000" pitchFamily="2" charset="-127"/>
-                <a:ea typeface="KoPub돋움체 Bold" panose="00000800000000000000" pitchFamily="2" charset="-127"/>
+              <a:rPr lang="en-US" altLang="ko-KR" sz="700" b="1" dirty="0">
+                <a:latin typeface="KoPub돋움체 Light" panose="02020603020101020101" pitchFamily="18" charset="-127"/>
+                <a:ea typeface="KoPub돋움체 Light" panose="02020603020101020101" pitchFamily="18" charset="-127"/>
               </a:rPr>
               <a:t>(Reply)]</a:t>
             </a:r>
             <a:r>
-              <a:rPr lang="ko-KR" altLang="en-US" sz="800" b="1" dirty="0">
-                <a:latin typeface="KoPub돋움체 Bold" panose="00000800000000000000" pitchFamily="2" charset="-127"/>
-                <a:ea typeface="KoPub돋움체 Bold" panose="00000800000000000000" pitchFamily="2" charset="-127"/>
+              <a:rPr lang="ko-KR" altLang="en-US" sz="700" b="1" dirty="0">
+                <a:latin typeface="KoPub돋움체 Light" panose="02020603020101020101" pitchFamily="18" charset="-127"/>
+                <a:ea typeface="KoPub돋움체 Light" panose="02020603020101020101" pitchFamily="18" charset="-127"/>
               </a:rPr>
               <a:t>기능 필수 활용</a:t>
             </a:r>
@@ -8024,58 +8139,58 @@
               <a:buChar char="•"/>
             </a:pPr>
             <a:r>
-              <a:rPr lang="en-US" altLang="ko-KR" sz="800" b="1" dirty="0">
-                <a:latin typeface="KoPub돋움체 Bold" panose="00000800000000000000" pitchFamily="2" charset="-127"/>
-                <a:ea typeface="KoPub돋움체 Bold" panose="00000800000000000000" pitchFamily="2" charset="-127"/>
+              <a:rPr lang="en-US" altLang="ko-KR" sz="700" b="1" dirty="0">
+                <a:latin typeface="KoPub돋움체 Light" panose="02020603020101020101" pitchFamily="18" charset="-127"/>
+                <a:ea typeface="KoPub돋움체 Light" panose="02020603020101020101" pitchFamily="18" charset="-127"/>
               </a:rPr>
               <a:t>[</a:t>
             </a:r>
             <a:r>
-              <a:rPr lang="ko-KR" altLang="en-US" sz="800" b="1" dirty="0">
-                <a:latin typeface="KoPub돋움체 Bold" panose="00000800000000000000" pitchFamily="2" charset="-127"/>
-                <a:ea typeface="KoPub돋움체 Bold" panose="00000800000000000000" pitchFamily="2" charset="-127"/>
+              <a:rPr lang="ko-KR" altLang="en-US" sz="700" b="1" dirty="0">
+                <a:latin typeface="KoPub돋움체 Light" panose="02020603020101020101" pitchFamily="18" charset="-127"/>
+                <a:ea typeface="KoPub돋움체 Light" panose="02020603020101020101" pitchFamily="18" charset="-127"/>
               </a:rPr>
               <a:t>대응</a:t>
             </a:r>
             <a:r>
-              <a:rPr lang="en-US" altLang="ko-KR" sz="800" b="1" dirty="0">
-                <a:latin typeface="KoPub돋움체 Bold" panose="00000800000000000000" pitchFamily="2" charset="-127"/>
-                <a:ea typeface="KoPub돋움체 Bold" panose="00000800000000000000" pitchFamily="2" charset="-127"/>
+              <a:rPr lang="en-US" altLang="ko-KR" sz="700" b="1" dirty="0">
+                <a:latin typeface="KoPub돋움체 Light" panose="02020603020101020101" pitchFamily="18" charset="-127"/>
+                <a:ea typeface="KoPub돋움체 Light" panose="02020603020101020101" pitchFamily="18" charset="-127"/>
               </a:rPr>
               <a:t>] </a:t>
             </a:r>
             <a:r>
-              <a:rPr lang="ko-KR" altLang="en-US" sz="800" b="1" dirty="0">
-                <a:latin typeface="KoPub돋움체 Bold" panose="00000800000000000000" pitchFamily="2" charset="-127"/>
-                <a:ea typeface="KoPub돋움체 Bold" panose="00000800000000000000" pitchFamily="2" charset="-127"/>
+              <a:rPr lang="ko-KR" altLang="en-US" sz="700" b="1" dirty="0">
+                <a:latin typeface="KoPub돋움체 Light" panose="02020603020101020101" pitchFamily="18" charset="-127"/>
+                <a:ea typeface="KoPub돋움체 Light" panose="02020603020101020101" pitchFamily="18" charset="-127"/>
               </a:rPr>
               <a:t>메신저 응답 </a:t>
             </a:r>
             <a:r>
-              <a:rPr lang="en-US" altLang="ko-KR" sz="800" b="1" dirty="0">
-                <a:latin typeface="KoPub돋움체 Bold" panose="00000800000000000000" pitchFamily="2" charset="-127"/>
-                <a:ea typeface="KoPub돋움체 Bold" panose="00000800000000000000" pitchFamily="2" charset="-127"/>
+              <a:rPr lang="en-US" altLang="ko-KR" sz="700" b="1" dirty="0">
+                <a:latin typeface="KoPub돋움체 Light" panose="02020603020101020101" pitchFamily="18" charset="-127"/>
+                <a:ea typeface="KoPub돋움체 Light" panose="02020603020101020101" pitchFamily="18" charset="-127"/>
               </a:rPr>
               <a:t>'10</a:t>
             </a:r>
             <a:r>
-              <a:rPr lang="ko-KR" altLang="en-US" sz="800" b="1" dirty="0">
-                <a:latin typeface="KoPub돋움체 Bold" panose="00000800000000000000" pitchFamily="2" charset="-127"/>
-                <a:ea typeface="KoPub돋움체 Bold" panose="00000800000000000000" pitchFamily="2" charset="-127"/>
+              <a:rPr lang="ko-KR" altLang="en-US" sz="700" b="1" dirty="0">
+                <a:latin typeface="KoPub돋움체 Light" panose="02020603020101020101" pitchFamily="18" charset="-127"/>
+                <a:ea typeface="KoPub돋움체 Light" panose="02020603020101020101" pitchFamily="18" charset="-127"/>
               </a:rPr>
               <a:t>분 룰</a:t>
             </a:r>
             <a:r>
-              <a:rPr lang="en-US" altLang="ko-KR" sz="800" b="1" dirty="0">
-                <a:latin typeface="KoPub돋움체 Bold" panose="00000800000000000000" pitchFamily="2" charset="-127"/>
-                <a:ea typeface="KoPub돋움체 Bold" panose="00000800000000000000" pitchFamily="2" charset="-127"/>
+              <a:rPr lang="en-US" altLang="ko-KR" sz="700" b="1" dirty="0">
+                <a:latin typeface="KoPub돋움체 Light" panose="02020603020101020101" pitchFamily="18" charset="-127"/>
+                <a:ea typeface="KoPub돋움체 Light" panose="02020603020101020101" pitchFamily="18" charset="-127"/>
               </a:rPr>
               <a:t>(Rule)' </a:t>
             </a:r>
             <a:r>
-              <a:rPr lang="ko-KR" altLang="en-US" sz="800" b="1" dirty="0">
-                <a:latin typeface="KoPub돋움체 Bold" panose="00000800000000000000" pitchFamily="2" charset="-127"/>
-                <a:ea typeface="KoPub돋움체 Bold" panose="00000800000000000000" pitchFamily="2" charset="-127"/>
+              <a:rPr lang="ko-KR" altLang="en-US" sz="700" b="1" dirty="0">
+                <a:latin typeface="KoPub돋움체 Light" panose="02020603020101020101" pitchFamily="18" charset="-127"/>
+                <a:ea typeface="KoPub돋움체 Light" panose="02020603020101020101" pitchFamily="18" charset="-127"/>
               </a:rPr>
               <a:t>적용</a:t>
             </a:r>
@@ -8085,7 +8200,7 @@
     </p:spTree>
     <p:extLst>
       <p:ext uri="{BB962C8B-B14F-4D97-AF65-F5344CB8AC3E}">
-        <p14:creationId xmlns:p14="http://schemas.microsoft.com/office/powerpoint/2010/main" val="1936089100"/>
+        <p14:creationId xmlns:p14="http://schemas.microsoft.com/office/powerpoint/2010/main" val="3905268026"/>
       </p:ext>
     </p:extLst>
   </p:cSld>
@@ -8103,7 +8218,7 @@
         <p:cNvPr id="1" name="">
           <a:extLst>
             <a:ext uri="{FF2B5EF4-FFF2-40B4-BE49-F238E27FC236}">
-              <a16:creationId xmlns:a16="http://schemas.microsoft.com/office/drawing/2014/main" id="{57338D27-9888-E8B2-933B-58AC118FED94}"/>
+              <a16:creationId xmlns:a16="http://schemas.microsoft.com/office/drawing/2014/main" id="{EF66A5B3-163B-6F07-10F6-516CFF5236F4}"/>
             </a:ext>
           </a:extLst>
         </p:cNvPr>
@@ -8123,7 +8238,7 @@
           <p:cNvPr id="3" name="TextBox 2">
             <a:extLst>
               <a:ext uri="{FF2B5EF4-FFF2-40B4-BE49-F238E27FC236}">
-                <a16:creationId xmlns:a16="http://schemas.microsoft.com/office/drawing/2014/main" id="{82E99EED-B91E-04B6-385B-CA72C4DE37FA}"/>
+                <a16:creationId xmlns:a16="http://schemas.microsoft.com/office/drawing/2014/main" id="{1A26FCE8-5EF0-0DF6-F8B5-C649DC205363}"/>
               </a:ext>
             </a:extLst>
           </p:cNvPr>
@@ -8161,7 +8276,7 @@
           <p:cNvPr id="17" name="그룹 16">
             <a:extLst>
               <a:ext uri="{FF2B5EF4-FFF2-40B4-BE49-F238E27FC236}">
-                <a16:creationId xmlns:a16="http://schemas.microsoft.com/office/drawing/2014/main" id="{1F219120-78F7-E455-1598-32BF060343A6}"/>
+                <a16:creationId xmlns:a16="http://schemas.microsoft.com/office/drawing/2014/main" id="{1A49BD73-09B6-9576-4A99-AEFE0F7F42C3}"/>
               </a:ext>
             </a:extLst>
           </p:cNvPr>
@@ -8181,7 +8296,7 @@
             <p:cNvPr id="5" name="그림 4" descr="패턴, 사각형, 예술, 직사각형이(가) 표시된 사진&#10;&#10;AI 생성 콘텐츠는 정확하지 않을 수 있습니다.">
               <a:extLst>
                 <a:ext uri="{FF2B5EF4-FFF2-40B4-BE49-F238E27FC236}">
-                  <a16:creationId xmlns:a16="http://schemas.microsoft.com/office/drawing/2014/main" id="{0EC54231-9AFF-0F30-9CE8-C9B0ADE86320}"/>
+                  <a16:creationId xmlns:a16="http://schemas.microsoft.com/office/drawing/2014/main" id="{237758EC-8039-A3EA-24AD-2B5B0B1F60A1}"/>
                 </a:ext>
               </a:extLst>
             </p:cNvPr>
@@ -8211,7 +8326,7 @@
             <p:cNvPr id="13" name="L 도형 12">
               <a:extLst>
                 <a:ext uri="{FF2B5EF4-FFF2-40B4-BE49-F238E27FC236}">
-                  <a16:creationId xmlns:a16="http://schemas.microsoft.com/office/drawing/2014/main" id="{734CBA43-E640-F06A-57CB-DACF86AE6E83}"/>
+                  <a16:creationId xmlns:a16="http://schemas.microsoft.com/office/drawing/2014/main" id="{1386BAC4-C977-A7C2-6D4E-8D1313D44B3B}"/>
                 </a:ext>
               </a:extLst>
             </p:cNvPr>
@@ -8268,7 +8383,7 @@
             <p:cNvPr id="14" name="L 도형 13">
               <a:extLst>
                 <a:ext uri="{FF2B5EF4-FFF2-40B4-BE49-F238E27FC236}">
-                  <a16:creationId xmlns:a16="http://schemas.microsoft.com/office/drawing/2014/main" id="{BA9E35DA-ADB0-38A2-DDA5-957CB477F630}"/>
+                  <a16:creationId xmlns:a16="http://schemas.microsoft.com/office/drawing/2014/main" id="{925A8E91-1465-F155-CE7D-07F92B383DAE}"/>
                 </a:ext>
               </a:extLst>
             </p:cNvPr>
@@ -8325,7 +8440,7 @@
             <p:cNvPr id="15" name="L 도형 14">
               <a:extLst>
                 <a:ext uri="{FF2B5EF4-FFF2-40B4-BE49-F238E27FC236}">
-                  <a16:creationId xmlns:a16="http://schemas.microsoft.com/office/drawing/2014/main" id="{20EB962B-1EB4-BA2D-BFC5-B6C695D6CFB2}"/>
+                  <a16:creationId xmlns:a16="http://schemas.microsoft.com/office/drawing/2014/main" id="{C1BBBB1F-2080-F657-B9D3-EDC41813B5EF}"/>
                 </a:ext>
               </a:extLst>
             </p:cNvPr>
@@ -8382,7 +8497,7 @@
             <p:cNvPr id="16" name="L 도형 15">
               <a:extLst>
                 <a:ext uri="{FF2B5EF4-FFF2-40B4-BE49-F238E27FC236}">
-                  <a16:creationId xmlns:a16="http://schemas.microsoft.com/office/drawing/2014/main" id="{F979FC5C-4874-C745-D27C-90B5E3D80FC2}"/>
+                  <a16:creationId xmlns:a16="http://schemas.microsoft.com/office/drawing/2014/main" id="{C255AB45-9E19-5135-2840-6E83A0CEA2B5}"/>
                 </a:ext>
               </a:extLst>
             </p:cNvPr>
@@ -8440,7 +8555,7 @@
           <p:cNvPr id="18" name="그룹 17">
             <a:extLst>
               <a:ext uri="{FF2B5EF4-FFF2-40B4-BE49-F238E27FC236}">
-                <a16:creationId xmlns:a16="http://schemas.microsoft.com/office/drawing/2014/main" id="{C8146134-793D-3F7A-1873-B178E892AFBB}"/>
+                <a16:creationId xmlns:a16="http://schemas.microsoft.com/office/drawing/2014/main" id="{8C3E1EF8-8C3B-A192-11B5-BED425D3D79C}"/>
               </a:ext>
             </a:extLst>
           </p:cNvPr>
@@ -8460,7 +8575,7 @@
             <p:cNvPr id="4" name="TextBox 3">
               <a:extLst>
                 <a:ext uri="{FF2B5EF4-FFF2-40B4-BE49-F238E27FC236}">
-                  <a16:creationId xmlns:a16="http://schemas.microsoft.com/office/drawing/2014/main" id="{2BC5242E-5CA4-6217-1821-01AFC509D42D}"/>
+                  <a16:creationId xmlns:a16="http://schemas.microsoft.com/office/drawing/2014/main" id="{A9D039A7-DA18-313A-AF87-12621352F5CE}"/>
                 </a:ext>
               </a:extLst>
             </p:cNvPr>
@@ -8535,7 +8650,7 @@
             <p:cNvPr id="6" name="TextBox 5">
               <a:extLst>
                 <a:ext uri="{FF2B5EF4-FFF2-40B4-BE49-F238E27FC236}">
-                  <a16:creationId xmlns:a16="http://schemas.microsoft.com/office/drawing/2014/main" id="{604FCF81-594C-31C3-18B3-25B93F3500A1}"/>
+                  <a16:creationId xmlns:a16="http://schemas.microsoft.com/office/drawing/2014/main" id="{DEEE7C7E-6934-B627-6EC0-48367D0769B1}"/>
                 </a:ext>
               </a:extLst>
             </p:cNvPr>
@@ -8602,7 +8717,7 @@
             <p:cNvPr id="10" name="그림 9">
               <a:extLst>
                 <a:ext uri="{FF2B5EF4-FFF2-40B4-BE49-F238E27FC236}">
-                  <a16:creationId xmlns:a16="http://schemas.microsoft.com/office/drawing/2014/main" id="{18034259-4CDC-550B-0484-8424B1840976}"/>
+                  <a16:creationId xmlns:a16="http://schemas.microsoft.com/office/drawing/2014/main" id="{22CDF7ED-65DD-B2AB-0D3A-2876557659C7}"/>
                 </a:ext>
               </a:extLst>
             </p:cNvPr>
@@ -8632,7 +8747,7 @@
             <p:cNvPr id="30" name="그림 29">
               <a:extLst>
                 <a:ext uri="{FF2B5EF4-FFF2-40B4-BE49-F238E27FC236}">
-                  <a16:creationId xmlns:a16="http://schemas.microsoft.com/office/drawing/2014/main" id="{8437BAE9-35E6-B8FB-71FB-5C49E156476C}"/>
+                  <a16:creationId xmlns:a16="http://schemas.microsoft.com/office/drawing/2014/main" id="{CACE4F19-6C03-B4A0-12DF-B80E74EF21DC}"/>
                 </a:ext>
               </a:extLst>
             </p:cNvPr>
@@ -8663,7 +8778,7 @@
           <p:cNvPr id="31" name="TextBox 30">
             <a:extLst>
               <a:ext uri="{FF2B5EF4-FFF2-40B4-BE49-F238E27FC236}">
-                <a16:creationId xmlns:a16="http://schemas.microsoft.com/office/drawing/2014/main" id="{2A838841-41AC-CFC1-D5BD-E34271622934}"/>
+                <a16:creationId xmlns:a16="http://schemas.microsoft.com/office/drawing/2014/main" id="{8286C7F5-77BB-B584-5E2E-82705B55B19B}"/>
               </a:ext>
             </a:extLst>
           </p:cNvPr>
@@ -8673,7 +8788,7 @@
         <p:spPr>
           <a:xfrm>
             <a:off x="82843" y="781989"/>
-            <a:ext cx="2592376" cy="790345"/>
+            <a:ext cx="2258952" cy="786882"/>
           </a:xfrm>
           <a:prstGeom prst="rect">
             <a:avLst/>
@@ -8697,86 +8812,86 @@
               <a:buChar char="•"/>
             </a:pPr>
             <a:r>
-              <a:rPr lang="en-US" altLang="ko-KR" sz="800" b="1" dirty="0">
-                <a:latin typeface="KoPub돋움체 Bold" panose="00000800000000000000" pitchFamily="2" charset="-127"/>
-                <a:ea typeface="KoPub돋움체 Bold" panose="00000800000000000000" pitchFamily="2" charset="-127"/>
+              <a:rPr lang="en-US" altLang="ko-KR" sz="700" b="1" dirty="0">
+                <a:latin typeface="KoPub돋움체 Light" panose="02020603020101020101" pitchFamily="18" charset="-127"/>
+                <a:ea typeface="KoPub돋움체 Light" panose="02020603020101020101" pitchFamily="18" charset="-127"/>
               </a:rPr>
               <a:t>[</a:t>
             </a:r>
             <a:r>
-              <a:rPr lang="ko-KR" altLang="en-US" sz="800" b="1" dirty="0">
-                <a:latin typeface="KoPub돋움체 Bold" panose="00000800000000000000" pitchFamily="2" charset="-127"/>
-                <a:ea typeface="KoPub돋움체 Bold" panose="00000800000000000000" pitchFamily="2" charset="-127"/>
+              <a:rPr lang="ko-KR" altLang="en-US" sz="700" b="1" dirty="0">
+                <a:latin typeface="KoPub돋움체 Light" panose="02020603020101020101" pitchFamily="18" charset="-127"/>
+                <a:ea typeface="KoPub돋움체 Light" panose="02020603020101020101" pitchFamily="18" charset="-127"/>
               </a:rPr>
               <a:t>식별</a:t>
             </a:r>
             <a:r>
-              <a:rPr lang="en-US" altLang="ko-KR" sz="800" b="1" dirty="0">
-                <a:latin typeface="KoPub돋움체 Bold" panose="00000800000000000000" pitchFamily="2" charset="-127"/>
-                <a:ea typeface="KoPub돋움체 Bold" panose="00000800000000000000" pitchFamily="2" charset="-127"/>
+              <a:rPr lang="en-US" altLang="ko-KR" sz="700" b="1" dirty="0">
+                <a:latin typeface="KoPub돋움체 Light" panose="02020603020101020101" pitchFamily="18" charset="-127"/>
+                <a:ea typeface="KoPub돋움체 Light" panose="02020603020101020101" pitchFamily="18" charset="-127"/>
               </a:rPr>
               <a:t>] </a:t>
             </a:r>
             <a:r>
-              <a:rPr lang="ko-KR" altLang="en-US" sz="800" b="1" dirty="0">
-                <a:latin typeface="KoPub돋움체 Bold" panose="00000800000000000000" pitchFamily="2" charset="-127"/>
-                <a:ea typeface="KoPub돋움체 Bold" panose="00000800000000000000" pitchFamily="2" charset="-127"/>
+              <a:rPr lang="ko-KR" altLang="en-US" sz="700" b="1" dirty="0">
+                <a:latin typeface="KoPub돋움체 Light" panose="02020603020101020101" pitchFamily="18" charset="-127"/>
+                <a:ea typeface="KoPub돋움체 Light" panose="02020603020101020101" pitchFamily="18" charset="-127"/>
               </a:rPr>
               <a:t>첫머리 </a:t>
             </a:r>
             <a:r>
-              <a:rPr lang="en-US" altLang="ko-KR" sz="800" b="1" dirty="0">
-                <a:latin typeface="KoPub돋움체 Bold" panose="00000800000000000000" pitchFamily="2" charset="-127"/>
-                <a:ea typeface="KoPub돋움체 Bold" panose="00000800000000000000" pitchFamily="2" charset="-127"/>
+              <a:rPr lang="en-US" altLang="ko-KR" sz="700" b="1" dirty="0">
+                <a:latin typeface="KoPub돋움체 Light" panose="02020603020101020101" pitchFamily="18" charset="-127"/>
+                <a:ea typeface="KoPub돋움체 Light" panose="02020603020101020101" pitchFamily="18" charset="-127"/>
               </a:rPr>
               <a:t>[</a:t>
             </a:r>
             <a:r>
-              <a:rPr lang="ko-KR" altLang="en-US" sz="800" b="1" dirty="0">
-                <a:latin typeface="KoPub돋움체 Bold" panose="00000800000000000000" pitchFamily="2" charset="-127"/>
-                <a:ea typeface="KoPub돋움체 Bold" panose="00000800000000000000" pitchFamily="2" charset="-127"/>
+              <a:rPr lang="ko-KR" altLang="en-US" sz="700" b="1" dirty="0">
+                <a:latin typeface="KoPub돋움체 Light" panose="02020603020101020101" pitchFamily="18" charset="-127"/>
+                <a:ea typeface="KoPub돋움체 Light" panose="02020603020101020101" pitchFamily="18" charset="-127"/>
               </a:rPr>
               <a:t>병실</a:t>
             </a:r>
             <a:r>
-              <a:rPr lang="en-US" altLang="ko-KR" sz="800" b="1" dirty="0">
-                <a:latin typeface="KoPub돋움체 Bold" panose="00000800000000000000" pitchFamily="2" charset="-127"/>
-                <a:ea typeface="KoPub돋움체 Bold" panose="00000800000000000000" pitchFamily="2" charset="-127"/>
+              <a:rPr lang="en-US" altLang="ko-KR" sz="700" b="1" dirty="0">
+                <a:latin typeface="KoPub돋움체 Light" panose="02020603020101020101" pitchFamily="18" charset="-127"/>
+                <a:ea typeface="KoPub돋움체 Light" panose="02020603020101020101" pitchFamily="18" charset="-127"/>
               </a:rPr>
               <a:t>/</a:t>
             </a:r>
             <a:r>
-              <a:rPr lang="ko-KR" altLang="en-US" sz="800" b="1" dirty="0">
-                <a:latin typeface="KoPub돋움체 Bold" panose="00000800000000000000" pitchFamily="2" charset="-127"/>
-                <a:ea typeface="KoPub돋움체 Bold" panose="00000800000000000000" pitchFamily="2" charset="-127"/>
+              <a:rPr lang="ko-KR" altLang="en-US" sz="700" b="1" dirty="0">
+                <a:latin typeface="KoPub돋움체 Light" panose="02020603020101020101" pitchFamily="18" charset="-127"/>
+                <a:ea typeface="KoPub돋움체 Light" panose="02020603020101020101" pitchFamily="18" charset="-127"/>
               </a:rPr>
               <a:t>성함</a:t>
             </a:r>
             <a:r>
-              <a:rPr lang="en-US" altLang="ko-KR" sz="800" b="1" dirty="0">
-                <a:latin typeface="KoPub돋움체 Bold" panose="00000800000000000000" pitchFamily="2" charset="-127"/>
-                <a:ea typeface="KoPub돋움체 Bold" panose="00000800000000000000" pitchFamily="2" charset="-127"/>
+              <a:rPr lang="en-US" altLang="ko-KR" sz="700" b="1" dirty="0">
+                <a:latin typeface="KoPub돋움체 Light" panose="02020603020101020101" pitchFamily="18" charset="-127"/>
+                <a:ea typeface="KoPub돋움체 Light" panose="02020603020101020101" pitchFamily="18" charset="-127"/>
               </a:rPr>
               <a:t>/</a:t>
             </a:r>
             <a:r>
-              <a:rPr lang="ko-KR" altLang="en-US" sz="800" b="1" dirty="0">
-                <a:latin typeface="KoPub돋움체 Bold" panose="00000800000000000000" pitchFamily="2" charset="-127"/>
-                <a:ea typeface="KoPub돋움체 Bold" panose="00000800000000000000" pitchFamily="2" charset="-127"/>
+              <a:rPr lang="ko-KR" altLang="en-US" sz="700" b="1" dirty="0">
+                <a:latin typeface="KoPub돋움체 Light" panose="02020603020101020101" pitchFamily="18" charset="-127"/>
+                <a:ea typeface="KoPub돋움체 Light" panose="02020603020101020101" pitchFamily="18" charset="-127"/>
               </a:rPr>
               <a:t>사유</a:t>
             </a:r>
             <a:r>
-              <a:rPr lang="en-US" altLang="ko-KR" sz="800" b="1" dirty="0">
-                <a:latin typeface="KoPub돋움체 Bold" panose="00000800000000000000" pitchFamily="2" charset="-127"/>
-                <a:ea typeface="KoPub돋움체 Bold" panose="00000800000000000000" pitchFamily="2" charset="-127"/>
+              <a:rPr lang="en-US" altLang="ko-KR" sz="700" b="1" dirty="0">
+                <a:latin typeface="KoPub돋움체 Light" panose="02020603020101020101" pitchFamily="18" charset="-127"/>
+                <a:ea typeface="KoPub돋움체 Light" panose="02020603020101020101" pitchFamily="18" charset="-127"/>
               </a:rPr>
               <a:t>]</a:t>
             </a:r>
             <a:r>
-              <a:rPr lang="ko-KR" altLang="en-US" sz="800" b="1" dirty="0">
-                <a:latin typeface="KoPub돋움체 Bold" panose="00000800000000000000" pitchFamily="2" charset="-127"/>
-                <a:ea typeface="KoPub돋움체 Bold" panose="00000800000000000000" pitchFamily="2" charset="-127"/>
+              <a:rPr lang="ko-KR" altLang="en-US" sz="700" b="1" dirty="0">
+                <a:latin typeface="KoPub돋움체 Light" panose="02020603020101020101" pitchFamily="18" charset="-127"/>
+                <a:ea typeface="KoPub돋움체 Light" panose="02020603020101020101" pitchFamily="18" charset="-127"/>
               </a:rPr>
               <a:t>필수 기재</a:t>
             </a:r>
@@ -8793,65 +8908,65 @@
               <a:buChar char="•"/>
             </a:pPr>
             <a:r>
-              <a:rPr lang="en-US" altLang="ko-KR" sz="800" b="1" dirty="0">
-                <a:latin typeface="KoPub돋움체 Bold" panose="00000800000000000000" pitchFamily="2" charset="-127"/>
-                <a:ea typeface="KoPub돋움체 Bold" panose="00000800000000000000" pitchFamily="2" charset="-127"/>
+              <a:rPr lang="en-US" altLang="ko-KR" sz="700" b="1" dirty="0">
+                <a:latin typeface="KoPub돋움체 Light" panose="02020603020101020101" pitchFamily="18" charset="-127"/>
+                <a:ea typeface="KoPub돋움체 Light" panose="02020603020101020101" pitchFamily="18" charset="-127"/>
               </a:rPr>
               <a:t>[</a:t>
             </a:r>
             <a:r>
-              <a:rPr lang="ko-KR" altLang="en-US" sz="800" b="1" dirty="0">
-                <a:latin typeface="KoPub돋움체 Bold" panose="00000800000000000000" pitchFamily="2" charset="-127"/>
-                <a:ea typeface="KoPub돋움체 Bold" panose="00000800000000000000" pitchFamily="2" charset="-127"/>
+              <a:rPr lang="ko-KR" altLang="en-US" sz="700" b="1" dirty="0">
+                <a:latin typeface="KoPub돋움체 Light" panose="02020603020101020101" pitchFamily="18" charset="-127"/>
+                <a:ea typeface="KoPub돋움체 Light" panose="02020603020101020101" pitchFamily="18" charset="-127"/>
               </a:rPr>
               <a:t>공유</a:t>
             </a:r>
             <a:r>
-              <a:rPr lang="en-US" altLang="ko-KR" sz="800" b="1" dirty="0">
-                <a:latin typeface="KoPub돋움체 Bold" panose="00000800000000000000" pitchFamily="2" charset="-127"/>
-                <a:ea typeface="KoPub돋움체 Bold" panose="00000800000000000000" pitchFamily="2" charset="-127"/>
+              <a:rPr lang="en-US" altLang="ko-KR" sz="700" b="1" dirty="0">
+                <a:latin typeface="KoPub돋움체 Light" panose="02020603020101020101" pitchFamily="18" charset="-127"/>
+                <a:ea typeface="KoPub돋움체 Light" panose="02020603020101020101" pitchFamily="18" charset="-127"/>
               </a:rPr>
               <a:t>] </a:t>
             </a:r>
             <a:r>
-              <a:rPr lang="ko-KR" altLang="en-US" sz="800" b="1" dirty="0">
-                <a:latin typeface="KoPub돋움체 Bold" panose="00000800000000000000" pitchFamily="2" charset="-127"/>
-                <a:ea typeface="KoPub돋움체 Bold" panose="00000800000000000000" pitchFamily="2" charset="-127"/>
+              <a:rPr lang="ko-KR" altLang="en-US" sz="700" b="1" dirty="0">
+                <a:latin typeface="KoPub돋움체 Light" panose="02020603020101020101" pitchFamily="18" charset="-127"/>
+                <a:ea typeface="KoPub돋움체 Light" panose="02020603020101020101" pitchFamily="18" charset="-127"/>
               </a:rPr>
               <a:t>결정 사항의 </a:t>
             </a:r>
             <a:r>
-              <a:rPr lang="ko-KR" altLang="en-US" sz="800" b="1" dirty="0" err="1">
-                <a:latin typeface="KoPub돋움체 Bold" panose="00000800000000000000" pitchFamily="2" charset="-127"/>
-                <a:ea typeface="KoPub돋움체 Bold" panose="00000800000000000000" pitchFamily="2" charset="-127"/>
+              <a:rPr lang="ko-KR" altLang="en-US" sz="700" b="1" dirty="0" err="1">
+                <a:latin typeface="KoPub돋움체 Light" panose="02020603020101020101" pitchFamily="18" charset="-127"/>
+                <a:ea typeface="KoPub돋움체 Light" panose="02020603020101020101" pitchFamily="18" charset="-127"/>
               </a:rPr>
               <a:t>선제적</a:t>
             </a:r>
             <a:r>
-              <a:rPr lang="ko-KR" altLang="en-US" sz="800" b="1" dirty="0">
-                <a:latin typeface="KoPub돋움체 Bold" panose="00000800000000000000" pitchFamily="2" charset="-127"/>
-                <a:ea typeface="KoPub돋움체 Bold" panose="00000800000000000000" pitchFamily="2" charset="-127"/>
+              <a:rPr lang="ko-KR" altLang="en-US" sz="700" b="1" dirty="0">
+                <a:latin typeface="KoPub돋움체 Light" panose="02020603020101020101" pitchFamily="18" charset="-127"/>
+                <a:ea typeface="KoPub돋움체 Light" panose="02020603020101020101" pitchFamily="18" charset="-127"/>
               </a:rPr>
               <a:t> 알림 </a:t>
             </a:r>
             <a:r>
-              <a:rPr lang="en-US" altLang="ko-KR" sz="800" b="1" dirty="0">
-                <a:latin typeface="KoPub돋움체 Bold" panose="00000800000000000000" pitchFamily="2" charset="-127"/>
-                <a:ea typeface="KoPub돋움체 Bold" panose="00000800000000000000" pitchFamily="2" charset="-127"/>
+              <a:rPr lang="en-US" altLang="ko-KR" sz="700" b="1" dirty="0">
+                <a:latin typeface="KoPub돋움체 Light" panose="02020603020101020101" pitchFamily="18" charset="-127"/>
+                <a:ea typeface="KoPub돋움체 Light" panose="02020603020101020101" pitchFamily="18" charset="-127"/>
               </a:rPr>
               <a:t>(PA ↔ </a:t>
             </a:r>
             <a:r>
-              <a:rPr lang="ko-KR" altLang="en-US" sz="800" b="1" dirty="0">
-                <a:latin typeface="KoPub돋움체 Bold" panose="00000800000000000000" pitchFamily="2" charset="-127"/>
-                <a:ea typeface="KoPub돋움체 Bold" panose="00000800000000000000" pitchFamily="2" charset="-127"/>
+              <a:rPr lang="ko-KR" altLang="en-US" sz="700" b="1" dirty="0">
+                <a:latin typeface="KoPub돋움체 Light" panose="02020603020101020101" pitchFamily="18" charset="-127"/>
+                <a:ea typeface="KoPub돋움체 Light" panose="02020603020101020101" pitchFamily="18" charset="-127"/>
               </a:rPr>
               <a:t>병동</a:t>
             </a:r>
             <a:r>
-              <a:rPr lang="en-US" altLang="ko-KR" sz="800" b="1" dirty="0">
-                <a:latin typeface="KoPub돋움체 Bold" panose="00000800000000000000" pitchFamily="2" charset="-127"/>
-                <a:ea typeface="KoPub돋움체 Bold" panose="00000800000000000000" pitchFamily="2" charset="-127"/>
+              <a:rPr lang="en-US" altLang="ko-KR" sz="700" b="1" dirty="0">
+                <a:latin typeface="KoPub돋움체 Light" panose="02020603020101020101" pitchFamily="18" charset="-127"/>
+                <a:ea typeface="KoPub돋움체 Light" panose="02020603020101020101" pitchFamily="18" charset="-127"/>
               </a:rPr>
               <a:t>)</a:t>
             </a:r>
@@ -8868,93 +8983,93 @@
               <a:buChar char="•"/>
             </a:pPr>
             <a:r>
-              <a:rPr lang="en-US" altLang="ko-KR" sz="800" b="1" dirty="0">
-                <a:latin typeface="KoPub돋움체 Bold" panose="00000800000000000000" pitchFamily="2" charset="-127"/>
-                <a:ea typeface="KoPub돋움체 Bold" panose="00000800000000000000" pitchFamily="2" charset="-127"/>
+              <a:rPr lang="en-US" altLang="ko-KR" sz="700" b="1" dirty="0">
+                <a:latin typeface="KoPub돋움체 Light" panose="02020603020101020101" pitchFamily="18" charset="-127"/>
+                <a:ea typeface="KoPub돋움체 Light" panose="02020603020101020101" pitchFamily="18" charset="-127"/>
               </a:rPr>
               <a:t>[</a:t>
             </a:r>
             <a:r>
-              <a:rPr lang="ko-KR" altLang="en-US" sz="800" b="1" dirty="0">
-                <a:latin typeface="KoPub돋움체 Bold" panose="00000800000000000000" pitchFamily="2" charset="-127"/>
-                <a:ea typeface="KoPub돋움체 Bold" panose="00000800000000000000" pitchFamily="2" charset="-127"/>
+              <a:rPr lang="ko-KR" altLang="en-US" sz="700" b="1" dirty="0">
+                <a:latin typeface="KoPub돋움체 Light" panose="02020603020101020101" pitchFamily="18" charset="-127"/>
+                <a:ea typeface="KoPub돋움체 Light" panose="02020603020101020101" pitchFamily="18" charset="-127"/>
               </a:rPr>
               <a:t>원칙</a:t>
             </a:r>
             <a:r>
-              <a:rPr lang="en-US" altLang="ko-KR" sz="800" b="1" dirty="0">
-                <a:latin typeface="KoPub돋움체 Bold" panose="00000800000000000000" pitchFamily="2" charset="-127"/>
-                <a:ea typeface="KoPub돋움체 Bold" panose="00000800000000000000" pitchFamily="2" charset="-127"/>
+              <a:rPr lang="en-US" altLang="ko-KR" sz="700" b="1" dirty="0">
+                <a:latin typeface="KoPub돋움체 Light" panose="02020603020101020101" pitchFamily="18" charset="-127"/>
+                <a:ea typeface="KoPub돋움체 Light" panose="02020603020101020101" pitchFamily="18" charset="-127"/>
               </a:rPr>
               <a:t>] </a:t>
             </a:r>
             <a:r>
-              <a:rPr lang="ko-KR" altLang="en-US" sz="800" b="1" dirty="0">
-                <a:latin typeface="KoPub돋움체 Bold" panose="00000800000000000000" pitchFamily="2" charset="-127"/>
-                <a:ea typeface="KoPub돋움체 Bold" panose="00000800000000000000" pitchFamily="2" charset="-127"/>
+              <a:rPr lang="ko-KR" altLang="en-US" sz="700" b="1" dirty="0">
+                <a:latin typeface="KoPub돋움체 Light" panose="02020603020101020101" pitchFamily="18" charset="-127"/>
+                <a:ea typeface="KoPub돋움체 Light" panose="02020603020101020101" pitchFamily="18" charset="-127"/>
               </a:rPr>
               <a:t>공식 채널</a:t>
             </a:r>
             <a:r>
-              <a:rPr lang="en-US" altLang="ko-KR" sz="800" b="1" dirty="0">
-                <a:latin typeface="KoPub돋움체 Bold" panose="00000800000000000000" pitchFamily="2" charset="-127"/>
-                <a:ea typeface="KoPub돋움체 Bold" panose="00000800000000000000" pitchFamily="2" charset="-127"/>
+              <a:rPr lang="en-US" altLang="ko-KR" sz="700" b="1" dirty="0">
+                <a:latin typeface="KoPub돋움체 Light" panose="02020603020101020101" pitchFamily="18" charset="-127"/>
+                <a:ea typeface="KoPub돋움체 Light" panose="02020603020101020101" pitchFamily="18" charset="-127"/>
               </a:rPr>
               <a:t>(EMR/</a:t>
             </a:r>
             <a:r>
-              <a:rPr lang="ko-KR" altLang="en-US" sz="800" b="1" dirty="0">
-                <a:latin typeface="KoPub돋움체 Bold" panose="00000800000000000000" pitchFamily="2" charset="-127"/>
-                <a:ea typeface="KoPub돋움체 Bold" panose="00000800000000000000" pitchFamily="2" charset="-127"/>
+              <a:rPr lang="ko-KR" altLang="en-US" sz="700" b="1" dirty="0">
+                <a:latin typeface="KoPub돋움체 Light" panose="02020603020101020101" pitchFamily="18" charset="-127"/>
+                <a:ea typeface="KoPub돋움체 Light" panose="02020603020101020101" pitchFamily="18" charset="-127"/>
               </a:rPr>
               <a:t>유선</a:t>
             </a:r>
             <a:r>
-              <a:rPr lang="en-US" altLang="ko-KR" sz="800" b="1" dirty="0">
-                <a:latin typeface="KoPub돋움체 Bold" panose="00000800000000000000" pitchFamily="2" charset="-127"/>
-                <a:ea typeface="KoPub돋움체 Bold" panose="00000800000000000000" pitchFamily="2" charset="-127"/>
+              <a:rPr lang="en-US" altLang="ko-KR" sz="700" b="1" dirty="0">
+                <a:latin typeface="KoPub돋움체 Light" panose="02020603020101020101" pitchFamily="18" charset="-127"/>
+                <a:ea typeface="KoPub돋움체 Light" panose="02020603020101020101" pitchFamily="18" charset="-127"/>
               </a:rPr>
               <a:t>) </a:t>
             </a:r>
             <a:r>
-              <a:rPr lang="ko-KR" altLang="en-US" sz="800" b="1" dirty="0">
-                <a:latin typeface="KoPub돋움체 Bold" panose="00000800000000000000" pitchFamily="2" charset="-127"/>
-                <a:ea typeface="KoPub돋움체 Bold" panose="00000800000000000000" pitchFamily="2" charset="-127"/>
+              <a:rPr lang="ko-KR" altLang="en-US" sz="700" b="1" dirty="0">
+                <a:latin typeface="KoPub돋움체 Light" panose="02020603020101020101" pitchFamily="18" charset="-127"/>
+                <a:ea typeface="KoPub돋움체 Light" panose="02020603020101020101" pitchFamily="18" charset="-127"/>
               </a:rPr>
               <a:t>활용 </a:t>
             </a:r>
             <a:r>
-              <a:rPr lang="en-US" altLang="ko-KR" sz="800" b="1" dirty="0">
-                <a:latin typeface="KoPub돋움체 Bold" panose="00000800000000000000" pitchFamily="2" charset="-127"/>
-                <a:ea typeface="KoPub돋움체 Bold" panose="00000800000000000000" pitchFamily="2" charset="-127"/>
+              <a:rPr lang="en-US" altLang="ko-KR" sz="700" b="1" dirty="0">
+                <a:latin typeface="KoPub돋움체 Light" panose="02020603020101020101" pitchFamily="18" charset="-127"/>
+                <a:ea typeface="KoPub돋움체 Light" panose="02020603020101020101" pitchFamily="18" charset="-127"/>
               </a:rPr>
               <a:t>(</a:t>
             </a:r>
             <a:r>
-              <a:rPr lang="ko-KR" altLang="en-US" sz="800" b="1" dirty="0">
-                <a:latin typeface="KoPub돋움체 Bold" panose="00000800000000000000" pitchFamily="2" charset="-127"/>
-                <a:ea typeface="KoPub돋움체 Bold" panose="00000800000000000000" pitchFamily="2" charset="-127"/>
+              <a:rPr lang="ko-KR" altLang="en-US" sz="700" b="1" dirty="0">
+                <a:latin typeface="KoPub돋움체 Light" panose="02020603020101020101" pitchFamily="18" charset="-127"/>
+                <a:ea typeface="KoPub돋움체 Light" panose="02020603020101020101" pitchFamily="18" charset="-127"/>
               </a:rPr>
               <a:t>수술</a:t>
             </a:r>
             <a:r>
-              <a:rPr lang="en-US" altLang="ko-KR" sz="800" b="1" dirty="0">
-                <a:latin typeface="KoPub돋움체 Bold" panose="00000800000000000000" pitchFamily="2" charset="-127"/>
-                <a:ea typeface="KoPub돋움체 Bold" panose="00000800000000000000" pitchFamily="2" charset="-127"/>
+              <a:rPr lang="en-US" altLang="ko-KR" sz="700" b="1" dirty="0">
+                <a:latin typeface="KoPub돋움체 Light" panose="02020603020101020101" pitchFamily="18" charset="-127"/>
+                <a:ea typeface="KoPub돋움체 Light" panose="02020603020101020101" pitchFamily="18" charset="-127"/>
               </a:rPr>
               <a:t>, </a:t>
             </a:r>
             <a:r>
-              <a:rPr lang="ko-KR" altLang="en-US" sz="800" b="1" dirty="0">
-                <a:latin typeface="KoPub돋움체 Bold" panose="00000800000000000000" pitchFamily="2" charset="-127"/>
-                <a:ea typeface="KoPub돋움체 Bold" panose="00000800000000000000" pitchFamily="2" charset="-127"/>
+              <a:rPr lang="ko-KR" altLang="en-US" sz="700" b="1" dirty="0">
+                <a:latin typeface="KoPub돋움체 Light" panose="02020603020101020101" pitchFamily="18" charset="-127"/>
+                <a:ea typeface="KoPub돋움체 Light" panose="02020603020101020101" pitchFamily="18" charset="-127"/>
               </a:rPr>
               <a:t>검사 결과 보고</a:t>
             </a:r>
             <a:r>
-              <a:rPr lang="en-US" altLang="ko-KR" sz="800" b="1" dirty="0">
-                <a:latin typeface="KoPub돋움체 Bold" panose="00000800000000000000" pitchFamily="2" charset="-127"/>
-                <a:ea typeface="KoPub돋움체 Bold" panose="00000800000000000000" pitchFamily="2" charset="-127"/>
+              <a:rPr lang="en-US" altLang="ko-KR" sz="700" b="1" dirty="0">
+                <a:latin typeface="KoPub돋움체 Light" panose="02020603020101020101" pitchFamily="18" charset="-127"/>
+                <a:ea typeface="KoPub돋움체 Light" panose="02020603020101020101" pitchFamily="18" charset="-127"/>
               </a:rPr>
               <a:t>)</a:t>
             </a:r>
@@ -8971,44 +9086,44 @@
               <a:buChar char="•"/>
             </a:pPr>
             <a:r>
-              <a:rPr lang="en-US" altLang="ko-KR" sz="800" b="1" dirty="0">
-                <a:latin typeface="KoPub돋움체 Bold" panose="00000800000000000000" pitchFamily="2" charset="-127"/>
-                <a:ea typeface="KoPub돋움체 Bold" panose="00000800000000000000" pitchFamily="2" charset="-127"/>
+              <a:rPr lang="en-US" altLang="ko-KR" sz="700" b="1" dirty="0">
+                <a:latin typeface="KoPub돋움체 Light" panose="02020603020101020101" pitchFamily="18" charset="-127"/>
+                <a:ea typeface="KoPub돋움체 Light" panose="02020603020101020101" pitchFamily="18" charset="-127"/>
               </a:rPr>
               <a:t>[</a:t>
             </a:r>
             <a:r>
-              <a:rPr lang="ko-KR" altLang="en-US" sz="800" b="1" dirty="0">
-                <a:latin typeface="KoPub돋움체 Bold" panose="00000800000000000000" pitchFamily="2" charset="-127"/>
-                <a:ea typeface="KoPub돋움체 Bold" panose="00000800000000000000" pitchFamily="2" charset="-127"/>
+              <a:rPr lang="ko-KR" altLang="en-US" sz="700" b="1" dirty="0">
+                <a:latin typeface="KoPub돋움체 Light" panose="02020603020101020101" pitchFamily="18" charset="-127"/>
+                <a:ea typeface="KoPub돋움체 Light" panose="02020603020101020101" pitchFamily="18" charset="-127"/>
               </a:rPr>
               <a:t>완결</a:t>
             </a:r>
             <a:r>
-              <a:rPr lang="en-US" altLang="ko-KR" sz="800" b="1" dirty="0">
-                <a:latin typeface="KoPub돋움체 Bold" panose="00000800000000000000" pitchFamily="2" charset="-127"/>
-                <a:ea typeface="KoPub돋움체 Bold" panose="00000800000000000000" pitchFamily="2" charset="-127"/>
+              <a:rPr lang="en-US" altLang="ko-KR" sz="700" b="1" dirty="0">
+                <a:latin typeface="KoPub돋움체 Light" panose="02020603020101020101" pitchFamily="18" charset="-127"/>
+                <a:ea typeface="KoPub돋움체 Light" panose="02020603020101020101" pitchFamily="18" charset="-127"/>
               </a:rPr>
               <a:t>] [</a:t>
             </a:r>
             <a:r>
-              <a:rPr lang="ko-KR" altLang="en-US" sz="800" b="1" dirty="0">
-                <a:latin typeface="KoPub돋움체 Bold" panose="00000800000000000000" pitchFamily="2" charset="-127"/>
-                <a:ea typeface="KoPub돋움체 Bold" panose="00000800000000000000" pitchFamily="2" charset="-127"/>
+              <a:rPr lang="ko-KR" altLang="en-US" sz="700" b="1" dirty="0">
+                <a:latin typeface="KoPub돋움체 Light" panose="02020603020101020101" pitchFamily="18" charset="-127"/>
+                <a:ea typeface="KoPub돋움체 Light" panose="02020603020101020101" pitchFamily="18" charset="-127"/>
               </a:rPr>
               <a:t>답장</a:t>
             </a:r>
             <a:r>
-              <a:rPr lang="en-US" altLang="ko-KR" sz="800" b="1" dirty="0">
-                <a:latin typeface="KoPub돋움체 Bold" panose="00000800000000000000" pitchFamily="2" charset="-127"/>
-                <a:ea typeface="KoPub돋움체 Bold" panose="00000800000000000000" pitchFamily="2" charset="-127"/>
+              <a:rPr lang="en-US" altLang="ko-KR" sz="700" b="1" dirty="0">
+                <a:latin typeface="KoPub돋움체 Light" panose="02020603020101020101" pitchFamily="18" charset="-127"/>
+                <a:ea typeface="KoPub돋움체 Light" panose="02020603020101020101" pitchFamily="18" charset="-127"/>
               </a:rPr>
               <a:t>(Reply)]</a:t>
             </a:r>
             <a:r>
-              <a:rPr lang="ko-KR" altLang="en-US" sz="800" b="1" dirty="0">
-                <a:latin typeface="KoPub돋움체 Bold" panose="00000800000000000000" pitchFamily="2" charset="-127"/>
-                <a:ea typeface="KoPub돋움체 Bold" panose="00000800000000000000" pitchFamily="2" charset="-127"/>
+              <a:rPr lang="ko-KR" altLang="en-US" sz="700" b="1" dirty="0">
+                <a:latin typeface="KoPub돋움체 Light" panose="02020603020101020101" pitchFamily="18" charset="-127"/>
+                <a:ea typeface="KoPub돋움체 Light" panose="02020603020101020101" pitchFamily="18" charset="-127"/>
               </a:rPr>
               <a:t>기능 필수 활용</a:t>
             </a:r>
@@ -9025,58 +9140,58 @@
               <a:buChar char="•"/>
             </a:pPr>
             <a:r>
-              <a:rPr lang="en-US" altLang="ko-KR" sz="800" b="1" dirty="0">
-                <a:latin typeface="KoPub돋움체 Bold" panose="00000800000000000000" pitchFamily="2" charset="-127"/>
-                <a:ea typeface="KoPub돋움체 Bold" panose="00000800000000000000" pitchFamily="2" charset="-127"/>
+              <a:rPr lang="en-US" altLang="ko-KR" sz="700" b="1" dirty="0">
+                <a:latin typeface="KoPub돋움체 Light" panose="02020603020101020101" pitchFamily="18" charset="-127"/>
+                <a:ea typeface="KoPub돋움체 Light" panose="02020603020101020101" pitchFamily="18" charset="-127"/>
               </a:rPr>
               <a:t>[</a:t>
             </a:r>
             <a:r>
-              <a:rPr lang="ko-KR" altLang="en-US" sz="800" b="1" dirty="0">
-                <a:latin typeface="KoPub돋움체 Bold" panose="00000800000000000000" pitchFamily="2" charset="-127"/>
-                <a:ea typeface="KoPub돋움체 Bold" panose="00000800000000000000" pitchFamily="2" charset="-127"/>
+              <a:rPr lang="ko-KR" altLang="en-US" sz="700" b="1" dirty="0">
+                <a:latin typeface="KoPub돋움체 Light" panose="02020603020101020101" pitchFamily="18" charset="-127"/>
+                <a:ea typeface="KoPub돋움체 Light" panose="02020603020101020101" pitchFamily="18" charset="-127"/>
               </a:rPr>
               <a:t>대응</a:t>
             </a:r>
             <a:r>
-              <a:rPr lang="en-US" altLang="ko-KR" sz="800" b="1" dirty="0">
-                <a:latin typeface="KoPub돋움체 Bold" panose="00000800000000000000" pitchFamily="2" charset="-127"/>
-                <a:ea typeface="KoPub돋움체 Bold" panose="00000800000000000000" pitchFamily="2" charset="-127"/>
+              <a:rPr lang="en-US" altLang="ko-KR" sz="700" b="1" dirty="0">
+                <a:latin typeface="KoPub돋움체 Light" panose="02020603020101020101" pitchFamily="18" charset="-127"/>
+                <a:ea typeface="KoPub돋움체 Light" panose="02020603020101020101" pitchFamily="18" charset="-127"/>
               </a:rPr>
               <a:t>] </a:t>
             </a:r>
             <a:r>
-              <a:rPr lang="ko-KR" altLang="en-US" sz="800" b="1" dirty="0">
-                <a:latin typeface="KoPub돋움체 Bold" panose="00000800000000000000" pitchFamily="2" charset="-127"/>
-                <a:ea typeface="KoPub돋움체 Bold" panose="00000800000000000000" pitchFamily="2" charset="-127"/>
+              <a:rPr lang="ko-KR" altLang="en-US" sz="700" b="1" dirty="0">
+                <a:latin typeface="KoPub돋움체 Light" panose="02020603020101020101" pitchFamily="18" charset="-127"/>
+                <a:ea typeface="KoPub돋움체 Light" panose="02020603020101020101" pitchFamily="18" charset="-127"/>
               </a:rPr>
               <a:t>메신저 응답 </a:t>
             </a:r>
             <a:r>
-              <a:rPr lang="en-US" altLang="ko-KR" sz="800" b="1" dirty="0">
-                <a:latin typeface="KoPub돋움체 Bold" panose="00000800000000000000" pitchFamily="2" charset="-127"/>
-                <a:ea typeface="KoPub돋움체 Bold" panose="00000800000000000000" pitchFamily="2" charset="-127"/>
+              <a:rPr lang="en-US" altLang="ko-KR" sz="700" b="1" dirty="0">
+                <a:latin typeface="KoPub돋움체 Light" panose="02020603020101020101" pitchFamily="18" charset="-127"/>
+                <a:ea typeface="KoPub돋움체 Light" panose="02020603020101020101" pitchFamily="18" charset="-127"/>
               </a:rPr>
               <a:t>'10</a:t>
             </a:r>
             <a:r>
-              <a:rPr lang="ko-KR" altLang="en-US" sz="800" b="1" dirty="0">
-                <a:latin typeface="KoPub돋움체 Bold" panose="00000800000000000000" pitchFamily="2" charset="-127"/>
-                <a:ea typeface="KoPub돋움체 Bold" panose="00000800000000000000" pitchFamily="2" charset="-127"/>
+              <a:rPr lang="ko-KR" altLang="en-US" sz="700" b="1" dirty="0">
+                <a:latin typeface="KoPub돋움체 Light" panose="02020603020101020101" pitchFamily="18" charset="-127"/>
+                <a:ea typeface="KoPub돋움체 Light" panose="02020603020101020101" pitchFamily="18" charset="-127"/>
               </a:rPr>
               <a:t>분 룰</a:t>
             </a:r>
             <a:r>
-              <a:rPr lang="en-US" altLang="ko-KR" sz="800" b="1" dirty="0">
-                <a:latin typeface="KoPub돋움체 Bold" panose="00000800000000000000" pitchFamily="2" charset="-127"/>
-                <a:ea typeface="KoPub돋움체 Bold" panose="00000800000000000000" pitchFamily="2" charset="-127"/>
+              <a:rPr lang="en-US" altLang="ko-KR" sz="700" b="1" dirty="0">
+                <a:latin typeface="KoPub돋움체 Light" panose="02020603020101020101" pitchFamily="18" charset="-127"/>
+                <a:ea typeface="KoPub돋움체 Light" panose="02020603020101020101" pitchFamily="18" charset="-127"/>
               </a:rPr>
               <a:t>(Rule)' </a:t>
             </a:r>
             <a:r>
-              <a:rPr lang="ko-KR" altLang="en-US" sz="800" b="1" dirty="0">
-                <a:latin typeface="KoPub돋움체 Bold" panose="00000800000000000000" pitchFamily="2" charset="-127"/>
-                <a:ea typeface="KoPub돋움체 Bold" panose="00000800000000000000" pitchFamily="2" charset="-127"/>
+              <a:rPr lang="ko-KR" altLang="en-US" sz="700" b="1" dirty="0">
+                <a:latin typeface="KoPub돋움체 Light" panose="02020603020101020101" pitchFamily="18" charset="-127"/>
+                <a:ea typeface="KoPub돋움체 Light" panose="02020603020101020101" pitchFamily="18" charset="-127"/>
               </a:rPr>
               <a:t>적용</a:t>
             </a:r>
@@ -9086,7 +9201,7 @@
     </p:spTree>
     <p:extLst>
       <p:ext uri="{BB962C8B-B14F-4D97-AF65-F5344CB8AC3E}">
-        <p14:creationId xmlns:p14="http://schemas.microsoft.com/office/powerpoint/2010/main" val="3268644569"/>
+        <p14:creationId xmlns:p14="http://schemas.microsoft.com/office/powerpoint/2010/main" val="3869668911"/>
       </p:ext>
     </p:extLst>
   </p:cSld>
@@ -9104,7 +9219,7 @@
         <p:cNvPr id="1" name="">
           <a:extLst>
             <a:ext uri="{FF2B5EF4-FFF2-40B4-BE49-F238E27FC236}">
-              <a16:creationId xmlns:a16="http://schemas.microsoft.com/office/drawing/2014/main" id="{97F6C89A-D6B5-51CF-8CB2-D187420BD9EC}"/>
+              <a16:creationId xmlns:a16="http://schemas.microsoft.com/office/drawing/2014/main" id="{EF66A5B3-163B-6F07-10F6-516CFF5236F4}"/>
             </a:ext>
           </a:extLst>
         </p:cNvPr>
@@ -9124,7 +9239,7 @@
           <p:cNvPr id="3" name="TextBox 2">
             <a:extLst>
               <a:ext uri="{FF2B5EF4-FFF2-40B4-BE49-F238E27FC236}">
-                <a16:creationId xmlns:a16="http://schemas.microsoft.com/office/drawing/2014/main" id="{E0D98137-0338-4CA6-6A50-A070AA4D2BC5}"/>
+                <a16:creationId xmlns:a16="http://schemas.microsoft.com/office/drawing/2014/main" id="{1A26FCE8-5EF0-0DF6-F8B5-C649DC205363}"/>
               </a:ext>
             </a:extLst>
           </p:cNvPr>
@@ -9162,7 +9277,7 @@
           <p:cNvPr id="17" name="그룹 16">
             <a:extLst>
               <a:ext uri="{FF2B5EF4-FFF2-40B4-BE49-F238E27FC236}">
-                <a16:creationId xmlns:a16="http://schemas.microsoft.com/office/drawing/2014/main" id="{4BEF0CA0-0403-BEFD-777A-E8972AECCADB}"/>
+                <a16:creationId xmlns:a16="http://schemas.microsoft.com/office/drawing/2014/main" id="{1A49BD73-09B6-9576-4A99-AEFE0F7F42C3}"/>
               </a:ext>
             </a:extLst>
           </p:cNvPr>
@@ -9182,7 +9297,7 @@
             <p:cNvPr id="5" name="그림 4" descr="패턴, 사각형, 예술, 직사각형이(가) 표시된 사진&#10;&#10;AI 생성 콘텐츠는 정확하지 않을 수 있습니다.">
               <a:extLst>
                 <a:ext uri="{FF2B5EF4-FFF2-40B4-BE49-F238E27FC236}">
-                  <a16:creationId xmlns:a16="http://schemas.microsoft.com/office/drawing/2014/main" id="{15B8EB17-8BAA-C2BE-FD82-AE2F9A5965FD}"/>
+                  <a16:creationId xmlns:a16="http://schemas.microsoft.com/office/drawing/2014/main" id="{237758EC-8039-A3EA-24AD-2B5B0B1F60A1}"/>
                 </a:ext>
               </a:extLst>
             </p:cNvPr>
@@ -9212,7 +9327,7 @@
             <p:cNvPr id="13" name="L 도형 12">
               <a:extLst>
                 <a:ext uri="{FF2B5EF4-FFF2-40B4-BE49-F238E27FC236}">
-                  <a16:creationId xmlns:a16="http://schemas.microsoft.com/office/drawing/2014/main" id="{F494371F-7A26-9C08-8A07-93D49DC5A8E7}"/>
+                  <a16:creationId xmlns:a16="http://schemas.microsoft.com/office/drawing/2014/main" id="{1386BAC4-C977-A7C2-6D4E-8D1313D44B3B}"/>
                 </a:ext>
               </a:extLst>
             </p:cNvPr>
@@ -9269,7 +9384,7 @@
             <p:cNvPr id="14" name="L 도형 13">
               <a:extLst>
                 <a:ext uri="{FF2B5EF4-FFF2-40B4-BE49-F238E27FC236}">
-                  <a16:creationId xmlns:a16="http://schemas.microsoft.com/office/drawing/2014/main" id="{645ACC24-6AE5-4959-5566-0CBBB70100A5}"/>
+                  <a16:creationId xmlns:a16="http://schemas.microsoft.com/office/drawing/2014/main" id="{925A8E91-1465-F155-CE7D-07F92B383DAE}"/>
                 </a:ext>
               </a:extLst>
             </p:cNvPr>
@@ -9326,7 +9441,7 @@
             <p:cNvPr id="15" name="L 도형 14">
               <a:extLst>
                 <a:ext uri="{FF2B5EF4-FFF2-40B4-BE49-F238E27FC236}">
-                  <a16:creationId xmlns:a16="http://schemas.microsoft.com/office/drawing/2014/main" id="{1DA0A7B9-8209-8B1B-EE43-1AD93BA67554}"/>
+                  <a16:creationId xmlns:a16="http://schemas.microsoft.com/office/drawing/2014/main" id="{C1BBBB1F-2080-F657-B9D3-EDC41813B5EF}"/>
                 </a:ext>
               </a:extLst>
             </p:cNvPr>
@@ -9383,7 +9498,7 @@
             <p:cNvPr id="16" name="L 도형 15">
               <a:extLst>
                 <a:ext uri="{FF2B5EF4-FFF2-40B4-BE49-F238E27FC236}">
-                  <a16:creationId xmlns:a16="http://schemas.microsoft.com/office/drawing/2014/main" id="{D795E057-2E13-7630-328A-0BB064DFBF67}"/>
+                  <a16:creationId xmlns:a16="http://schemas.microsoft.com/office/drawing/2014/main" id="{C255AB45-9E19-5135-2840-6E83A0CEA2B5}"/>
                 </a:ext>
               </a:extLst>
             </p:cNvPr>
@@ -9441,7 +9556,7 @@
           <p:cNvPr id="18" name="그룹 17">
             <a:extLst>
               <a:ext uri="{FF2B5EF4-FFF2-40B4-BE49-F238E27FC236}">
-                <a16:creationId xmlns:a16="http://schemas.microsoft.com/office/drawing/2014/main" id="{6EED756D-9CD3-3B29-4674-550E1C8C98DD}"/>
+                <a16:creationId xmlns:a16="http://schemas.microsoft.com/office/drawing/2014/main" id="{8C3E1EF8-8C3B-A192-11B5-BED425D3D79C}"/>
               </a:ext>
             </a:extLst>
           </p:cNvPr>
@@ -9461,7 +9576,7 @@
             <p:cNvPr id="4" name="TextBox 3">
               <a:extLst>
                 <a:ext uri="{FF2B5EF4-FFF2-40B4-BE49-F238E27FC236}">
-                  <a16:creationId xmlns:a16="http://schemas.microsoft.com/office/drawing/2014/main" id="{BC64E581-7B5B-1CDC-0A00-E8F5F0F96A78}"/>
+                  <a16:creationId xmlns:a16="http://schemas.microsoft.com/office/drawing/2014/main" id="{A9D039A7-DA18-313A-AF87-12621352F5CE}"/>
                 </a:ext>
               </a:extLst>
             </p:cNvPr>
@@ -9536,7 +9651,7 @@
             <p:cNvPr id="6" name="TextBox 5">
               <a:extLst>
                 <a:ext uri="{FF2B5EF4-FFF2-40B4-BE49-F238E27FC236}">
-                  <a16:creationId xmlns:a16="http://schemas.microsoft.com/office/drawing/2014/main" id="{0010CCEB-4FBA-4B4D-7B2F-49134F48AF21}"/>
+                  <a16:creationId xmlns:a16="http://schemas.microsoft.com/office/drawing/2014/main" id="{DEEE7C7E-6934-B627-6EC0-48367D0769B1}"/>
                 </a:ext>
               </a:extLst>
             </p:cNvPr>
@@ -9603,7 +9718,7 @@
             <p:cNvPr id="10" name="그림 9">
               <a:extLst>
                 <a:ext uri="{FF2B5EF4-FFF2-40B4-BE49-F238E27FC236}">
-                  <a16:creationId xmlns:a16="http://schemas.microsoft.com/office/drawing/2014/main" id="{1F2E85FA-B5B4-0204-C020-CEF2963F05F8}"/>
+                  <a16:creationId xmlns:a16="http://schemas.microsoft.com/office/drawing/2014/main" id="{22CDF7ED-65DD-B2AB-0D3A-2876557659C7}"/>
                 </a:ext>
               </a:extLst>
             </p:cNvPr>
@@ -9633,7 +9748,7 @@
             <p:cNvPr id="30" name="그림 29">
               <a:extLst>
                 <a:ext uri="{FF2B5EF4-FFF2-40B4-BE49-F238E27FC236}">
-                  <a16:creationId xmlns:a16="http://schemas.microsoft.com/office/drawing/2014/main" id="{9B6092DC-1B2C-E575-FF2C-2EC2A7B8081B}"/>
+                  <a16:creationId xmlns:a16="http://schemas.microsoft.com/office/drawing/2014/main" id="{CACE4F19-6C03-B4A0-12DF-B80E74EF21DC}"/>
                 </a:ext>
               </a:extLst>
             </p:cNvPr>
@@ -9664,7 +9779,7 @@
           <p:cNvPr id="31" name="TextBox 30">
             <a:extLst>
               <a:ext uri="{FF2B5EF4-FFF2-40B4-BE49-F238E27FC236}">
-                <a16:creationId xmlns:a16="http://schemas.microsoft.com/office/drawing/2014/main" id="{3A4A9F9E-6719-4DA0-066E-CFFB141C3E77}"/>
+                <a16:creationId xmlns:a16="http://schemas.microsoft.com/office/drawing/2014/main" id="{8286C7F5-77BB-B584-5E2E-82705B55B19B}"/>
               </a:ext>
             </a:extLst>
           </p:cNvPr>
@@ -9674,7 +9789,7 @@
         <p:spPr>
           <a:xfrm>
             <a:off x="82843" y="781989"/>
-            <a:ext cx="2592376" cy="790345"/>
+            <a:ext cx="2258952" cy="786882"/>
           </a:xfrm>
           <a:prstGeom prst="rect">
             <a:avLst/>
@@ -9698,86 +9813,86 @@
               <a:buChar char="•"/>
             </a:pPr>
             <a:r>
-              <a:rPr lang="en-US" altLang="ko-KR" sz="800" b="1" dirty="0">
-                <a:latin typeface="KoPub돋움체 Bold" panose="00000800000000000000" pitchFamily="2" charset="-127"/>
-                <a:ea typeface="KoPub돋움체 Bold" panose="00000800000000000000" pitchFamily="2" charset="-127"/>
+              <a:rPr lang="en-US" altLang="ko-KR" sz="700" b="1" dirty="0">
+                <a:latin typeface="KoPub돋움체 Light" panose="02020603020101020101" pitchFamily="18" charset="-127"/>
+                <a:ea typeface="KoPub돋움체 Light" panose="02020603020101020101" pitchFamily="18" charset="-127"/>
               </a:rPr>
               <a:t>[</a:t>
             </a:r>
             <a:r>
-              <a:rPr lang="ko-KR" altLang="en-US" sz="800" b="1" dirty="0">
-                <a:latin typeface="KoPub돋움체 Bold" panose="00000800000000000000" pitchFamily="2" charset="-127"/>
-                <a:ea typeface="KoPub돋움체 Bold" panose="00000800000000000000" pitchFamily="2" charset="-127"/>
+              <a:rPr lang="ko-KR" altLang="en-US" sz="700" b="1" dirty="0">
+                <a:latin typeface="KoPub돋움체 Light" panose="02020603020101020101" pitchFamily="18" charset="-127"/>
+                <a:ea typeface="KoPub돋움체 Light" panose="02020603020101020101" pitchFamily="18" charset="-127"/>
               </a:rPr>
               <a:t>식별</a:t>
             </a:r>
             <a:r>
-              <a:rPr lang="en-US" altLang="ko-KR" sz="800" b="1" dirty="0">
-                <a:latin typeface="KoPub돋움체 Bold" panose="00000800000000000000" pitchFamily="2" charset="-127"/>
-                <a:ea typeface="KoPub돋움체 Bold" panose="00000800000000000000" pitchFamily="2" charset="-127"/>
+              <a:rPr lang="en-US" altLang="ko-KR" sz="700" b="1" dirty="0">
+                <a:latin typeface="KoPub돋움체 Light" panose="02020603020101020101" pitchFamily="18" charset="-127"/>
+                <a:ea typeface="KoPub돋움체 Light" panose="02020603020101020101" pitchFamily="18" charset="-127"/>
               </a:rPr>
               <a:t>] </a:t>
             </a:r>
             <a:r>
-              <a:rPr lang="ko-KR" altLang="en-US" sz="800" b="1" dirty="0">
-                <a:latin typeface="KoPub돋움체 Bold" panose="00000800000000000000" pitchFamily="2" charset="-127"/>
-                <a:ea typeface="KoPub돋움체 Bold" panose="00000800000000000000" pitchFamily="2" charset="-127"/>
+              <a:rPr lang="ko-KR" altLang="en-US" sz="700" b="1" dirty="0">
+                <a:latin typeface="KoPub돋움체 Light" panose="02020603020101020101" pitchFamily="18" charset="-127"/>
+                <a:ea typeface="KoPub돋움체 Light" panose="02020603020101020101" pitchFamily="18" charset="-127"/>
               </a:rPr>
               <a:t>첫머리 </a:t>
             </a:r>
             <a:r>
-              <a:rPr lang="en-US" altLang="ko-KR" sz="800" b="1" dirty="0">
-                <a:latin typeface="KoPub돋움체 Bold" panose="00000800000000000000" pitchFamily="2" charset="-127"/>
-                <a:ea typeface="KoPub돋움체 Bold" panose="00000800000000000000" pitchFamily="2" charset="-127"/>
+              <a:rPr lang="en-US" altLang="ko-KR" sz="700" b="1" dirty="0">
+                <a:latin typeface="KoPub돋움체 Light" panose="02020603020101020101" pitchFamily="18" charset="-127"/>
+                <a:ea typeface="KoPub돋움체 Light" panose="02020603020101020101" pitchFamily="18" charset="-127"/>
               </a:rPr>
               <a:t>[</a:t>
             </a:r>
             <a:r>
-              <a:rPr lang="ko-KR" altLang="en-US" sz="800" b="1" dirty="0">
-                <a:latin typeface="KoPub돋움체 Bold" panose="00000800000000000000" pitchFamily="2" charset="-127"/>
-                <a:ea typeface="KoPub돋움체 Bold" panose="00000800000000000000" pitchFamily="2" charset="-127"/>
+              <a:rPr lang="ko-KR" altLang="en-US" sz="700" b="1" dirty="0">
+                <a:latin typeface="KoPub돋움체 Light" panose="02020603020101020101" pitchFamily="18" charset="-127"/>
+                <a:ea typeface="KoPub돋움체 Light" panose="02020603020101020101" pitchFamily="18" charset="-127"/>
               </a:rPr>
               <a:t>병실</a:t>
             </a:r>
             <a:r>
-              <a:rPr lang="en-US" altLang="ko-KR" sz="800" b="1" dirty="0">
-                <a:latin typeface="KoPub돋움체 Bold" panose="00000800000000000000" pitchFamily="2" charset="-127"/>
-                <a:ea typeface="KoPub돋움체 Bold" panose="00000800000000000000" pitchFamily="2" charset="-127"/>
+              <a:rPr lang="en-US" altLang="ko-KR" sz="700" b="1" dirty="0">
+                <a:latin typeface="KoPub돋움체 Light" panose="02020603020101020101" pitchFamily="18" charset="-127"/>
+                <a:ea typeface="KoPub돋움체 Light" panose="02020603020101020101" pitchFamily="18" charset="-127"/>
               </a:rPr>
               <a:t>/</a:t>
             </a:r>
             <a:r>
-              <a:rPr lang="ko-KR" altLang="en-US" sz="800" b="1" dirty="0">
-                <a:latin typeface="KoPub돋움체 Bold" panose="00000800000000000000" pitchFamily="2" charset="-127"/>
-                <a:ea typeface="KoPub돋움체 Bold" panose="00000800000000000000" pitchFamily="2" charset="-127"/>
+              <a:rPr lang="ko-KR" altLang="en-US" sz="700" b="1" dirty="0">
+                <a:latin typeface="KoPub돋움체 Light" panose="02020603020101020101" pitchFamily="18" charset="-127"/>
+                <a:ea typeface="KoPub돋움체 Light" panose="02020603020101020101" pitchFamily="18" charset="-127"/>
               </a:rPr>
               <a:t>성함</a:t>
             </a:r>
             <a:r>
-              <a:rPr lang="en-US" altLang="ko-KR" sz="800" b="1" dirty="0">
-                <a:latin typeface="KoPub돋움체 Bold" panose="00000800000000000000" pitchFamily="2" charset="-127"/>
-                <a:ea typeface="KoPub돋움체 Bold" panose="00000800000000000000" pitchFamily="2" charset="-127"/>
+              <a:rPr lang="en-US" altLang="ko-KR" sz="700" b="1" dirty="0">
+                <a:latin typeface="KoPub돋움체 Light" panose="02020603020101020101" pitchFamily="18" charset="-127"/>
+                <a:ea typeface="KoPub돋움체 Light" panose="02020603020101020101" pitchFamily="18" charset="-127"/>
               </a:rPr>
               <a:t>/</a:t>
             </a:r>
             <a:r>
-              <a:rPr lang="ko-KR" altLang="en-US" sz="800" b="1" dirty="0">
-                <a:latin typeface="KoPub돋움체 Bold" panose="00000800000000000000" pitchFamily="2" charset="-127"/>
-                <a:ea typeface="KoPub돋움체 Bold" panose="00000800000000000000" pitchFamily="2" charset="-127"/>
+              <a:rPr lang="ko-KR" altLang="en-US" sz="700" b="1" dirty="0">
+                <a:latin typeface="KoPub돋움체 Light" panose="02020603020101020101" pitchFamily="18" charset="-127"/>
+                <a:ea typeface="KoPub돋움체 Light" panose="02020603020101020101" pitchFamily="18" charset="-127"/>
               </a:rPr>
               <a:t>사유</a:t>
             </a:r>
             <a:r>
-              <a:rPr lang="en-US" altLang="ko-KR" sz="800" b="1" dirty="0">
-                <a:latin typeface="KoPub돋움체 Bold" panose="00000800000000000000" pitchFamily="2" charset="-127"/>
-                <a:ea typeface="KoPub돋움체 Bold" panose="00000800000000000000" pitchFamily="2" charset="-127"/>
+              <a:rPr lang="en-US" altLang="ko-KR" sz="700" b="1" dirty="0">
+                <a:latin typeface="KoPub돋움체 Light" panose="02020603020101020101" pitchFamily="18" charset="-127"/>
+                <a:ea typeface="KoPub돋움체 Light" panose="02020603020101020101" pitchFamily="18" charset="-127"/>
               </a:rPr>
               <a:t>]</a:t>
             </a:r>
             <a:r>
-              <a:rPr lang="ko-KR" altLang="en-US" sz="800" b="1" dirty="0">
-                <a:latin typeface="KoPub돋움체 Bold" panose="00000800000000000000" pitchFamily="2" charset="-127"/>
-                <a:ea typeface="KoPub돋움체 Bold" panose="00000800000000000000" pitchFamily="2" charset="-127"/>
+              <a:rPr lang="ko-KR" altLang="en-US" sz="700" b="1" dirty="0">
+                <a:latin typeface="KoPub돋움체 Light" panose="02020603020101020101" pitchFamily="18" charset="-127"/>
+                <a:ea typeface="KoPub돋움체 Light" panose="02020603020101020101" pitchFamily="18" charset="-127"/>
               </a:rPr>
               <a:t>필수 기재</a:t>
             </a:r>
@@ -9794,65 +9909,65 @@
               <a:buChar char="•"/>
             </a:pPr>
             <a:r>
-              <a:rPr lang="en-US" altLang="ko-KR" sz="800" b="1" dirty="0">
-                <a:latin typeface="KoPub돋움체 Bold" panose="00000800000000000000" pitchFamily="2" charset="-127"/>
-                <a:ea typeface="KoPub돋움체 Bold" panose="00000800000000000000" pitchFamily="2" charset="-127"/>
+              <a:rPr lang="en-US" altLang="ko-KR" sz="700" b="1" dirty="0">
+                <a:latin typeface="KoPub돋움체 Light" panose="02020603020101020101" pitchFamily="18" charset="-127"/>
+                <a:ea typeface="KoPub돋움체 Light" panose="02020603020101020101" pitchFamily="18" charset="-127"/>
               </a:rPr>
               <a:t>[</a:t>
             </a:r>
             <a:r>
-              <a:rPr lang="ko-KR" altLang="en-US" sz="800" b="1" dirty="0">
-                <a:latin typeface="KoPub돋움체 Bold" panose="00000800000000000000" pitchFamily="2" charset="-127"/>
-                <a:ea typeface="KoPub돋움체 Bold" panose="00000800000000000000" pitchFamily="2" charset="-127"/>
+              <a:rPr lang="ko-KR" altLang="en-US" sz="700" b="1" dirty="0">
+                <a:latin typeface="KoPub돋움체 Light" panose="02020603020101020101" pitchFamily="18" charset="-127"/>
+                <a:ea typeface="KoPub돋움체 Light" panose="02020603020101020101" pitchFamily="18" charset="-127"/>
               </a:rPr>
               <a:t>공유</a:t>
             </a:r>
             <a:r>
-              <a:rPr lang="en-US" altLang="ko-KR" sz="800" b="1" dirty="0">
-                <a:latin typeface="KoPub돋움체 Bold" panose="00000800000000000000" pitchFamily="2" charset="-127"/>
-                <a:ea typeface="KoPub돋움체 Bold" panose="00000800000000000000" pitchFamily="2" charset="-127"/>
+              <a:rPr lang="en-US" altLang="ko-KR" sz="700" b="1" dirty="0">
+                <a:latin typeface="KoPub돋움체 Light" panose="02020603020101020101" pitchFamily="18" charset="-127"/>
+                <a:ea typeface="KoPub돋움체 Light" panose="02020603020101020101" pitchFamily="18" charset="-127"/>
               </a:rPr>
               <a:t>] </a:t>
             </a:r>
             <a:r>
-              <a:rPr lang="ko-KR" altLang="en-US" sz="800" b="1" dirty="0">
-                <a:latin typeface="KoPub돋움체 Bold" panose="00000800000000000000" pitchFamily="2" charset="-127"/>
-                <a:ea typeface="KoPub돋움체 Bold" panose="00000800000000000000" pitchFamily="2" charset="-127"/>
+              <a:rPr lang="ko-KR" altLang="en-US" sz="700" b="1" dirty="0">
+                <a:latin typeface="KoPub돋움체 Light" panose="02020603020101020101" pitchFamily="18" charset="-127"/>
+                <a:ea typeface="KoPub돋움체 Light" panose="02020603020101020101" pitchFamily="18" charset="-127"/>
               </a:rPr>
               <a:t>결정 사항의 </a:t>
             </a:r>
             <a:r>
-              <a:rPr lang="ko-KR" altLang="en-US" sz="800" b="1" dirty="0" err="1">
-                <a:latin typeface="KoPub돋움체 Bold" panose="00000800000000000000" pitchFamily="2" charset="-127"/>
-                <a:ea typeface="KoPub돋움체 Bold" panose="00000800000000000000" pitchFamily="2" charset="-127"/>
+              <a:rPr lang="ko-KR" altLang="en-US" sz="700" b="1" dirty="0" err="1">
+                <a:latin typeface="KoPub돋움체 Light" panose="02020603020101020101" pitchFamily="18" charset="-127"/>
+                <a:ea typeface="KoPub돋움체 Light" panose="02020603020101020101" pitchFamily="18" charset="-127"/>
               </a:rPr>
               <a:t>선제적</a:t>
             </a:r>
             <a:r>
-              <a:rPr lang="ko-KR" altLang="en-US" sz="800" b="1" dirty="0">
-                <a:latin typeface="KoPub돋움체 Bold" panose="00000800000000000000" pitchFamily="2" charset="-127"/>
-                <a:ea typeface="KoPub돋움체 Bold" panose="00000800000000000000" pitchFamily="2" charset="-127"/>
+              <a:rPr lang="ko-KR" altLang="en-US" sz="700" b="1" dirty="0">
+                <a:latin typeface="KoPub돋움체 Light" panose="02020603020101020101" pitchFamily="18" charset="-127"/>
+                <a:ea typeface="KoPub돋움체 Light" panose="02020603020101020101" pitchFamily="18" charset="-127"/>
               </a:rPr>
               <a:t> 알림 </a:t>
             </a:r>
             <a:r>
-              <a:rPr lang="en-US" altLang="ko-KR" sz="800" b="1" dirty="0">
-                <a:latin typeface="KoPub돋움체 Bold" panose="00000800000000000000" pitchFamily="2" charset="-127"/>
-                <a:ea typeface="KoPub돋움체 Bold" panose="00000800000000000000" pitchFamily="2" charset="-127"/>
+              <a:rPr lang="en-US" altLang="ko-KR" sz="700" b="1" dirty="0">
+                <a:latin typeface="KoPub돋움체 Light" panose="02020603020101020101" pitchFamily="18" charset="-127"/>
+                <a:ea typeface="KoPub돋움체 Light" panose="02020603020101020101" pitchFamily="18" charset="-127"/>
               </a:rPr>
               <a:t>(PA ↔ </a:t>
             </a:r>
             <a:r>
-              <a:rPr lang="ko-KR" altLang="en-US" sz="800" b="1" dirty="0">
-                <a:latin typeface="KoPub돋움체 Bold" panose="00000800000000000000" pitchFamily="2" charset="-127"/>
-                <a:ea typeface="KoPub돋움체 Bold" panose="00000800000000000000" pitchFamily="2" charset="-127"/>
+              <a:rPr lang="ko-KR" altLang="en-US" sz="700" b="1" dirty="0">
+                <a:latin typeface="KoPub돋움체 Light" panose="02020603020101020101" pitchFamily="18" charset="-127"/>
+                <a:ea typeface="KoPub돋움체 Light" panose="02020603020101020101" pitchFamily="18" charset="-127"/>
               </a:rPr>
               <a:t>병동</a:t>
             </a:r>
             <a:r>
-              <a:rPr lang="en-US" altLang="ko-KR" sz="800" b="1" dirty="0">
-                <a:latin typeface="KoPub돋움체 Bold" panose="00000800000000000000" pitchFamily="2" charset="-127"/>
-                <a:ea typeface="KoPub돋움체 Bold" panose="00000800000000000000" pitchFamily="2" charset="-127"/>
+              <a:rPr lang="en-US" altLang="ko-KR" sz="700" b="1" dirty="0">
+                <a:latin typeface="KoPub돋움체 Light" panose="02020603020101020101" pitchFamily="18" charset="-127"/>
+                <a:ea typeface="KoPub돋움체 Light" panose="02020603020101020101" pitchFamily="18" charset="-127"/>
               </a:rPr>
               <a:t>)</a:t>
             </a:r>
@@ -9869,93 +9984,93 @@
               <a:buChar char="•"/>
             </a:pPr>
             <a:r>
-              <a:rPr lang="en-US" altLang="ko-KR" sz="800" b="1" dirty="0">
-                <a:latin typeface="KoPub돋움체 Bold" panose="00000800000000000000" pitchFamily="2" charset="-127"/>
-                <a:ea typeface="KoPub돋움체 Bold" panose="00000800000000000000" pitchFamily="2" charset="-127"/>
+              <a:rPr lang="en-US" altLang="ko-KR" sz="700" b="1" dirty="0">
+                <a:latin typeface="KoPub돋움체 Light" panose="02020603020101020101" pitchFamily="18" charset="-127"/>
+                <a:ea typeface="KoPub돋움체 Light" panose="02020603020101020101" pitchFamily="18" charset="-127"/>
               </a:rPr>
               <a:t>[</a:t>
             </a:r>
             <a:r>
-              <a:rPr lang="ko-KR" altLang="en-US" sz="800" b="1" dirty="0">
-                <a:latin typeface="KoPub돋움체 Bold" panose="00000800000000000000" pitchFamily="2" charset="-127"/>
-                <a:ea typeface="KoPub돋움체 Bold" panose="00000800000000000000" pitchFamily="2" charset="-127"/>
+              <a:rPr lang="ko-KR" altLang="en-US" sz="700" b="1" dirty="0">
+                <a:latin typeface="KoPub돋움체 Light" panose="02020603020101020101" pitchFamily="18" charset="-127"/>
+                <a:ea typeface="KoPub돋움체 Light" panose="02020603020101020101" pitchFamily="18" charset="-127"/>
               </a:rPr>
               <a:t>원칙</a:t>
             </a:r>
             <a:r>
-              <a:rPr lang="en-US" altLang="ko-KR" sz="800" b="1" dirty="0">
-                <a:latin typeface="KoPub돋움체 Bold" panose="00000800000000000000" pitchFamily="2" charset="-127"/>
-                <a:ea typeface="KoPub돋움체 Bold" panose="00000800000000000000" pitchFamily="2" charset="-127"/>
+              <a:rPr lang="en-US" altLang="ko-KR" sz="700" b="1" dirty="0">
+                <a:latin typeface="KoPub돋움체 Light" panose="02020603020101020101" pitchFamily="18" charset="-127"/>
+                <a:ea typeface="KoPub돋움체 Light" panose="02020603020101020101" pitchFamily="18" charset="-127"/>
               </a:rPr>
               <a:t>] </a:t>
             </a:r>
             <a:r>
-              <a:rPr lang="ko-KR" altLang="en-US" sz="800" b="1" dirty="0">
-                <a:latin typeface="KoPub돋움체 Bold" panose="00000800000000000000" pitchFamily="2" charset="-127"/>
-                <a:ea typeface="KoPub돋움체 Bold" panose="00000800000000000000" pitchFamily="2" charset="-127"/>
+              <a:rPr lang="ko-KR" altLang="en-US" sz="700" b="1" dirty="0">
+                <a:latin typeface="KoPub돋움체 Light" panose="02020603020101020101" pitchFamily="18" charset="-127"/>
+                <a:ea typeface="KoPub돋움체 Light" panose="02020603020101020101" pitchFamily="18" charset="-127"/>
               </a:rPr>
               <a:t>공식 채널</a:t>
             </a:r>
             <a:r>
-              <a:rPr lang="en-US" altLang="ko-KR" sz="800" b="1" dirty="0">
-                <a:latin typeface="KoPub돋움체 Bold" panose="00000800000000000000" pitchFamily="2" charset="-127"/>
-                <a:ea typeface="KoPub돋움체 Bold" panose="00000800000000000000" pitchFamily="2" charset="-127"/>
+              <a:rPr lang="en-US" altLang="ko-KR" sz="700" b="1" dirty="0">
+                <a:latin typeface="KoPub돋움체 Light" panose="02020603020101020101" pitchFamily="18" charset="-127"/>
+                <a:ea typeface="KoPub돋움체 Light" panose="02020603020101020101" pitchFamily="18" charset="-127"/>
               </a:rPr>
               <a:t>(EMR/</a:t>
             </a:r>
             <a:r>
-              <a:rPr lang="ko-KR" altLang="en-US" sz="800" b="1" dirty="0">
-                <a:latin typeface="KoPub돋움체 Bold" panose="00000800000000000000" pitchFamily="2" charset="-127"/>
-                <a:ea typeface="KoPub돋움체 Bold" panose="00000800000000000000" pitchFamily="2" charset="-127"/>
+              <a:rPr lang="ko-KR" altLang="en-US" sz="700" b="1" dirty="0">
+                <a:latin typeface="KoPub돋움체 Light" panose="02020603020101020101" pitchFamily="18" charset="-127"/>
+                <a:ea typeface="KoPub돋움체 Light" panose="02020603020101020101" pitchFamily="18" charset="-127"/>
               </a:rPr>
               <a:t>유선</a:t>
             </a:r>
             <a:r>
-              <a:rPr lang="en-US" altLang="ko-KR" sz="800" b="1" dirty="0">
-                <a:latin typeface="KoPub돋움체 Bold" panose="00000800000000000000" pitchFamily="2" charset="-127"/>
-                <a:ea typeface="KoPub돋움체 Bold" panose="00000800000000000000" pitchFamily="2" charset="-127"/>
+              <a:rPr lang="en-US" altLang="ko-KR" sz="700" b="1" dirty="0">
+                <a:latin typeface="KoPub돋움체 Light" panose="02020603020101020101" pitchFamily="18" charset="-127"/>
+                <a:ea typeface="KoPub돋움체 Light" panose="02020603020101020101" pitchFamily="18" charset="-127"/>
               </a:rPr>
               <a:t>) </a:t>
             </a:r>
             <a:r>
-              <a:rPr lang="ko-KR" altLang="en-US" sz="800" b="1" dirty="0">
-                <a:latin typeface="KoPub돋움체 Bold" panose="00000800000000000000" pitchFamily="2" charset="-127"/>
-                <a:ea typeface="KoPub돋움체 Bold" panose="00000800000000000000" pitchFamily="2" charset="-127"/>
+              <a:rPr lang="ko-KR" altLang="en-US" sz="700" b="1" dirty="0">
+                <a:latin typeface="KoPub돋움체 Light" panose="02020603020101020101" pitchFamily="18" charset="-127"/>
+                <a:ea typeface="KoPub돋움체 Light" panose="02020603020101020101" pitchFamily="18" charset="-127"/>
               </a:rPr>
               <a:t>활용 </a:t>
             </a:r>
             <a:r>
-              <a:rPr lang="en-US" altLang="ko-KR" sz="800" b="1" dirty="0">
-                <a:latin typeface="KoPub돋움체 Bold" panose="00000800000000000000" pitchFamily="2" charset="-127"/>
-                <a:ea typeface="KoPub돋움체 Bold" panose="00000800000000000000" pitchFamily="2" charset="-127"/>
+              <a:rPr lang="en-US" altLang="ko-KR" sz="700" b="1" dirty="0">
+                <a:latin typeface="KoPub돋움체 Light" panose="02020603020101020101" pitchFamily="18" charset="-127"/>
+                <a:ea typeface="KoPub돋움체 Light" panose="02020603020101020101" pitchFamily="18" charset="-127"/>
               </a:rPr>
               <a:t>(</a:t>
             </a:r>
             <a:r>
-              <a:rPr lang="ko-KR" altLang="en-US" sz="800" b="1" dirty="0">
-                <a:latin typeface="KoPub돋움체 Bold" panose="00000800000000000000" pitchFamily="2" charset="-127"/>
-                <a:ea typeface="KoPub돋움체 Bold" panose="00000800000000000000" pitchFamily="2" charset="-127"/>
+              <a:rPr lang="ko-KR" altLang="en-US" sz="700" b="1" dirty="0">
+                <a:latin typeface="KoPub돋움체 Light" panose="02020603020101020101" pitchFamily="18" charset="-127"/>
+                <a:ea typeface="KoPub돋움체 Light" panose="02020603020101020101" pitchFamily="18" charset="-127"/>
               </a:rPr>
               <a:t>수술</a:t>
             </a:r>
             <a:r>
-              <a:rPr lang="en-US" altLang="ko-KR" sz="800" b="1" dirty="0">
-                <a:latin typeface="KoPub돋움체 Bold" panose="00000800000000000000" pitchFamily="2" charset="-127"/>
-                <a:ea typeface="KoPub돋움체 Bold" panose="00000800000000000000" pitchFamily="2" charset="-127"/>
+              <a:rPr lang="en-US" altLang="ko-KR" sz="700" b="1" dirty="0">
+                <a:latin typeface="KoPub돋움체 Light" panose="02020603020101020101" pitchFamily="18" charset="-127"/>
+                <a:ea typeface="KoPub돋움체 Light" panose="02020603020101020101" pitchFamily="18" charset="-127"/>
               </a:rPr>
               <a:t>, </a:t>
             </a:r>
             <a:r>
-              <a:rPr lang="ko-KR" altLang="en-US" sz="800" b="1" dirty="0">
-                <a:latin typeface="KoPub돋움체 Bold" panose="00000800000000000000" pitchFamily="2" charset="-127"/>
-                <a:ea typeface="KoPub돋움체 Bold" panose="00000800000000000000" pitchFamily="2" charset="-127"/>
+              <a:rPr lang="ko-KR" altLang="en-US" sz="700" b="1" dirty="0">
+                <a:latin typeface="KoPub돋움체 Light" panose="02020603020101020101" pitchFamily="18" charset="-127"/>
+                <a:ea typeface="KoPub돋움체 Light" panose="02020603020101020101" pitchFamily="18" charset="-127"/>
               </a:rPr>
               <a:t>검사 결과 보고</a:t>
             </a:r>
             <a:r>
-              <a:rPr lang="en-US" altLang="ko-KR" sz="800" b="1" dirty="0">
-                <a:latin typeface="KoPub돋움체 Bold" panose="00000800000000000000" pitchFamily="2" charset="-127"/>
-                <a:ea typeface="KoPub돋움체 Bold" panose="00000800000000000000" pitchFamily="2" charset="-127"/>
+              <a:rPr lang="en-US" altLang="ko-KR" sz="700" b="1" dirty="0">
+                <a:latin typeface="KoPub돋움체 Light" panose="02020603020101020101" pitchFamily="18" charset="-127"/>
+                <a:ea typeface="KoPub돋움체 Light" panose="02020603020101020101" pitchFamily="18" charset="-127"/>
               </a:rPr>
               <a:t>)</a:t>
             </a:r>
@@ -9972,44 +10087,44 @@
               <a:buChar char="•"/>
             </a:pPr>
             <a:r>
-              <a:rPr lang="en-US" altLang="ko-KR" sz="800" b="1" dirty="0">
-                <a:latin typeface="KoPub돋움체 Bold" panose="00000800000000000000" pitchFamily="2" charset="-127"/>
-                <a:ea typeface="KoPub돋움체 Bold" panose="00000800000000000000" pitchFamily="2" charset="-127"/>
+              <a:rPr lang="en-US" altLang="ko-KR" sz="700" b="1" dirty="0">
+                <a:latin typeface="KoPub돋움체 Light" panose="02020603020101020101" pitchFamily="18" charset="-127"/>
+                <a:ea typeface="KoPub돋움체 Light" panose="02020603020101020101" pitchFamily="18" charset="-127"/>
               </a:rPr>
               <a:t>[</a:t>
             </a:r>
             <a:r>
-              <a:rPr lang="ko-KR" altLang="en-US" sz="800" b="1" dirty="0">
-                <a:latin typeface="KoPub돋움체 Bold" panose="00000800000000000000" pitchFamily="2" charset="-127"/>
-                <a:ea typeface="KoPub돋움체 Bold" panose="00000800000000000000" pitchFamily="2" charset="-127"/>
+              <a:rPr lang="ko-KR" altLang="en-US" sz="700" b="1" dirty="0">
+                <a:latin typeface="KoPub돋움체 Light" panose="02020603020101020101" pitchFamily="18" charset="-127"/>
+                <a:ea typeface="KoPub돋움체 Light" panose="02020603020101020101" pitchFamily="18" charset="-127"/>
               </a:rPr>
               <a:t>완결</a:t>
             </a:r>
             <a:r>
-              <a:rPr lang="en-US" altLang="ko-KR" sz="800" b="1" dirty="0">
-                <a:latin typeface="KoPub돋움체 Bold" panose="00000800000000000000" pitchFamily="2" charset="-127"/>
-                <a:ea typeface="KoPub돋움체 Bold" panose="00000800000000000000" pitchFamily="2" charset="-127"/>
+              <a:rPr lang="en-US" altLang="ko-KR" sz="700" b="1" dirty="0">
+                <a:latin typeface="KoPub돋움체 Light" panose="02020603020101020101" pitchFamily="18" charset="-127"/>
+                <a:ea typeface="KoPub돋움체 Light" panose="02020603020101020101" pitchFamily="18" charset="-127"/>
               </a:rPr>
               <a:t>] [</a:t>
             </a:r>
             <a:r>
-              <a:rPr lang="ko-KR" altLang="en-US" sz="800" b="1" dirty="0">
-                <a:latin typeface="KoPub돋움체 Bold" panose="00000800000000000000" pitchFamily="2" charset="-127"/>
-                <a:ea typeface="KoPub돋움체 Bold" panose="00000800000000000000" pitchFamily="2" charset="-127"/>
+              <a:rPr lang="ko-KR" altLang="en-US" sz="700" b="1" dirty="0">
+                <a:latin typeface="KoPub돋움체 Light" panose="02020603020101020101" pitchFamily="18" charset="-127"/>
+                <a:ea typeface="KoPub돋움체 Light" panose="02020603020101020101" pitchFamily="18" charset="-127"/>
               </a:rPr>
               <a:t>답장</a:t>
             </a:r>
             <a:r>
-              <a:rPr lang="en-US" altLang="ko-KR" sz="800" b="1" dirty="0">
-                <a:latin typeface="KoPub돋움체 Bold" panose="00000800000000000000" pitchFamily="2" charset="-127"/>
-                <a:ea typeface="KoPub돋움체 Bold" panose="00000800000000000000" pitchFamily="2" charset="-127"/>
+              <a:rPr lang="en-US" altLang="ko-KR" sz="700" b="1" dirty="0">
+                <a:latin typeface="KoPub돋움체 Light" panose="02020603020101020101" pitchFamily="18" charset="-127"/>
+                <a:ea typeface="KoPub돋움체 Light" panose="02020603020101020101" pitchFamily="18" charset="-127"/>
               </a:rPr>
               <a:t>(Reply)]</a:t>
             </a:r>
             <a:r>
-              <a:rPr lang="ko-KR" altLang="en-US" sz="800" b="1" dirty="0">
-                <a:latin typeface="KoPub돋움체 Bold" panose="00000800000000000000" pitchFamily="2" charset="-127"/>
-                <a:ea typeface="KoPub돋움체 Bold" panose="00000800000000000000" pitchFamily="2" charset="-127"/>
+              <a:rPr lang="ko-KR" altLang="en-US" sz="700" b="1" dirty="0">
+                <a:latin typeface="KoPub돋움체 Light" panose="02020603020101020101" pitchFamily="18" charset="-127"/>
+                <a:ea typeface="KoPub돋움체 Light" panose="02020603020101020101" pitchFamily="18" charset="-127"/>
               </a:rPr>
               <a:t>기능 필수 활용</a:t>
             </a:r>
@@ -10026,58 +10141,58 @@
               <a:buChar char="•"/>
             </a:pPr>
             <a:r>
-              <a:rPr lang="en-US" altLang="ko-KR" sz="800" b="1" dirty="0">
-                <a:latin typeface="KoPub돋움체 Bold" panose="00000800000000000000" pitchFamily="2" charset="-127"/>
-                <a:ea typeface="KoPub돋움체 Bold" panose="00000800000000000000" pitchFamily="2" charset="-127"/>
+              <a:rPr lang="en-US" altLang="ko-KR" sz="700" b="1" dirty="0">
+                <a:latin typeface="KoPub돋움체 Light" panose="02020603020101020101" pitchFamily="18" charset="-127"/>
+                <a:ea typeface="KoPub돋움체 Light" panose="02020603020101020101" pitchFamily="18" charset="-127"/>
               </a:rPr>
               <a:t>[</a:t>
             </a:r>
             <a:r>
-              <a:rPr lang="ko-KR" altLang="en-US" sz="800" b="1" dirty="0">
-                <a:latin typeface="KoPub돋움체 Bold" panose="00000800000000000000" pitchFamily="2" charset="-127"/>
-                <a:ea typeface="KoPub돋움체 Bold" panose="00000800000000000000" pitchFamily="2" charset="-127"/>
+              <a:rPr lang="ko-KR" altLang="en-US" sz="700" b="1" dirty="0">
+                <a:latin typeface="KoPub돋움체 Light" panose="02020603020101020101" pitchFamily="18" charset="-127"/>
+                <a:ea typeface="KoPub돋움체 Light" panose="02020603020101020101" pitchFamily="18" charset="-127"/>
               </a:rPr>
               <a:t>대응</a:t>
             </a:r>
             <a:r>
-              <a:rPr lang="en-US" altLang="ko-KR" sz="800" b="1" dirty="0">
-                <a:latin typeface="KoPub돋움체 Bold" panose="00000800000000000000" pitchFamily="2" charset="-127"/>
-                <a:ea typeface="KoPub돋움체 Bold" panose="00000800000000000000" pitchFamily="2" charset="-127"/>
+              <a:rPr lang="en-US" altLang="ko-KR" sz="700" b="1" dirty="0">
+                <a:latin typeface="KoPub돋움체 Light" panose="02020603020101020101" pitchFamily="18" charset="-127"/>
+                <a:ea typeface="KoPub돋움체 Light" panose="02020603020101020101" pitchFamily="18" charset="-127"/>
               </a:rPr>
               <a:t>] </a:t>
             </a:r>
             <a:r>
-              <a:rPr lang="ko-KR" altLang="en-US" sz="800" b="1" dirty="0">
-                <a:latin typeface="KoPub돋움체 Bold" panose="00000800000000000000" pitchFamily="2" charset="-127"/>
-                <a:ea typeface="KoPub돋움체 Bold" panose="00000800000000000000" pitchFamily="2" charset="-127"/>
+              <a:rPr lang="ko-KR" altLang="en-US" sz="700" b="1" dirty="0">
+                <a:latin typeface="KoPub돋움체 Light" panose="02020603020101020101" pitchFamily="18" charset="-127"/>
+                <a:ea typeface="KoPub돋움체 Light" panose="02020603020101020101" pitchFamily="18" charset="-127"/>
               </a:rPr>
               <a:t>메신저 응답 </a:t>
             </a:r>
             <a:r>
-              <a:rPr lang="en-US" altLang="ko-KR" sz="800" b="1" dirty="0">
-                <a:latin typeface="KoPub돋움체 Bold" panose="00000800000000000000" pitchFamily="2" charset="-127"/>
-                <a:ea typeface="KoPub돋움체 Bold" panose="00000800000000000000" pitchFamily="2" charset="-127"/>
+              <a:rPr lang="en-US" altLang="ko-KR" sz="700" b="1" dirty="0">
+                <a:latin typeface="KoPub돋움체 Light" panose="02020603020101020101" pitchFamily="18" charset="-127"/>
+                <a:ea typeface="KoPub돋움체 Light" panose="02020603020101020101" pitchFamily="18" charset="-127"/>
               </a:rPr>
               <a:t>'10</a:t>
             </a:r>
             <a:r>
-              <a:rPr lang="ko-KR" altLang="en-US" sz="800" b="1" dirty="0">
-                <a:latin typeface="KoPub돋움체 Bold" panose="00000800000000000000" pitchFamily="2" charset="-127"/>
-                <a:ea typeface="KoPub돋움체 Bold" panose="00000800000000000000" pitchFamily="2" charset="-127"/>
+              <a:rPr lang="ko-KR" altLang="en-US" sz="700" b="1" dirty="0">
+                <a:latin typeface="KoPub돋움체 Light" panose="02020603020101020101" pitchFamily="18" charset="-127"/>
+                <a:ea typeface="KoPub돋움체 Light" panose="02020603020101020101" pitchFamily="18" charset="-127"/>
               </a:rPr>
               <a:t>분 룰</a:t>
             </a:r>
             <a:r>
-              <a:rPr lang="en-US" altLang="ko-KR" sz="800" b="1" dirty="0">
-                <a:latin typeface="KoPub돋움체 Bold" panose="00000800000000000000" pitchFamily="2" charset="-127"/>
-                <a:ea typeface="KoPub돋움체 Bold" panose="00000800000000000000" pitchFamily="2" charset="-127"/>
+              <a:rPr lang="en-US" altLang="ko-KR" sz="700" b="1" dirty="0">
+                <a:latin typeface="KoPub돋움체 Light" panose="02020603020101020101" pitchFamily="18" charset="-127"/>
+                <a:ea typeface="KoPub돋움체 Light" panose="02020603020101020101" pitchFamily="18" charset="-127"/>
               </a:rPr>
               <a:t>(Rule)' </a:t>
             </a:r>
             <a:r>
-              <a:rPr lang="ko-KR" altLang="en-US" sz="800" b="1" dirty="0">
-                <a:latin typeface="KoPub돋움체 Bold" panose="00000800000000000000" pitchFamily="2" charset="-127"/>
-                <a:ea typeface="KoPub돋움체 Bold" panose="00000800000000000000" pitchFamily="2" charset="-127"/>
+              <a:rPr lang="ko-KR" altLang="en-US" sz="700" b="1" dirty="0">
+                <a:latin typeface="KoPub돋움체 Light" panose="02020603020101020101" pitchFamily="18" charset="-127"/>
+                <a:ea typeface="KoPub돋움체 Light" panose="02020603020101020101" pitchFamily="18" charset="-127"/>
               </a:rPr>
               <a:t>적용</a:t>
             </a:r>
@@ -10087,7 +10202,7 @@
     </p:spTree>
     <p:extLst>
       <p:ext uri="{BB962C8B-B14F-4D97-AF65-F5344CB8AC3E}">
-        <p14:creationId xmlns:p14="http://schemas.microsoft.com/office/powerpoint/2010/main" val="549628975"/>
+        <p14:creationId xmlns:p14="http://schemas.microsoft.com/office/powerpoint/2010/main" val="4143365377"/>
       </p:ext>
     </p:extLst>
   </p:cSld>
